--- a/CV1711-WEEK1-3.pptx
+++ b/CV1711-WEEK1-3.pptx
@@ -5,19 +5,18 @@
     <p:sldMasterId id="2147483648" r:id="rId4"/>
   </p:sldMasterIdLst>
   <p:handoutMasterIdLst>
-    <p:handoutMasterId r:id="rId15"/>
+    <p:handoutMasterId r:id="rId14"/>
   </p:handoutMasterIdLst>
   <p:sldIdLst>
     <p:sldId id="259" r:id="rId5"/>
     <p:sldId id="257" r:id="rId6"/>
-    <p:sldId id="262" r:id="rId7"/>
-    <p:sldId id="263" r:id="rId8"/>
-    <p:sldId id="264" r:id="rId9"/>
-    <p:sldId id="265" r:id="rId10"/>
-    <p:sldId id="267" r:id="rId11"/>
-    <p:sldId id="268" r:id="rId12"/>
-    <p:sldId id="260" r:id="rId13"/>
-    <p:sldId id="269" r:id="rId14"/>
+    <p:sldId id="263" r:id="rId7"/>
+    <p:sldId id="264" r:id="rId8"/>
+    <p:sldId id="265" r:id="rId9"/>
+    <p:sldId id="267" r:id="rId10"/>
+    <p:sldId id="268" r:id="rId11"/>
+    <p:sldId id="260" r:id="rId12"/>
+    <p:sldId id="269" r:id="rId13"/>
   </p:sldIdLst>
   <p:sldSz cx="9144000" cy="5143500" type="screen16x9"/>
   <p:notesSz cx="6858000" cy="9144000"/>
@@ -138,7 +137,7 @@
 <file path=ppt/revisionInfo.xml><?xml version="1.0" encoding="utf-8"?>
 <p1510:revInfo xmlns:a="http://schemas.openxmlformats.org/drawingml/2006/main" xmlns:r="http://schemas.openxmlformats.org/officeDocument/2006/relationships" xmlns:p1510="http://schemas.microsoft.com/office/powerpoint/2015/10/main">
   <p1510:revLst>
-    <p1510:client id="{96D5FD82-C974-4DCE-A590-0E778D7ED507}" v="130" dt="2026-01-11T13:15:59.687"/>
+    <p1510:client id="{09C1D428-5C4E-438D-A0FF-4C4C5614339A}" v="7" dt="2026-08-17T04:55:17.421"/>
   </p1510:revLst>
 </p1510:revInfo>
 </file>
@@ -146,124 +145,92 @@
 <file path=ppt/changesInfos/changesInfo1.xml><?xml version="1.0" encoding="utf-8"?>
 <pc:chgInfo xmlns:a="http://schemas.openxmlformats.org/drawingml/2006/main" xmlns:r="http://schemas.openxmlformats.org/officeDocument/2006/relationships" xmlns:ac="http://schemas.microsoft.com/office/drawing/2013/main/command" xmlns:pc="http://schemas.microsoft.com/office/powerpoint/2013/main/command">
   <pc:docChgLst>
-    <pc:chgData name="#CUI SHUAIWEN#" userId="35a196ea-bcb8-475e-86cf-0b9eaca8a48f" providerId="ADAL" clId="{4D8D382B-DDFF-455F-B5ED-E854E938891F}"/>
-    <pc:docChg chg="undo custSel addSld delSld modSld sldOrd">
-      <pc:chgData name="#CUI SHUAIWEN#" userId="35a196ea-bcb8-475e-86cf-0b9eaca8a48f" providerId="ADAL" clId="{4D8D382B-DDFF-455F-B5ED-E854E938891F}" dt="2026-01-11T13:16:07.335" v="3099" actId="14100"/>
+    <pc:chgData name="#JIANG SHUO#" userId="fb4bb6a7-b10d-4e4a-bf68-a269bc875e77" providerId="ADAL" clId="{FCFA541B-5210-44D5-866D-E58C6E9566A6}"/>
+    <pc:docChg chg="undo custSel delSld modSld">
+      <pc:chgData name="#JIANG SHUO#" userId="fb4bb6a7-b10d-4e4a-bf68-a269bc875e77" providerId="ADAL" clId="{FCFA541B-5210-44D5-866D-E58C6E9566A6}" dt="2026-08-17T05:02:10.857" v="137" actId="14100"/>
       <pc:docMkLst>
         <pc:docMk/>
       </pc:docMkLst>
       <pc:sldChg chg="addSp delSp modSp mod">
-        <pc:chgData name="#CUI SHUAIWEN#" userId="35a196ea-bcb8-475e-86cf-0b9eaca8a48f" providerId="ADAL" clId="{4D8D382B-DDFF-455F-B5ED-E854E938891F}" dt="2026-01-11T11:37:32.557" v="841" actId="1076"/>
+        <pc:chgData name="#JIANG SHUO#" userId="fb4bb6a7-b10d-4e4a-bf68-a269bc875e77" providerId="ADAL" clId="{FCFA541B-5210-44D5-866D-E58C6E9566A6}" dt="2026-08-17T04:55:23.897" v="98" actId="20577"/>
         <pc:sldMkLst>
           <pc:docMk/>
           <pc:sldMk cId="3080595037" sldId="257"/>
         </pc:sldMkLst>
         <pc:spChg chg="add mod">
-          <ac:chgData name="#CUI SHUAIWEN#" userId="35a196ea-bcb8-475e-86cf-0b9eaca8a48f" providerId="ADAL" clId="{4D8D382B-DDFF-455F-B5ED-E854E938891F}" dt="2026-01-11T11:36:59.353" v="794" actId="14100"/>
+          <ac:chgData name="#JIANG SHUO#" userId="fb4bb6a7-b10d-4e4a-bf68-a269bc875e77" providerId="ADAL" clId="{FCFA541B-5210-44D5-866D-E58C6E9566A6}" dt="2026-08-17T04:54:58.628" v="80" actId="554"/>
           <ac:spMkLst>
             <pc:docMk/>
             <pc:sldMk cId="3080595037" sldId="257"/>
-            <ac:spMk id="2" creationId="{F8493E71-F3A4-772F-28C6-B2CB018AAA49}"/>
+            <ac:spMk id="12" creationId="{511F76AD-029F-2C2A-0020-93480B20BDDD}"/>
           </ac:spMkLst>
         </pc:spChg>
-        <pc:spChg chg="del">
-          <ac:chgData name="#CUI SHUAIWEN#" userId="35a196ea-bcb8-475e-86cf-0b9eaca8a48f" providerId="ADAL" clId="{4D8D382B-DDFF-455F-B5ED-E854E938891F}" dt="2026-01-11T10:46:52.201" v="359" actId="478"/>
-          <ac:spMkLst>
-            <pc:docMk/>
-            <pc:sldMk cId="3080595037" sldId="257"/>
-            <ac:spMk id="4" creationId="{3D0E8BCB-BE71-5DA3-9DD8-84BF1C745E37}"/>
-          </ac:spMkLst>
-        </pc:spChg>
-        <pc:spChg chg="del">
-          <ac:chgData name="#CUI SHUAIWEN#" userId="35a196ea-bcb8-475e-86cf-0b9eaca8a48f" providerId="ADAL" clId="{4D8D382B-DDFF-455F-B5ED-E854E938891F}" dt="2026-01-11T10:46:52.201" v="359" actId="478"/>
-          <ac:spMkLst>
-            <pc:docMk/>
-            <pc:sldMk cId="3080595037" sldId="257"/>
-            <ac:spMk id="5" creationId="{19E1E834-D94B-B7B3-3639-55CD79214D40}"/>
-          </ac:spMkLst>
-        </pc:spChg>
-        <pc:spChg chg="del">
-          <ac:chgData name="#CUI SHUAIWEN#" userId="35a196ea-bcb8-475e-86cf-0b9eaca8a48f" providerId="ADAL" clId="{4D8D382B-DDFF-455F-B5ED-E854E938891F}" dt="2026-01-11T10:46:52.201" v="359" actId="478"/>
-          <ac:spMkLst>
-            <pc:docMk/>
-            <pc:sldMk cId="3080595037" sldId="257"/>
-            <ac:spMk id="6" creationId="{09A18EB4-2191-FB49-EE5D-76A759BD3C22}"/>
-          </ac:spMkLst>
-        </pc:spChg>
-        <pc:spChg chg="add del mod">
-          <ac:chgData name="#CUI SHUAIWEN#" userId="35a196ea-bcb8-475e-86cf-0b9eaca8a48f" providerId="ADAL" clId="{4D8D382B-DDFF-455F-B5ED-E854E938891F}" dt="2026-01-11T10:57:37.377" v="535"/>
-          <ac:spMkLst>
-            <pc:docMk/>
-            <pc:sldMk cId="3080595037" sldId="257"/>
-            <ac:spMk id="14" creationId="{AD3ECE23-2E59-EC54-CCF6-767958D743DF}"/>
-          </ac:spMkLst>
-        </pc:spChg>
-        <pc:spChg chg="add mod">
-          <ac:chgData name="#CUI SHUAIWEN#" userId="35a196ea-bcb8-475e-86cf-0b9eaca8a48f" providerId="ADAL" clId="{4D8D382B-DDFF-455F-B5ED-E854E938891F}" dt="2026-01-11T11:06:55.999" v="670" actId="1076"/>
+        <pc:spChg chg="mod">
+          <ac:chgData name="#JIANG SHUO#" userId="fb4bb6a7-b10d-4e4a-bf68-a269bc875e77" providerId="ADAL" clId="{FCFA541B-5210-44D5-866D-E58C6E9566A6}" dt="2026-08-17T04:52:10.163" v="31" actId="164"/>
           <ac:spMkLst>
             <pc:docMk/>
             <pc:sldMk cId="3080595037" sldId="257"/>
             <ac:spMk id="15" creationId="{2E0CF8B3-5715-D3C4-6F09-3CF5D99E57A7}"/>
           </ac:spMkLst>
         </pc:spChg>
-        <pc:spChg chg="add">
-          <ac:chgData name="#CUI SHUAIWEN#" userId="35a196ea-bcb8-475e-86cf-0b9eaca8a48f" providerId="ADAL" clId="{4D8D382B-DDFF-455F-B5ED-E854E938891F}" dt="2026-01-11T10:57:26.444" v="532"/>
-          <ac:spMkLst>
-            <pc:docMk/>
-            <pc:sldMk cId="3080595037" sldId="257"/>
-            <ac:spMk id="16" creationId="{A32D7423-DC3D-5AA7-193A-90FDDE21A6FF}"/>
-          </ac:spMkLst>
-        </pc:spChg>
-        <pc:spChg chg="add del mod">
-          <ac:chgData name="#CUI SHUAIWEN#" userId="35a196ea-bcb8-475e-86cf-0b9eaca8a48f" providerId="ADAL" clId="{4D8D382B-DDFF-455F-B5ED-E854E938891F}" dt="2026-01-11T10:58:06.249" v="561"/>
-          <ac:spMkLst>
-            <pc:docMk/>
-            <pc:sldMk cId="3080595037" sldId="257"/>
-            <ac:spMk id="17" creationId="{8E483CD3-6A99-E320-92DC-254B145A1550}"/>
-          </ac:spMkLst>
-        </pc:spChg>
-        <pc:spChg chg="add mod">
-          <ac:chgData name="#CUI SHUAIWEN#" userId="35a196ea-bcb8-475e-86cf-0b9eaca8a48f" providerId="ADAL" clId="{4D8D382B-DDFF-455F-B5ED-E854E938891F}" dt="2026-01-11T11:09:04.747" v="703" actId="20577"/>
+        <pc:spChg chg="mod">
+          <ac:chgData name="#JIANG SHUO#" userId="fb4bb6a7-b10d-4e4a-bf68-a269bc875e77" providerId="ADAL" clId="{FCFA541B-5210-44D5-866D-E58C6E9566A6}" dt="2026-08-17T04:53:08.482" v="46" actId="1076"/>
           <ac:spMkLst>
             <pc:docMk/>
             <pc:sldMk cId="3080595037" sldId="257"/>
             <ac:spMk id="18" creationId="{C7807775-BBEA-96DA-8E01-8F110858BE17}"/>
           </ac:spMkLst>
         </pc:spChg>
-        <pc:spChg chg="add mod">
-          <ac:chgData name="#CUI SHUAIWEN#" userId="35a196ea-bcb8-475e-86cf-0b9eaca8a48f" providerId="ADAL" clId="{4D8D382B-DDFF-455F-B5ED-E854E938891F}" dt="2026-01-11T11:06:55.999" v="670" actId="1076"/>
+        <pc:spChg chg="mod">
+          <ac:chgData name="#JIANG SHUO#" userId="fb4bb6a7-b10d-4e4a-bf68-a269bc875e77" providerId="ADAL" clId="{FCFA541B-5210-44D5-866D-E58C6E9566A6}" dt="2026-08-17T04:52:24.535" v="36" actId="1076"/>
           <ac:spMkLst>
             <pc:docMk/>
             <pc:sldMk cId="3080595037" sldId="257"/>
             <ac:spMk id="19" creationId="{2F38DBDD-51DC-C560-BA56-E9AB49D4899D}"/>
           </ac:spMkLst>
         </pc:spChg>
-        <pc:spChg chg="add mod">
-          <ac:chgData name="#CUI SHUAIWEN#" userId="35a196ea-bcb8-475e-86cf-0b9eaca8a48f" providerId="ADAL" clId="{4D8D382B-DDFF-455F-B5ED-E854E938891F}" dt="2026-01-11T11:06:55.999" v="670" actId="1076"/>
+        <pc:spChg chg="del">
+          <ac:chgData name="#JIANG SHUO#" userId="fb4bb6a7-b10d-4e4a-bf68-a269bc875e77" providerId="ADAL" clId="{FCFA541B-5210-44D5-866D-E58C6E9566A6}" dt="2026-08-17T04:51:10.966" v="14" actId="478"/>
           <ac:spMkLst>
             <pc:docMk/>
             <pc:sldMk cId="3080595037" sldId="257"/>
             <ac:spMk id="20" creationId="{8862D768-30AA-DF88-8BD4-06058748A30B}"/>
           </ac:spMkLst>
         </pc:spChg>
-        <pc:spChg chg="add del mod">
-          <ac:chgData name="#CUI SHUAIWEN#" userId="35a196ea-bcb8-475e-86cf-0b9eaca8a48f" providerId="ADAL" clId="{4D8D382B-DDFF-455F-B5ED-E854E938891F}" dt="2026-01-11T11:06:13.139" v="667" actId="478"/>
+        <pc:spChg chg="add mod">
+          <ac:chgData name="#JIANG SHUO#" userId="fb4bb6a7-b10d-4e4a-bf68-a269bc875e77" providerId="ADAL" clId="{FCFA541B-5210-44D5-866D-E58C6E9566A6}" dt="2026-08-17T04:55:23.897" v="98" actId="20577"/>
           <ac:spMkLst>
             <pc:docMk/>
             <pc:sldMk cId="3080595037" sldId="257"/>
-            <ac:spMk id="21" creationId="{3E2DB084-B494-F0B6-1FD5-17119586BEA5}"/>
+            <ac:spMk id="21" creationId="{BBF77F4A-2780-3482-C136-9C36362413E0}"/>
           </ac:spMkLst>
         </pc:spChg>
-        <pc:spChg chg="add mod">
-          <ac:chgData name="#CUI SHUAIWEN#" userId="35a196ea-bcb8-475e-86cf-0b9eaca8a48f" providerId="ADAL" clId="{4D8D382B-DDFF-455F-B5ED-E854E938891F}" dt="2026-01-11T11:37:32.557" v="841" actId="1076"/>
-          <ac:spMkLst>
+        <pc:grpChg chg="add mod">
+          <ac:chgData name="#JIANG SHUO#" userId="fb4bb6a7-b10d-4e4a-bf68-a269bc875e77" providerId="ADAL" clId="{FCFA541B-5210-44D5-866D-E58C6E9566A6}" dt="2026-08-17T04:52:11.968" v="32" actId="12788"/>
+          <ac:grpSpMkLst>
             <pc:docMk/>
             <pc:sldMk cId="3080595037" sldId="257"/>
-            <ac:spMk id="22" creationId="{46AAC1AF-CEC5-E792-6D5D-E29615A0067E}"/>
-          </ac:spMkLst>
-        </pc:spChg>
+            <ac:grpSpMk id="5" creationId="{98185946-F4CA-1161-6199-376E74585ED4}"/>
+          </ac:grpSpMkLst>
+        </pc:grpChg>
+        <pc:picChg chg="add del mod">
+          <ac:chgData name="#JIANG SHUO#" userId="fb4bb6a7-b10d-4e4a-bf68-a269bc875e77" providerId="ADAL" clId="{FCFA541B-5210-44D5-866D-E58C6E9566A6}" dt="2026-08-17T04:50:42.312" v="3" actId="478"/>
+          <ac:picMkLst>
+            <pc:docMk/>
+            <pc:sldMk cId="3080595037" sldId="257"/>
+            <ac:picMk id="3" creationId="{0D778998-8783-6D74-AC94-7506BA52751B}"/>
+          </ac:picMkLst>
+        </pc:picChg>
         <pc:picChg chg="add mod">
-          <ac:chgData name="#CUI SHUAIWEN#" userId="35a196ea-bcb8-475e-86cf-0b9eaca8a48f" providerId="ADAL" clId="{4D8D382B-DDFF-455F-B5ED-E854E938891F}" dt="2026-01-11T11:06:55.999" v="670" actId="1076"/>
+          <ac:chgData name="#JIANG SHUO#" userId="fb4bb6a7-b10d-4e4a-bf68-a269bc875e77" providerId="ADAL" clId="{FCFA541B-5210-44D5-866D-E58C6E9566A6}" dt="2026-08-17T04:52:10.163" v="31" actId="164"/>
+          <ac:picMkLst>
+            <pc:docMk/>
+            <pc:sldMk cId="3080595037" sldId="257"/>
+            <ac:picMk id="4" creationId="{9D55B52C-05A0-D480-966E-2476D0722D4B}"/>
+          </ac:picMkLst>
+        </pc:picChg>
+        <pc:picChg chg="del">
+          <ac:chgData name="#JIANG SHUO#" userId="fb4bb6a7-b10d-4e4a-bf68-a269bc875e77" providerId="ADAL" clId="{FCFA541B-5210-44D5-866D-E58C6E9566A6}" dt="2026-08-17T04:50:50.093" v="6" actId="478"/>
           <ac:picMkLst>
             <pc:docMk/>
             <pc:sldMk cId="3080595037" sldId="257"/>
@@ -271,1127 +238,69 @@
           </ac:picMkLst>
         </pc:picChg>
         <pc:picChg chg="add mod">
-          <ac:chgData name="#CUI SHUAIWEN#" userId="35a196ea-bcb8-475e-86cf-0b9eaca8a48f" providerId="ADAL" clId="{4D8D382B-DDFF-455F-B5ED-E854E938891F}" dt="2026-01-11T11:06:55.999" v="670" actId="1076"/>
+          <ac:chgData name="#JIANG SHUO#" userId="fb4bb6a7-b10d-4e4a-bf68-a269bc875e77" providerId="ADAL" clId="{FCFA541B-5210-44D5-866D-E58C6E9566A6}" dt="2026-08-17T04:53:31.026" v="49" actId="1076"/>
+          <ac:picMkLst>
+            <pc:docMk/>
+            <pc:sldMk cId="3080595037" sldId="257"/>
+            <ac:picMk id="8" creationId="{26EA3340-894C-B485-408E-E225B1DD9006}"/>
+          </ac:picMkLst>
+        </pc:picChg>
+        <pc:picChg chg="mod">
+          <ac:chgData name="#JIANG SHUO#" userId="fb4bb6a7-b10d-4e4a-bf68-a269bc875e77" providerId="ADAL" clId="{FCFA541B-5210-44D5-866D-E58C6E9566A6}" dt="2026-08-17T04:52:58.821" v="44" actId="554"/>
           <ac:picMkLst>
             <pc:docMk/>
             <pc:sldMk cId="3080595037" sldId="257"/>
             <ac:picMk id="9" creationId="{BE5B02EF-9788-D660-C106-A23309EE681D}"/>
           </ac:picMkLst>
         </pc:picChg>
-        <pc:picChg chg="add mod">
-          <ac:chgData name="#CUI SHUAIWEN#" userId="35a196ea-bcb8-475e-86cf-0b9eaca8a48f" providerId="ADAL" clId="{4D8D382B-DDFF-455F-B5ED-E854E938891F}" dt="2026-01-11T11:06:55.999" v="670" actId="1076"/>
+        <pc:picChg chg="mod">
+          <ac:chgData name="#JIANG SHUO#" userId="fb4bb6a7-b10d-4e4a-bf68-a269bc875e77" providerId="ADAL" clId="{FCFA541B-5210-44D5-866D-E58C6E9566A6}" dt="2026-08-17T04:52:58.821" v="44" actId="554"/>
           <ac:picMkLst>
             <pc:docMk/>
             <pc:sldMk cId="3080595037" sldId="257"/>
             <ac:picMk id="11" creationId="{F96A8D50-22A3-48FD-13E7-5BCFFA73C501}"/>
           </ac:picMkLst>
         </pc:picChg>
-        <pc:picChg chg="add mod">
-          <ac:chgData name="#CUI SHUAIWEN#" userId="35a196ea-bcb8-475e-86cf-0b9eaca8a48f" providerId="ADAL" clId="{4D8D382B-DDFF-455F-B5ED-E854E938891F}" dt="2026-01-11T11:06:55.999" v="670" actId="1076"/>
+        <pc:picChg chg="del">
+          <ac:chgData name="#JIANG SHUO#" userId="fb4bb6a7-b10d-4e4a-bf68-a269bc875e77" providerId="ADAL" clId="{FCFA541B-5210-44D5-866D-E58C6E9566A6}" dt="2026-08-17T04:51:13.984" v="17" actId="478"/>
           <ac:picMkLst>
             <pc:docMk/>
             <pc:sldMk cId="3080595037" sldId="257"/>
             <ac:picMk id="13" creationId="{7705B83D-B00F-F4F4-5BB2-077EB0431EFE}"/>
           </ac:picMkLst>
         </pc:picChg>
+        <pc:picChg chg="add mod">
+          <ac:chgData name="#JIANG SHUO#" userId="fb4bb6a7-b10d-4e4a-bf68-a269bc875e77" providerId="ADAL" clId="{FCFA541B-5210-44D5-866D-E58C6E9566A6}" dt="2026-08-17T04:54:36.965" v="76" actId="1076"/>
+          <ac:picMkLst>
+            <pc:docMk/>
+            <pc:sldMk cId="3080595037" sldId="257"/>
+            <ac:picMk id="16" creationId="{8F7B0A0C-5E55-05AB-701B-A21FB4630B10}"/>
+          </ac:picMkLst>
+        </pc:picChg>
       </pc:sldChg>
       <pc:sldChg chg="del">
-        <pc:chgData name="#CUI SHUAIWEN#" userId="35a196ea-bcb8-475e-86cf-0b9eaca8a48f" providerId="ADAL" clId="{4D8D382B-DDFF-455F-B5ED-E854E938891F}" dt="2026-01-11T10:39:48.266" v="349" actId="47"/>
-        <pc:sldMkLst>
-          <pc:docMk/>
-          <pc:sldMk cId="3465716937" sldId="258"/>
-        </pc:sldMkLst>
-      </pc:sldChg>
-      <pc:sldChg chg="delSp modSp mod ord">
-        <pc:chgData name="#CUI SHUAIWEN#" userId="35a196ea-bcb8-475e-86cf-0b9eaca8a48f" providerId="ADAL" clId="{4D8D382B-DDFF-455F-B5ED-E854E938891F}" dt="2026-01-11T12:52:50.169" v="2665"/>
-        <pc:sldMkLst>
-          <pc:docMk/>
-          <pc:sldMk cId="4292458085" sldId="260"/>
-        </pc:sldMkLst>
-        <pc:spChg chg="del mod">
-          <ac:chgData name="#CUI SHUAIWEN#" userId="35a196ea-bcb8-475e-86cf-0b9eaca8a48f" providerId="ADAL" clId="{4D8D382B-DDFF-455F-B5ED-E854E938891F}" dt="2026-01-11T12:52:30.178" v="2657" actId="478"/>
-          <ac:spMkLst>
-            <pc:docMk/>
-            <pc:sldMk cId="4292458085" sldId="260"/>
-            <ac:spMk id="3" creationId="{D4CAE0C7-E122-A08C-E429-E2D75BFD63CC}"/>
-          </ac:spMkLst>
-        </pc:spChg>
-        <pc:spChg chg="mod">
-          <ac:chgData name="#CUI SHUAIWEN#" userId="35a196ea-bcb8-475e-86cf-0b9eaca8a48f" providerId="ADAL" clId="{4D8D382B-DDFF-455F-B5ED-E854E938891F}" dt="2026-01-11T12:52:44.639" v="2662" actId="1076"/>
-          <ac:spMkLst>
-            <pc:docMk/>
-            <pc:sldMk cId="4292458085" sldId="260"/>
-            <ac:spMk id="4" creationId="{901E286F-7C71-F46B-FBF4-BD5EDA611CF8}"/>
-          </ac:spMkLst>
-        </pc:spChg>
-        <pc:spChg chg="del mod">
-          <ac:chgData name="#CUI SHUAIWEN#" userId="35a196ea-bcb8-475e-86cf-0b9eaca8a48f" providerId="ADAL" clId="{4D8D382B-DDFF-455F-B5ED-E854E938891F}" dt="2026-01-11T12:52:28.625" v="2656" actId="478"/>
-          <ac:spMkLst>
-            <pc:docMk/>
-            <pc:sldMk cId="4292458085" sldId="260"/>
-            <ac:spMk id="5" creationId="{2DBF9369-C96F-E5D3-A18B-9C5E481A6DB8}"/>
-          </ac:spMkLst>
-        </pc:spChg>
-        <pc:spChg chg="del">
-          <ac:chgData name="#CUI SHUAIWEN#" userId="35a196ea-bcb8-475e-86cf-0b9eaca8a48f" providerId="ADAL" clId="{4D8D382B-DDFF-455F-B5ED-E854E938891F}" dt="2026-01-11T12:52:31.279" v="2658" actId="478"/>
-          <ac:spMkLst>
-            <pc:docMk/>
-            <pc:sldMk cId="4292458085" sldId="260"/>
-            <ac:spMk id="6" creationId="{66149115-8025-FC70-5A3B-09915D2D3673}"/>
-          </ac:spMkLst>
-        </pc:spChg>
-        <pc:picChg chg="mod">
-          <ac:chgData name="#CUI SHUAIWEN#" userId="35a196ea-bcb8-475e-86cf-0b9eaca8a48f" providerId="ADAL" clId="{4D8D382B-DDFF-455F-B5ED-E854E938891F}" dt="2026-01-11T12:52:41.027" v="2661" actId="1076"/>
-          <ac:picMkLst>
-            <pc:docMk/>
-            <pc:sldMk cId="4292458085" sldId="260"/>
-            <ac:picMk id="7" creationId="{103D04DD-25EF-CA22-BFA0-FB7F46D1855E}"/>
-          </ac:picMkLst>
-        </pc:picChg>
-        <pc:cxnChg chg="mod">
-          <ac:chgData name="#CUI SHUAIWEN#" userId="35a196ea-bcb8-475e-86cf-0b9eaca8a48f" providerId="ADAL" clId="{4D8D382B-DDFF-455F-B5ED-E854E938891F}" dt="2026-01-11T12:52:41.027" v="2661" actId="1076"/>
-          <ac:cxnSpMkLst>
-            <pc:docMk/>
-            <pc:sldMk cId="4292458085" sldId="260"/>
-            <ac:cxnSpMk id="9" creationId="{7FB91823-4A3C-5F70-5566-AABF409A5E83}"/>
-          </ac:cxnSpMkLst>
-        </pc:cxnChg>
-        <pc:cxnChg chg="mod">
-          <ac:chgData name="#CUI SHUAIWEN#" userId="35a196ea-bcb8-475e-86cf-0b9eaca8a48f" providerId="ADAL" clId="{4D8D382B-DDFF-455F-B5ED-E854E938891F}" dt="2026-01-11T12:52:41.027" v="2661" actId="1076"/>
-          <ac:cxnSpMkLst>
-            <pc:docMk/>
-            <pc:sldMk cId="4292458085" sldId="260"/>
-            <ac:cxnSpMk id="10" creationId="{44832FBD-F61F-6A7C-CDA9-1A698B6AC9DF}"/>
-          </ac:cxnSpMkLst>
-        </pc:cxnChg>
-        <pc:cxnChg chg="del mod">
-          <ac:chgData name="#CUI SHUAIWEN#" userId="35a196ea-bcb8-475e-86cf-0b9eaca8a48f" providerId="ADAL" clId="{4D8D382B-DDFF-455F-B5ED-E854E938891F}" dt="2026-01-11T12:52:46.356" v="2663" actId="478"/>
-          <ac:cxnSpMkLst>
-            <pc:docMk/>
-            <pc:sldMk cId="4292458085" sldId="260"/>
-            <ac:cxnSpMk id="11" creationId="{E071B56D-1B3D-28AF-5BD6-A2F937F3DCD6}"/>
-          </ac:cxnSpMkLst>
-        </pc:cxnChg>
-      </pc:sldChg>
-      <pc:sldChg chg="del">
-        <pc:chgData name="#CUI SHUAIWEN#" userId="35a196ea-bcb8-475e-86cf-0b9eaca8a48f" providerId="ADAL" clId="{4D8D382B-DDFF-455F-B5ED-E854E938891F}" dt="2026-01-11T12:58:08.106" v="2875" actId="47"/>
-        <pc:sldMkLst>
-          <pc:docMk/>
-          <pc:sldMk cId="616729318" sldId="261"/>
-        </pc:sldMkLst>
-      </pc:sldChg>
-      <pc:sldChg chg="del">
-        <pc:chgData name="#CUI SHUAIWEN#" userId="35a196ea-bcb8-475e-86cf-0b9eaca8a48f" providerId="ADAL" clId="{4D8D382B-DDFF-455F-B5ED-E854E938891F}" dt="2026-01-11T10:39:32.411" v="294" actId="47"/>
-        <pc:sldMkLst>
-          <pc:docMk/>
-          <pc:sldMk cId="946053145" sldId="262"/>
-        </pc:sldMkLst>
-      </pc:sldChg>
-      <pc:sldChg chg="addSp delSp modSp add mod">
-        <pc:chgData name="#CUI SHUAIWEN#" userId="35a196ea-bcb8-475e-86cf-0b9eaca8a48f" providerId="ADAL" clId="{4D8D382B-DDFF-455F-B5ED-E854E938891F}" dt="2026-01-11T11:50:31.614" v="891" actId="1076"/>
+        <pc:chgData name="#JIANG SHUO#" userId="fb4bb6a7-b10d-4e4a-bf68-a269bc875e77" providerId="ADAL" clId="{FCFA541B-5210-44D5-866D-E58C6E9566A6}" dt="2026-08-17T04:55:33.612" v="99" actId="47"/>
         <pc:sldMkLst>
           <pc:docMk/>
           <pc:sldMk cId="2142808599" sldId="262"/>
         </pc:sldMkLst>
-        <pc:spChg chg="add mod">
-          <ac:chgData name="#CUI SHUAIWEN#" userId="35a196ea-bcb8-475e-86cf-0b9eaca8a48f" providerId="ADAL" clId="{4D8D382B-DDFF-455F-B5ED-E854E938891F}" dt="2026-01-11T11:49:58.062" v="858" actId="1076"/>
-          <ac:spMkLst>
-            <pc:docMk/>
-            <pc:sldMk cId="2142808599" sldId="262"/>
-            <ac:spMk id="2" creationId="{47841444-3201-F163-84DA-74C0ED4FC129}"/>
-          </ac:spMkLst>
-        </pc:spChg>
-        <pc:spChg chg="del">
-          <ac:chgData name="#CUI SHUAIWEN#" userId="35a196ea-bcb8-475e-86cf-0b9eaca8a48f" providerId="ADAL" clId="{4D8D382B-DDFF-455F-B5ED-E854E938891F}" dt="2026-01-11T11:08:17.428" v="695" actId="478"/>
-          <ac:spMkLst>
-            <pc:docMk/>
-            <pc:sldMk cId="2142808599" sldId="262"/>
-            <ac:spMk id="4" creationId="{5443EE09-F13A-5D93-2E05-EAA57C15938F}"/>
-          </ac:spMkLst>
-        </pc:spChg>
-        <pc:spChg chg="del">
-          <ac:chgData name="#CUI SHUAIWEN#" userId="35a196ea-bcb8-475e-86cf-0b9eaca8a48f" providerId="ADAL" clId="{4D8D382B-DDFF-455F-B5ED-E854E938891F}" dt="2026-01-11T11:08:17.428" v="695" actId="478"/>
-          <ac:spMkLst>
-            <pc:docMk/>
-            <pc:sldMk cId="2142808599" sldId="262"/>
-            <ac:spMk id="5" creationId="{06541FF1-2AEC-B7AC-4332-42AA7C5C06DC}"/>
-          </ac:spMkLst>
-        </pc:spChg>
-        <pc:spChg chg="del">
-          <ac:chgData name="#CUI SHUAIWEN#" userId="35a196ea-bcb8-475e-86cf-0b9eaca8a48f" providerId="ADAL" clId="{4D8D382B-DDFF-455F-B5ED-E854E938891F}" dt="2026-01-11T11:08:17.428" v="695" actId="478"/>
-          <ac:spMkLst>
-            <pc:docMk/>
-            <pc:sldMk cId="2142808599" sldId="262"/>
-            <ac:spMk id="6" creationId="{E13B4252-65F7-C766-DF6C-402FB34D2626}"/>
-          </ac:spMkLst>
-        </pc:spChg>
-        <pc:spChg chg="add mod">
-          <ac:chgData name="#CUI SHUAIWEN#" userId="35a196ea-bcb8-475e-86cf-0b9eaca8a48f" providerId="ADAL" clId="{4D8D382B-DDFF-455F-B5ED-E854E938891F}" dt="2026-01-11T11:49:35.206" v="848" actId="1076"/>
-          <ac:spMkLst>
-            <pc:docMk/>
-            <pc:sldMk cId="2142808599" sldId="262"/>
-            <ac:spMk id="9" creationId="{C6669A8D-1A32-4C19-F1F4-079B58156073}"/>
-          </ac:spMkLst>
-        </pc:spChg>
-        <pc:spChg chg="add mod">
-          <ac:chgData name="#CUI SHUAIWEN#" userId="35a196ea-bcb8-475e-86cf-0b9eaca8a48f" providerId="ADAL" clId="{4D8D382B-DDFF-455F-B5ED-E854E938891F}" dt="2026-01-11T11:50:19.401" v="889" actId="1076"/>
-          <ac:spMkLst>
-            <pc:docMk/>
-            <pc:sldMk cId="2142808599" sldId="262"/>
-            <ac:spMk id="16" creationId="{CCDE2FC4-8964-8A3B-624B-B43DA6B621CC}"/>
-          </ac:spMkLst>
-        </pc:spChg>
-        <pc:picChg chg="add mod">
-          <ac:chgData name="#CUI SHUAIWEN#" userId="35a196ea-bcb8-475e-86cf-0b9eaca8a48f" providerId="ADAL" clId="{4D8D382B-DDFF-455F-B5ED-E854E938891F}" dt="2026-01-11T11:50:31.614" v="891" actId="1076"/>
-          <ac:picMkLst>
-            <pc:docMk/>
-            <pc:sldMk cId="2142808599" sldId="262"/>
-            <ac:picMk id="7" creationId="{E8CE79E5-B531-BBFD-65B3-F788C5EA4B04}"/>
-          </ac:picMkLst>
-        </pc:picChg>
-        <pc:picChg chg="add mod">
-          <ac:chgData name="#CUI SHUAIWEN#" userId="35a196ea-bcb8-475e-86cf-0b9eaca8a48f" providerId="ADAL" clId="{4D8D382B-DDFF-455F-B5ED-E854E938891F}" dt="2026-01-11T11:49:30.950" v="846" actId="1076"/>
-          <ac:picMkLst>
-            <pc:docMk/>
-            <pc:sldMk cId="2142808599" sldId="262"/>
-            <ac:picMk id="11" creationId="{25A2E567-16DC-2203-16FA-473341A6E54F}"/>
-          </ac:picMkLst>
-        </pc:picChg>
-        <pc:cxnChg chg="add mod">
-          <ac:chgData name="#CUI SHUAIWEN#" userId="35a196ea-bcb8-475e-86cf-0b9eaca8a48f" providerId="ADAL" clId="{4D8D382B-DDFF-455F-B5ED-E854E938891F}" dt="2026-01-11T11:50:26.241" v="890" actId="14100"/>
-          <ac:cxnSpMkLst>
-            <pc:docMk/>
-            <pc:sldMk cId="2142808599" sldId="262"/>
-            <ac:cxnSpMk id="13" creationId="{8D3B8195-0356-14D7-5C4F-683BD79AB4F5}"/>
-          </ac:cxnSpMkLst>
-        </pc:cxnChg>
       </pc:sldChg>
-      <pc:sldChg chg="addSp delSp modSp add mod">
-        <pc:chgData name="#CUI SHUAIWEN#" userId="35a196ea-bcb8-475e-86cf-0b9eaca8a48f" providerId="ADAL" clId="{4D8D382B-DDFF-455F-B5ED-E854E938891F}" dt="2026-01-11T12:35:57.979" v="1791" actId="1076"/>
-        <pc:sldMkLst>
-          <pc:docMk/>
-          <pc:sldMk cId="2216055281" sldId="263"/>
-        </pc:sldMkLst>
-        <pc:spChg chg="mod">
-          <ac:chgData name="#CUI SHUAIWEN#" userId="35a196ea-bcb8-475e-86cf-0b9eaca8a48f" providerId="ADAL" clId="{4D8D382B-DDFF-455F-B5ED-E854E938891F}" dt="2026-01-11T12:07:54.932" v="1339"/>
-          <ac:spMkLst>
-            <pc:docMk/>
-            <pc:sldMk cId="2216055281" sldId="263"/>
-            <ac:spMk id="2" creationId="{D298C58D-D52D-FCA7-1B51-1A2CEE03050E}"/>
-          </ac:spMkLst>
-        </pc:spChg>
-        <pc:spChg chg="add del mod">
-          <ac:chgData name="#CUI SHUAIWEN#" userId="35a196ea-bcb8-475e-86cf-0b9eaca8a48f" providerId="ADAL" clId="{4D8D382B-DDFF-455F-B5ED-E854E938891F}" dt="2026-01-11T11:55:48.600" v="913" actId="478"/>
-          <ac:spMkLst>
-            <pc:docMk/>
-            <pc:sldMk cId="2216055281" sldId="263"/>
-            <ac:spMk id="3" creationId="{8E0C9276-D325-3579-7C60-BDBE2B77C9EE}"/>
-          </ac:spMkLst>
-        </pc:spChg>
-        <pc:spChg chg="add mod">
-          <ac:chgData name="#CUI SHUAIWEN#" userId="35a196ea-bcb8-475e-86cf-0b9eaca8a48f" providerId="ADAL" clId="{4D8D382B-DDFF-455F-B5ED-E854E938891F}" dt="2026-01-11T12:06:11.535" v="1271" actId="1076"/>
-          <ac:spMkLst>
-            <pc:docMk/>
-            <pc:sldMk cId="2216055281" sldId="263"/>
-            <ac:spMk id="4" creationId="{0D682912-1266-CB3D-D1C5-7CFC0365F6D0}"/>
-          </ac:spMkLst>
-        </pc:spChg>
-        <pc:spChg chg="add mod">
-          <ac:chgData name="#CUI SHUAIWEN#" userId="35a196ea-bcb8-475e-86cf-0b9eaca8a48f" providerId="ADAL" clId="{4D8D382B-DDFF-455F-B5ED-E854E938891F}" dt="2026-01-11T11:57:45.088" v="1080" actId="20577"/>
-          <ac:spMkLst>
-            <pc:docMk/>
-            <pc:sldMk cId="2216055281" sldId="263"/>
-            <ac:spMk id="5" creationId="{96129698-AFF7-6063-0385-5F08F3278986}"/>
-          </ac:spMkLst>
-        </pc:spChg>
-        <pc:spChg chg="add mod">
-          <ac:chgData name="#CUI SHUAIWEN#" userId="35a196ea-bcb8-475e-86cf-0b9eaca8a48f" providerId="ADAL" clId="{4D8D382B-DDFF-455F-B5ED-E854E938891F}" dt="2026-01-11T12:06:15.244" v="1272" actId="1076"/>
-          <ac:spMkLst>
-            <pc:docMk/>
-            <pc:sldMk cId="2216055281" sldId="263"/>
-            <ac:spMk id="6" creationId="{B409A6BB-15C7-2711-8EA3-C732A7B86497}"/>
-          </ac:spMkLst>
-        </pc:spChg>
-        <pc:spChg chg="add mod">
-          <ac:chgData name="#CUI SHUAIWEN#" userId="35a196ea-bcb8-475e-86cf-0b9eaca8a48f" providerId="ADAL" clId="{4D8D382B-DDFF-455F-B5ED-E854E938891F}" dt="2026-01-11T12:06:11.535" v="1271" actId="1076"/>
-          <ac:spMkLst>
-            <pc:docMk/>
-            <pc:sldMk cId="2216055281" sldId="263"/>
-            <ac:spMk id="8" creationId="{CCDA77AA-1E84-FDDC-A227-F13D073059D8}"/>
-          </ac:spMkLst>
-        </pc:spChg>
-        <pc:spChg chg="del">
-          <ac:chgData name="#CUI SHUAIWEN#" userId="35a196ea-bcb8-475e-86cf-0b9eaca8a48f" providerId="ADAL" clId="{4D8D382B-DDFF-455F-B5ED-E854E938891F}" dt="2026-01-11T11:51:34.023" v="908" actId="478"/>
-          <ac:spMkLst>
-            <pc:docMk/>
-            <pc:sldMk cId="2216055281" sldId="263"/>
-            <ac:spMk id="9" creationId="{E85C1FB3-74B3-DD29-1380-20FC8BD5C204}"/>
-          </ac:spMkLst>
-        </pc:spChg>
-        <pc:spChg chg="add mod">
-          <ac:chgData name="#CUI SHUAIWEN#" userId="35a196ea-bcb8-475e-86cf-0b9eaca8a48f" providerId="ADAL" clId="{4D8D382B-DDFF-455F-B5ED-E854E938891F}" dt="2026-01-11T12:06:11.535" v="1271" actId="1076"/>
-          <ac:spMkLst>
-            <pc:docMk/>
-            <pc:sldMk cId="2216055281" sldId="263"/>
-            <ac:spMk id="10" creationId="{A85AB8B3-7F27-1917-4748-CFA43063AC92}"/>
-          </ac:spMkLst>
-        </pc:spChg>
-        <pc:spChg chg="add mod">
-          <ac:chgData name="#CUI SHUAIWEN#" userId="35a196ea-bcb8-475e-86cf-0b9eaca8a48f" providerId="ADAL" clId="{4D8D382B-DDFF-455F-B5ED-E854E938891F}" dt="2026-01-11T12:06:07.213" v="1270" actId="1076"/>
-          <ac:spMkLst>
-            <pc:docMk/>
-            <pc:sldMk cId="2216055281" sldId="263"/>
-            <ac:spMk id="12" creationId="{097CDA02-88BE-C270-BAB6-8F0F2511D101}"/>
-          </ac:spMkLst>
-        </pc:spChg>
-        <pc:spChg chg="add mod">
-          <ac:chgData name="#CUI SHUAIWEN#" userId="35a196ea-bcb8-475e-86cf-0b9eaca8a48f" providerId="ADAL" clId="{4D8D382B-DDFF-455F-B5ED-E854E938891F}" dt="2026-01-11T12:06:07.213" v="1270" actId="1076"/>
-          <ac:spMkLst>
-            <pc:docMk/>
-            <pc:sldMk cId="2216055281" sldId="263"/>
-            <ac:spMk id="14" creationId="{4CA0519F-9324-51C3-AC25-E942B388B242}"/>
-          </ac:spMkLst>
-        </pc:spChg>
-        <pc:spChg chg="add mod">
-          <ac:chgData name="#CUI SHUAIWEN#" userId="35a196ea-bcb8-475e-86cf-0b9eaca8a48f" providerId="ADAL" clId="{4D8D382B-DDFF-455F-B5ED-E854E938891F}" dt="2026-01-11T12:06:11.535" v="1271" actId="1076"/>
-          <ac:spMkLst>
-            <pc:docMk/>
-            <pc:sldMk cId="2216055281" sldId="263"/>
-            <ac:spMk id="15" creationId="{D851361F-3EB6-2FF4-5AAA-207E2CD9E518}"/>
-          </ac:spMkLst>
-        </pc:spChg>
-        <pc:spChg chg="del">
-          <ac:chgData name="#CUI SHUAIWEN#" userId="35a196ea-bcb8-475e-86cf-0b9eaca8a48f" providerId="ADAL" clId="{4D8D382B-DDFF-455F-B5ED-E854E938891F}" dt="2026-01-11T11:51:34.023" v="908" actId="478"/>
-          <ac:spMkLst>
-            <pc:docMk/>
-            <pc:sldMk cId="2216055281" sldId="263"/>
-            <ac:spMk id="16" creationId="{D83149C6-E059-5956-A4BC-2B9A1800D93B}"/>
-          </ac:spMkLst>
-        </pc:spChg>
-        <pc:spChg chg="add mod">
-          <ac:chgData name="#CUI SHUAIWEN#" userId="35a196ea-bcb8-475e-86cf-0b9eaca8a48f" providerId="ADAL" clId="{4D8D382B-DDFF-455F-B5ED-E854E938891F}" dt="2026-01-11T12:06:11.535" v="1271" actId="1076"/>
-          <ac:spMkLst>
-            <pc:docMk/>
-            <pc:sldMk cId="2216055281" sldId="263"/>
-            <ac:spMk id="17" creationId="{0289C4A4-31BD-03EA-DA9D-B4906EC734C3}"/>
-          </ac:spMkLst>
-        </pc:spChg>
-        <pc:spChg chg="add mod">
-          <ac:chgData name="#CUI SHUAIWEN#" userId="35a196ea-bcb8-475e-86cf-0b9eaca8a48f" providerId="ADAL" clId="{4D8D382B-DDFF-455F-B5ED-E854E938891F}" dt="2026-01-11T12:06:11.535" v="1271" actId="1076"/>
-          <ac:spMkLst>
-            <pc:docMk/>
-            <pc:sldMk cId="2216055281" sldId="263"/>
-            <ac:spMk id="18" creationId="{CC2CE772-17BC-417B-FC8A-A3DFFA01E1E1}"/>
-          </ac:spMkLst>
-        </pc:spChg>
-        <pc:spChg chg="add mod">
-          <ac:chgData name="#CUI SHUAIWEN#" userId="35a196ea-bcb8-475e-86cf-0b9eaca8a48f" providerId="ADAL" clId="{4D8D382B-DDFF-455F-B5ED-E854E938891F}" dt="2026-01-11T12:06:11.535" v="1271" actId="1076"/>
-          <ac:spMkLst>
-            <pc:docMk/>
-            <pc:sldMk cId="2216055281" sldId="263"/>
-            <ac:spMk id="21" creationId="{94D7280B-EEDA-FBE6-8589-FE47B2373133}"/>
-          </ac:spMkLst>
-        </pc:spChg>
-        <pc:spChg chg="add mod">
-          <ac:chgData name="#CUI SHUAIWEN#" userId="35a196ea-bcb8-475e-86cf-0b9eaca8a48f" providerId="ADAL" clId="{4D8D382B-DDFF-455F-B5ED-E854E938891F}" dt="2026-01-11T12:06:11.535" v="1271" actId="1076"/>
-          <ac:spMkLst>
-            <pc:docMk/>
-            <pc:sldMk cId="2216055281" sldId="263"/>
-            <ac:spMk id="23" creationId="{D0E0E678-4EA1-1957-2B06-EF0421ECB4AB}"/>
-          </ac:spMkLst>
-        </pc:spChg>
-        <pc:spChg chg="add mod">
-          <ac:chgData name="#CUI SHUAIWEN#" userId="35a196ea-bcb8-475e-86cf-0b9eaca8a48f" providerId="ADAL" clId="{4D8D382B-DDFF-455F-B5ED-E854E938891F}" dt="2026-01-11T12:35:57.979" v="1791" actId="1076"/>
-          <ac:spMkLst>
-            <pc:docMk/>
-            <pc:sldMk cId="2216055281" sldId="263"/>
-            <ac:spMk id="26" creationId="{DE6E0194-1261-8F79-C6DC-7ACE2C946E38}"/>
-          </ac:spMkLst>
-        </pc:spChg>
-        <pc:spChg chg="add mod">
-          <ac:chgData name="#CUI SHUAIWEN#" userId="35a196ea-bcb8-475e-86cf-0b9eaca8a48f" providerId="ADAL" clId="{4D8D382B-DDFF-455F-B5ED-E854E938891F}" dt="2026-01-11T12:08:08.789" v="1342" actId="6549"/>
-          <ac:spMkLst>
-            <pc:docMk/>
-            <pc:sldMk cId="2216055281" sldId="263"/>
-            <ac:spMk id="30" creationId="{30E64723-82EB-FC92-F2D9-C4CCA51F16DE}"/>
-          </ac:spMkLst>
-        </pc:spChg>
-        <pc:spChg chg="add mod">
-          <ac:chgData name="#CUI SHUAIWEN#" userId="35a196ea-bcb8-475e-86cf-0b9eaca8a48f" providerId="ADAL" clId="{4D8D382B-DDFF-455F-B5ED-E854E938891F}" dt="2026-01-11T12:06:15.244" v="1272" actId="1076"/>
-          <ac:spMkLst>
-            <pc:docMk/>
-            <pc:sldMk cId="2216055281" sldId="263"/>
-            <ac:spMk id="31" creationId="{74AD7EC5-B3A4-2340-7545-672FCE95D75B}"/>
-          </ac:spMkLst>
-        </pc:spChg>
-        <pc:spChg chg="add mod">
-          <ac:chgData name="#CUI SHUAIWEN#" userId="35a196ea-bcb8-475e-86cf-0b9eaca8a48f" providerId="ADAL" clId="{4D8D382B-DDFF-455F-B5ED-E854E938891F}" dt="2026-01-11T12:06:15.244" v="1272" actId="1076"/>
-          <ac:spMkLst>
-            <pc:docMk/>
-            <pc:sldMk cId="2216055281" sldId="263"/>
-            <ac:spMk id="32" creationId="{942815E1-7A92-4BE8-A76F-E5B6FFD701B4}"/>
-          </ac:spMkLst>
-        </pc:spChg>
-        <pc:spChg chg="add mod">
-          <ac:chgData name="#CUI SHUAIWEN#" userId="35a196ea-bcb8-475e-86cf-0b9eaca8a48f" providerId="ADAL" clId="{4D8D382B-DDFF-455F-B5ED-E854E938891F}" dt="2026-01-11T12:06:15.244" v="1272" actId="1076"/>
-          <ac:spMkLst>
-            <pc:docMk/>
-            <pc:sldMk cId="2216055281" sldId="263"/>
-            <ac:spMk id="33" creationId="{C73DDCA6-2357-8306-C179-227406761CB8}"/>
-          </ac:spMkLst>
-        </pc:spChg>
-        <pc:spChg chg="add mod">
-          <ac:chgData name="#CUI SHUAIWEN#" userId="35a196ea-bcb8-475e-86cf-0b9eaca8a48f" providerId="ADAL" clId="{4D8D382B-DDFF-455F-B5ED-E854E938891F}" dt="2026-01-11T12:06:15.244" v="1272" actId="1076"/>
-          <ac:spMkLst>
-            <pc:docMk/>
-            <pc:sldMk cId="2216055281" sldId="263"/>
-            <ac:spMk id="34" creationId="{84F24F8C-EDB6-F58A-4218-DEC6F421FF04}"/>
-          </ac:spMkLst>
-        </pc:spChg>
-        <pc:spChg chg="add mod">
-          <ac:chgData name="#CUI SHUAIWEN#" userId="35a196ea-bcb8-475e-86cf-0b9eaca8a48f" providerId="ADAL" clId="{4D8D382B-DDFF-455F-B5ED-E854E938891F}" dt="2026-01-11T12:06:15.244" v="1272" actId="1076"/>
-          <ac:spMkLst>
-            <pc:docMk/>
-            <pc:sldMk cId="2216055281" sldId="263"/>
-            <ac:spMk id="35" creationId="{7C0FABC0-14E8-418A-C146-2D4C2AE8861F}"/>
-          </ac:spMkLst>
-        </pc:spChg>
-        <pc:spChg chg="add mod">
-          <ac:chgData name="#CUI SHUAIWEN#" userId="35a196ea-bcb8-475e-86cf-0b9eaca8a48f" providerId="ADAL" clId="{4D8D382B-DDFF-455F-B5ED-E854E938891F}" dt="2026-01-11T12:06:15.244" v="1272" actId="1076"/>
-          <ac:spMkLst>
-            <pc:docMk/>
-            <pc:sldMk cId="2216055281" sldId="263"/>
-            <ac:spMk id="36" creationId="{43054CB8-6655-D51D-9EDC-B3D423517AD8}"/>
-          </ac:spMkLst>
-        </pc:spChg>
-        <pc:spChg chg="add mod">
-          <ac:chgData name="#CUI SHUAIWEN#" userId="35a196ea-bcb8-475e-86cf-0b9eaca8a48f" providerId="ADAL" clId="{4D8D382B-DDFF-455F-B5ED-E854E938891F}" dt="2026-01-11T12:08:12.592" v="1343" actId="20577"/>
-          <ac:spMkLst>
-            <pc:docMk/>
-            <pc:sldMk cId="2216055281" sldId="263"/>
-            <ac:spMk id="39" creationId="{F6B7B7D4-4418-4A3F-19CF-BFD5EE9F3405}"/>
-          </ac:spMkLst>
-        </pc:spChg>
-        <pc:spChg chg="add mod">
-          <ac:chgData name="#CUI SHUAIWEN#" userId="35a196ea-bcb8-475e-86cf-0b9eaca8a48f" providerId="ADAL" clId="{4D8D382B-DDFF-455F-B5ED-E854E938891F}" dt="2026-01-11T12:06:48.074" v="1275" actId="1076"/>
-          <ac:spMkLst>
-            <pc:docMk/>
-            <pc:sldMk cId="2216055281" sldId="263"/>
-            <ac:spMk id="41" creationId="{30000D34-31AE-7B4D-CF69-3FD8A2530268}"/>
-          </ac:spMkLst>
-        </pc:spChg>
-        <pc:spChg chg="add mod">
-          <ac:chgData name="#CUI SHUAIWEN#" userId="35a196ea-bcb8-475e-86cf-0b9eaca8a48f" providerId="ADAL" clId="{4D8D382B-DDFF-455F-B5ED-E854E938891F}" dt="2026-01-11T12:06:46.215" v="1273"/>
-          <ac:spMkLst>
-            <pc:docMk/>
-            <pc:sldMk cId="2216055281" sldId="263"/>
-            <ac:spMk id="43" creationId="{D36D7F51-B4CC-0793-36F2-7FDFAAD572FF}"/>
-          </ac:spMkLst>
-        </pc:spChg>
-        <pc:spChg chg="add mod">
-          <ac:chgData name="#CUI SHUAIWEN#" userId="35a196ea-bcb8-475e-86cf-0b9eaca8a48f" providerId="ADAL" clId="{4D8D382B-DDFF-455F-B5ED-E854E938891F}" dt="2026-01-11T12:07:07.406" v="1299" actId="20577"/>
-          <ac:spMkLst>
-            <pc:docMk/>
-            <pc:sldMk cId="2216055281" sldId="263"/>
-            <ac:spMk id="45" creationId="{2F0F14D1-86DB-929B-31AC-EA7F9DA9864F}"/>
-          </ac:spMkLst>
-        </pc:spChg>
-        <pc:spChg chg="add mod">
-          <ac:chgData name="#CUI SHUAIWEN#" userId="35a196ea-bcb8-475e-86cf-0b9eaca8a48f" providerId="ADAL" clId="{4D8D382B-DDFF-455F-B5ED-E854E938891F}" dt="2026-01-11T12:07:31.454" v="1328" actId="1076"/>
-          <ac:spMkLst>
-            <pc:docMk/>
-            <pc:sldMk cId="2216055281" sldId="263"/>
-            <ac:spMk id="48" creationId="{BE9F8BD5-F28B-DA75-1198-FF1A72F4F8F5}"/>
-          </ac:spMkLst>
-        </pc:spChg>
-        <pc:spChg chg="add mod">
-          <ac:chgData name="#CUI SHUAIWEN#" userId="35a196ea-bcb8-475e-86cf-0b9eaca8a48f" providerId="ADAL" clId="{4D8D382B-DDFF-455F-B5ED-E854E938891F}" dt="2026-01-11T12:35:37.692" v="1779" actId="1076"/>
-          <ac:spMkLst>
-            <pc:docMk/>
-            <pc:sldMk cId="2216055281" sldId="263"/>
-            <ac:spMk id="49" creationId="{3337C717-8C49-1702-CB9F-D64618583452}"/>
-          </ac:spMkLst>
-        </pc:spChg>
-        <pc:spChg chg="add mod">
-          <ac:chgData name="#CUI SHUAIWEN#" userId="35a196ea-bcb8-475e-86cf-0b9eaca8a48f" providerId="ADAL" clId="{4D8D382B-DDFF-455F-B5ED-E854E938891F}" dt="2026-01-11T12:35:46.188" v="1788" actId="20577"/>
-          <ac:spMkLst>
-            <pc:docMk/>
-            <pc:sldMk cId="2216055281" sldId="263"/>
-            <ac:spMk id="50" creationId="{B471B009-65A8-05EE-9FE2-DE1DB5BFEDEC}"/>
-          </ac:spMkLst>
-        </pc:spChg>
-        <pc:picChg chg="del">
-          <ac:chgData name="#CUI SHUAIWEN#" userId="35a196ea-bcb8-475e-86cf-0b9eaca8a48f" providerId="ADAL" clId="{4D8D382B-DDFF-455F-B5ED-E854E938891F}" dt="2026-01-11T11:51:35.578" v="909" actId="478"/>
-          <ac:picMkLst>
-            <pc:docMk/>
-            <pc:sldMk cId="2216055281" sldId="263"/>
-            <ac:picMk id="7" creationId="{E0CE1B9D-B108-8E24-B66D-B92A483F5562}"/>
-          </ac:picMkLst>
-        </pc:picChg>
-        <pc:picChg chg="del">
-          <ac:chgData name="#CUI SHUAIWEN#" userId="35a196ea-bcb8-475e-86cf-0b9eaca8a48f" providerId="ADAL" clId="{4D8D382B-DDFF-455F-B5ED-E854E938891F}" dt="2026-01-11T11:51:34.023" v="908" actId="478"/>
-          <ac:picMkLst>
-            <pc:docMk/>
-            <pc:sldMk cId="2216055281" sldId="263"/>
-            <ac:picMk id="11" creationId="{26322732-A8A7-4571-C313-59BA8FB0AEF9}"/>
-          </ac:picMkLst>
-        </pc:picChg>
-        <pc:cxnChg chg="del">
-          <ac:chgData name="#CUI SHUAIWEN#" userId="35a196ea-bcb8-475e-86cf-0b9eaca8a48f" providerId="ADAL" clId="{4D8D382B-DDFF-455F-B5ED-E854E938891F}" dt="2026-01-11T11:51:34.023" v="908" actId="478"/>
-          <ac:cxnSpMkLst>
-            <pc:docMk/>
-            <pc:sldMk cId="2216055281" sldId="263"/>
-            <ac:cxnSpMk id="13" creationId="{E95D96FD-CF5F-6D05-5A44-1DBBF0E02CEA}"/>
-          </ac:cxnSpMkLst>
-        </pc:cxnChg>
-        <pc:cxnChg chg="add">
-          <ac:chgData name="#CUI SHUAIWEN#" userId="35a196ea-bcb8-475e-86cf-0b9eaca8a48f" providerId="ADAL" clId="{4D8D382B-DDFF-455F-B5ED-E854E938891F}" dt="2026-01-11T11:59:45.693" v="1140" actId="11529"/>
-          <ac:cxnSpMkLst>
-            <pc:docMk/>
-            <pc:sldMk cId="2216055281" sldId="263"/>
-            <ac:cxnSpMk id="20" creationId="{2BF2C95A-CFDA-F646-9692-26EF98B7102B}"/>
-          </ac:cxnSpMkLst>
-        </pc:cxnChg>
-        <pc:cxnChg chg="add mod">
-          <ac:chgData name="#CUI SHUAIWEN#" userId="35a196ea-bcb8-475e-86cf-0b9eaca8a48f" providerId="ADAL" clId="{4D8D382B-DDFF-455F-B5ED-E854E938891F}" dt="2026-01-11T12:01:22.100" v="1171" actId="14100"/>
-          <ac:cxnSpMkLst>
-            <pc:docMk/>
-            <pc:sldMk cId="2216055281" sldId="263"/>
-            <ac:cxnSpMk id="22" creationId="{88CC910F-91B5-EE3F-F997-C76B009C3C2C}"/>
-          </ac:cxnSpMkLst>
-        </pc:cxnChg>
-        <pc:cxnChg chg="add mod">
-          <ac:chgData name="#CUI SHUAIWEN#" userId="35a196ea-bcb8-475e-86cf-0b9eaca8a48f" providerId="ADAL" clId="{4D8D382B-DDFF-455F-B5ED-E854E938891F}" dt="2026-01-11T12:03:04.247" v="1190" actId="14100"/>
-          <ac:cxnSpMkLst>
-            <pc:docMk/>
-            <pc:sldMk cId="2216055281" sldId="263"/>
-            <ac:cxnSpMk id="25" creationId="{B64FC3AF-828C-1B4E-23BA-BDF2A4D32696}"/>
-          </ac:cxnSpMkLst>
-        </pc:cxnChg>
-        <pc:cxnChg chg="add mod">
-          <ac:chgData name="#CUI SHUAIWEN#" userId="35a196ea-bcb8-475e-86cf-0b9eaca8a48f" providerId="ADAL" clId="{4D8D382B-DDFF-455F-B5ED-E854E938891F}" dt="2026-01-11T12:03:36.907" v="1196" actId="1076"/>
-          <ac:cxnSpMkLst>
-            <pc:docMk/>
-            <pc:sldMk cId="2216055281" sldId="263"/>
-            <ac:cxnSpMk id="28" creationId="{099A5566-0976-43A7-CFC0-E80DAF695FA2}"/>
-          </ac:cxnSpMkLst>
-        </pc:cxnChg>
-        <pc:cxnChg chg="add mod">
-          <ac:chgData name="#CUI SHUAIWEN#" userId="35a196ea-bcb8-475e-86cf-0b9eaca8a48f" providerId="ADAL" clId="{4D8D382B-DDFF-455F-B5ED-E854E938891F}" dt="2026-01-11T12:04:23.940" v="1233"/>
-          <ac:cxnSpMkLst>
-            <pc:docMk/>
-            <pc:sldMk cId="2216055281" sldId="263"/>
-            <ac:cxnSpMk id="37" creationId="{212867A8-7A47-59A1-97D9-6849F4E0D6CF}"/>
-          </ac:cxnSpMkLst>
-        </pc:cxnChg>
-        <pc:cxnChg chg="add mod">
-          <ac:chgData name="#CUI SHUAIWEN#" userId="35a196ea-bcb8-475e-86cf-0b9eaca8a48f" providerId="ADAL" clId="{4D8D382B-DDFF-455F-B5ED-E854E938891F}" dt="2026-01-11T12:06:15.244" v="1272" actId="1076"/>
-          <ac:cxnSpMkLst>
-            <pc:docMk/>
-            <pc:sldMk cId="2216055281" sldId="263"/>
-            <ac:cxnSpMk id="38" creationId="{6D374075-C58C-0B0B-7307-DE7E14FAA57E}"/>
-          </ac:cxnSpMkLst>
-        </pc:cxnChg>
-        <pc:cxnChg chg="add mod">
-          <ac:chgData name="#CUI SHUAIWEN#" userId="35a196ea-bcb8-475e-86cf-0b9eaca8a48f" providerId="ADAL" clId="{4D8D382B-DDFF-455F-B5ED-E854E938891F}" dt="2026-01-11T12:06:00.309" v="1267" actId="1076"/>
-          <ac:cxnSpMkLst>
-            <pc:docMk/>
-            <pc:sldMk cId="2216055281" sldId="263"/>
-            <ac:cxnSpMk id="40" creationId="{D94D0F52-3694-FA34-9A82-8D13D52E9CFD}"/>
-          </ac:cxnSpMkLst>
-        </pc:cxnChg>
-        <pc:cxnChg chg="add mod">
-          <ac:chgData name="#CUI SHUAIWEN#" userId="35a196ea-bcb8-475e-86cf-0b9eaca8a48f" providerId="ADAL" clId="{4D8D382B-DDFF-455F-B5ED-E854E938891F}" dt="2026-01-11T12:06:46.215" v="1273"/>
-          <ac:cxnSpMkLst>
-            <pc:docMk/>
-            <pc:sldMk cId="2216055281" sldId="263"/>
-            <ac:cxnSpMk id="42" creationId="{BE373BAD-6334-6F3B-218D-81E547FDD641}"/>
-          </ac:cxnSpMkLst>
-        </pc:cxnChg>
-        <pc:cxnChg chg="add mod">
-          <ac:chgData name="#CUI SHUAIWEN#" userId="35a196ea-bcb8-475e-86cf-0b9eaca8a48f" providerId="ADAL" clId="{4D8D382B-DDFF-455F-B5ED-E854E938891F}" dt="2026-01-11T12:06:56.861" v="1278" actId="14100"/>
-          <ac:cxnSpMkLst>
-            <pc:docMk/>
-            <pc:sldMk cId="2216055281" sldId="263"/>
-            <ac:cxnSpMk id="44" creationId="{BFB63B33-CBC8-4807-26F1-AB92BA700035}"/>
-          </ac:cxnSpMkLst>
-        </pc:cxnChg>
-        <pc:cxnChg chg="add mod">
-          <ac:chgData name="#CUI SHUAIWEN#" userId="35a196ea-bcb8-475e-86cf-0b9eaca8a48f" providerId="ADAL" clId="{4D8D382B-DDFF-455F-B5ED-E854E938891F}" dt="2026-01-11T12:07:16.146" v="1301" actId="1076"/>
-          <ac:cxnSpMkLst>
-            <pc:docMk/>
-            <pc:sldMk cId="2216055281" sldId="263"/>
-            <ac:cxnSpMk id="47" creationId="{CFE46888-CDA3-E3C8-C436-D8CF763D7B1D}"/>
-          </ac:cxnSpMkLst>
-        </pc:cxnChg>
-      </pc:sldChg>
-      <pc:sldChg chg="addSp delSp modSp add mod">
-        <pc:chgData name="#CUI SHUAIWEN#" userId="35a196ea-bcb8-475e-86cf-0b9eaca8a48f" providerId="ADAL" clId="{4D8D382B-DDFF-455F-B5ED-E854E938891F}" dt="2026-01-11T12:21:19.226" v="1617" actId="20577"/>
-        <pc:sldMkLst>
-          <pc:docMk/>
-          <pc:sldMk cId="1603133614" sldId="264"/>
-        </pc:sldMkLst>
-        <pc:spChg chg="mod">
-          <ac:chgData name="#CUI SHUAIWEN#" userId="35a196ea-bcb8-475e-86cf-0b9eaca8a48f" providerId="ADAL" clId="{4D8D382B-DDFF-455F-B5ED-E854E938891F}" dt="2026-01-11T12:21:19.226" v="1617" actId="20577"/>
-          <ac:spMkLst>
-            <pc:docMk/>
-            <pc:sldMk cId="1603133614" sldId="264"/>
-            <ac:spMk id="2" creationId="{D617F0A9-7FFF-02E0-7FA6-662870811C6B}"/>
-          </ac:spMkLst>
-        </pc:spChg>
-        <pc:spChg chg="add mod">
-          <ac:chgData name="#CUI SHUAIWEN#" userId="35a196ea-bcb8-475e-86cf-0b9eaca8a48f" providerId="ADAL" clId="{4D8D382B-DDFF-455F-B5ED-E854E938891F}" dt="2026-01-11T12:21:00.061" v="1614" actId="1076"/>
-          <ac:spMkLst>
-            <pc:docMk/>
-            <pc:sldMk cId="1603133614" sldId="264"/>
-            <ac:spMk id="3" creationId="{1DCF0549-D58C-9CF7-60DA-343620C96D5B}"/>
-          </ac:spMkLst>
-        </pc:spChg>
-        <pc:spChg chg="del">
-          <ac:chgData name="#CUI SHUAIWEN#" userId="35a196ea-bcb8-475e-86cf-0b9eaca8a48f" providerId="ADAL" clId="{4D8D382B-DDFF-455F-B5ED-E854E938891F}" dt="2026-01-11T12:08:56.620" v="1389" actId="478"/>
-          <ac:spMkLst>
-            <pc:docMk/>
-            <pc:sldMk cId="1603133614" sldId="264"/>
-            <ac:spMk id="4" creationId="{A4C30A41-D5E3-99AE-2B4E-C51D9679526E}"/>
-          </ac:spMkLst>
-        </pc:spChg>
-        <pc:spChg chg="mod">
-          <ac:chgData name="#CUI SHUAIWEN#" userId="35a196ea-bcb8-475e-86cf-0b9eaca8a48f" providerId="ADAL" clId="{4D8D382B-DDFF-455F-B5ED-E854E938891F}" dt="2026-01-11T12:15:47.537" v="1589" actId="12789"/>
-          <ac:spMkLst>
-            <pc:docMk/>
-            <pc:sldMk cId="1603133614" sldId="264"/>
-            <ac:spMk id="5" creationId="{7322E727-EA92-8FAE-F0DA-0CE4C43F2FCE}"/>
-          </ac:spMkLst>
-        </pc:spChg>
-        <pc:spChg chg="mod">
-          <ac:chgData name="#CUI SHUAIWEN#" userId="35a196ea-bcb8-475e-86cf-0b9eaca8a48f" providerId="ADAL" clId="{4D8D382B-DDFF-455F-B5ED-E854E938891F}" dt="2026-01-11T12:21:04.840" v="1616" actId="1076"/>
-          <ac:spMkLst>
-            <pc:docMk/>
-            <pc:sldMk cId="1603133614" sldId="264"/>
-            <ac:spMk id="6" creationId="{D1BF15B4-7A6F-CCC8-AFCF-C9A0A5636158}"/>
-          </ac:spMkLst>
-        </pc:spChg>
-        <pc:spChg chg="del">
-          <ac:chgData name="#CUI SHUAIWEN#" userId="35a196ea-bcb8-475e-86cf-0b9eaca8a48f" providerId="ADAL" clId="{4D8D382B-DDFF-455F-B5ED-E854E938891F}" dt="2026-01-11T12:08:56.620" v="1389" actId="478"/>
-          <ac:spMkLst>
-            <pc:docMk/>
-            <pc:sldMk cId="1603133614" sldId="264"/>
-            <ac:spMk id="8" creationId="{6A120CAD-C354-491B-ACF6-8EDF72EBAD24}"/>
-          </ac:spMkLst>
-        </pc:spChg>
-        <pc:spChg chg="add del mod">
-          <ac:chgData name="#CUI SHUAIWEN#" userId="35a196ea-bcb8-475e-86cf-0b9eaca8a48f" providerId="ADAL" clId="{4D8D382B-DDFF-455F-B5ED-E854E938891F}" dt="2026-01-11T12:14:59.245" v="1549" actId="478"/>
-          <ac:spMkLst>
-            <pc:docMk/>
-            <pc:sldMk cId="1603133614" sldId="264"/>
-            <ac:spMk id="9" creationId="{6DC58D74-1D3E-FF1C-CBBD-DC9F081CAAF4}"/>
-          </ac:spMkLst>
-        </pc:spChg>
-        <pc:spChg chg="del">
-          <ac:chgData name="#CUI SHUAIWEN#" userId="35a196ea-bcb8-475e-86cf-0b9eaca8a48f" providerId="ADAL" clId="{4D8D382B-DDFF-455F-B5ED-E854E938891F}" dt="2026-01-11T12:08:56.620" v="1389" actId="478"/>
-          <ac:spMkLst>
-            <pc:docMk/>
-            <pc:sldMk cId="1603133614" sldId="264"/>
-            <ac:spMk id="10" creationId="{06A06C00-68A1-6192-689A-3BFA81053CD1}"/>
-          </ac:spMkLst>
-        </pc:spChg>
-        <pc:spChg chg="add mod">
-          <ac:chgData name="#CUI SHUAIWEN#" userId="35a196ea-bcb8-475e-86cf-0b9eaca8a48f" providerId="ADAL" clId="{4D8D382B-DDFF-455F-B5ED-E854E938891F}" dt="2026-01-11T12:21:02.555" v="1615" actId="1076"/>
-          <ac:spMkLst>
-            <pc:docMk/>
-            <pc:sldMk cId="1603133614" sldId="264"/>
-            <ac:spMk id="11" creationId="{F65F0B97-1A30-8F97-F2A2-E6C3DA28C834}"/>
-          </ac:spMkLst>
-        </pc:spChg>
-        <pc:spChg chg="add del mod">
-          <ac:chgData name="#CUI SHUAIWEN#" userId="35a196ea-bcb8-475e-86cf-0b9eaca8a48f" providerId="ADAL" clId="{4D8D382B-DDFF-455F-B5ED-E854E938891F}" dt="2026-01-11T12:20:22.141" v="1597" actId="478"/>
-          <ac:spMkLst>
-            <pc:docMk/>
-            <pc:sldMk cId="1603133614" sldId="264"/>
-            <ac:spMk id="13" creationId="{BCE1DA38-6B4C-B292-59FF-7BDEFE6C940F}"/>
-          </ac:spMkLst>
-        </pc:spChg>
-        <pc:spChg chg="del">
-          <ac:chgData name="#CUI SHUAIWEN#" userId="35a196ea-bcb8-475e-86cf-0b9eaca8a48f" providerId="ADAL" clId="{4D8D382B-DDFF-455F-B5ED-E854E938891F}" dt="2026-01-11T12:08:56.620" v="1389" actId="478"/>
-          <ac:spMkLst>
-            <pc:docMk/>
-            <pc:sldMk cId="1603133614" sldId="264"/>
-            <ac:spMk id="14" creationId="{F6F4BC94-748A-C68E-A5ED-A372CF34E46B}"/>
-          </ac:spMkLst>
-        </pc:spChg>
-        <pc:spChg chg="del">
-          <ac:chgData name="#CUI SHUAIWEN#" userId="35a196ea-bcb8-475e-86cf-0b9eaca8a48f" providerId="ADAL" clId="{4D8D382B-DDFF-455F-B5ED-E854E938891F}" dt="2026-01-11T12:08:56.620" v="1389" actId="478"/>
-          <ac:spMkLst>
-            <pc:docMk/>
-            <pc:sldMk cId="1603133614" sldId="264"/>
-            <ac:spMk id="15" creationId="{0B1913A7-5F88-56C0-31A2-83988481E17C}"/>
-          </ac:spMkLst>
-        </pc:spChg>
-        <pc:spChg chg="del">
-          <ac:chgData name="#CUI SHUAIWEN#" userId="35a196ea-bcb8-475e-86cf-0b9eaca8a48f" providerId="ADAL" clId="{4D8D382B-DDFF-455F-B5ED-E854E938891F}" dt="2026-01-11T12:08:56.620" v="1389" actId="478"/>
-          <ac:spMkLst>
-            <pc:docMk/>
-            <pc:sldMk cId="1603133614" sldId="264"/>
-            <ac:spMk id="17" creationId="{A7368FBC-6215-B933-E905-B1F60030C152}"/>
-          </ac:spMkLst>
-        </pc:spChg>
-        <pc:spChg chg="del">
-          <ac:chgData name="#CUI SHUAIWEN#" userId="35a196ea-bcb8-475e-86cf-0b9eaca8a48f" providerId="ADAL" clId="{4D8D382B-DDFF-455F-B5ED-E854E938891F}" dt="2026-01-11T12:08:56.620" v="1389" actId="478"/>
-          <ac:spMkLst>
-            <pc:docMk/>
-            <pc:sldMk cId="1603133614" sldId="264"/>
-            <ac:spMk id="18" creationId="{5C44C2A6-3802-175A-575B-6EACB76FBE30}"/>
-          </ac:spMkLst>
-        </pc:spChg>
-        <pc:spChg chg="add del mod">
-          <ac:chgData name="#CUI SHUAIWEN#" userId="35a196ea-bcb8-475e-86cf-0b9eaca8a48f" providerId="ADAL" clId="{4D8D382B-DDFF-455F-B5ED-E854E938891F}" dt="2026-01-11T12:20:23.235" v="1598" actId="478"/>
-          <ac:spMkLst>
-            <pc:docMk/>
-            <pc:sldMk cId="1603133614" sldId="264"/>
-            <ac:spMk id="19" creationId="{423B061E-48E8-8D51-2742-E36E13D6BB75}"/>
-          </ac:spMkLst>
-        </pc:spChg>
-        <pc:spChg chg="del">
-          <ac:chgData name="#CUI SHUAIWEN#" userId="35a196ea-bcb8-475e-86cf-0b9eaca8a48f" providerId="ADAL" clId="{4D8D382B-DDFF-455F-B5ED-E854E938891F}" dt="2026-01-11T12:08:56.620" v="1389" actId="478"/>
-          <ac:spMkLst>
-            <pc:docMk/>
-            <pc:sldMk cId="1603133614" sldId="264"/>
-            <ac:spMk id="21" creationId="{98B84078-ED95-787F-7EF4-9896DA140585}"/>
-          </ac:spMkLst>
-        </pc:spChg>
-        <pc:spChg chg="del">
-          <ac:chgData name="#CUI SHUAIWEN#" userId="35a196ea-bcb8-475e-86cf-0b9eaca8a48f" providerId="ADAL" clId="{4D8D382B-DDFF-455F-B5ED-E854E938891F}" dt="2026-01-11T12:08:56.620" v="1389" actId="478"/>
-          <ac:spMkLst>
-            <pc:docMk/>
-            <pc:sldMk cId="1603133614" sldId="264"/>
-            <ac:spMk id="23" creationId="{8A1A3C9F-48B0-8162-8314-24DAAF0C6C58}"/>
-          </ac:spMkLst>
-        </pc:spChg>
-        <pc:spChg chg="del">
-          <ac:chgData name="#CUI SHUAIWEN#" userId="35a196ea-bcb8-475e-86cf-0b9eaca8a48f" providerId="ADAL" clId="{4D8D382B-DDFF-455F-B5ED-E854E938891F}" dt="2026-01-11T12:08:56.620" v="1389" actId="478"/>
-          <ac:spMkLst>
-            <pc:docMk/>
-            <pc:sldMk cId="1603133614" sldId="264"/>
-            <ac:spMk id="26" creationId="{0715114F-AF1B-3498-18F3-48D86D0B40F5}"/>
-          </ac:spMkLst>
-        </pc:spChg>
-        <pc:spChg chg="del">
-          <ac:chgData name="#CUI SHUAIWEN#" userId="35a196ea-bcb8-475e-86cf-0b9eaca8a48f" providerId="ADAL" clId="{4D8D382B-DDFF-455F-B5ED-E854E938891F}" dt="2026-01-11T12:08:59.435" v="1390" actId="478"/>
-          <ac:spMkLst>
-            <pc:docMk/>
-            <pc:sldMk cId="1603133614" sldId="264"/>
-            <ac:spMk id="31" creationId="{9CF457CA-4D9D-BD0B-B908-FA4E4B96759F}"/>
-          </ac:spMkLst>
-        </pc:spChg>
-        <pc:spChg chg="del">
-          <ac:chgData name="#CUI SHUAIWEN#" userId="35a196ea-bcb8-475e-86cf-0b9eaca8a48f" providerId="ADAL" clId="{4D8D382B-DDFF-455F-B5ED-E854E938891F}" dt="2026-01-11T12:08:59.435" v="1390" actId="478"/>
-          <ac:spMkLst>
-            <pc:docMk/>
-            <pc:sldMk cId="1603133614" sldId="264"/>
-            <ac:spMk id="32" creationId="{3895A08D-E8F8-237A-974C-E081948707D1}"/>
-          </ac:spMkLst>
-        </pc:spChg>
-        <pc:spChg chg="del">
-          <ac:chgData name="#CUI SHUAIWEN#" userId="35a196ea-bcb8-475e-86cf-0b9eaca8a48f" providerId="ADAL" clId="{4D8D382B-DDFF-455F-B5ED-E854E938891F}" dt="2026-01-11T12:08:59.435" v="1390" actId="478"/>
-          <ac:spMkLst>
-            <pc:docMk/>
-            <pc:sldMk cId="1603133614" sldId="264"/>
-            <ac:spMk id="33" creationId="{54C7607F-B87C-1007-C7E2-2A8FF69E016D}"/>
-          </ac:spMkLst>
-        </pc:spChg>
-        <pc:spChg chg="del">
-          <ac:chgData name="#CUI SHUAIWEN#" userId="35a196ea-bcb8-475e-86cf-0b9eaca8a48f" providerId="ADAL" clId="{4D8D382B-DDFF-455F-B5ED-E854E938891F}" dt="2026-01-11T12:08:59.435" v="1390" actId="478"/>
-          <ac:spMkLst>
-            <pc:docMk/>
-            <pc:sldMk cId="1603133614" sldId="264"/>
-            <ac:spMk id="34" creationId="{ABFB36C5-E77E-7218-82B3-B0ABBB0E2320}"/>
-          </ac:spMkLst>
-        </pc:spChg>
-        <pc:spChg chg="del">
-          <ac:chgData name="#CUI SHUAIWEN#" userId="35a196ea-bcb8-475e-86cf-0b9eaca8a48f" providerId="ADAL" clId="{4D8D382B-DDFF-455F-B5ED-E854E938891F}" dt="2026-01-11T12:08:59.435" v="1390" actId="478"/>
-          <ac:spMkLst>
-            <pc:docMk/>
-            <pc:sldMk cId="1603133614" sldId="264"/>
-            <ac:spMk id="35" creationId="{6F70B442-A00C-CD82-1D09-A346C7C3A1E4}"/>
-          </ac:spMkLst>
-        </pc:spChg>
-        <pc:spChg chg="del">
-          <ac:chgData name="#CUI SHUAIWEN#" userId="35a196ea-bcb8-475e-86cf-0b9eaca8a48f" providerId="ADAL" clId="{4D8D382B-DDFF-455F-B5ED-E854E938891F}" dt="2026-01-11T12:08:59.435" v="1390" actId="478"/>
-          <ac:spMkLst>
-            <pc:docMk/>
-            <pc:sldMk cId="1603133614" sldId="264"/>
-            <ac:spMk id="36" creationId="{65C88295-48CF-DFCD-D9E0-9975443990F8}"/>
-          </ac:spMkLst>
-        </pc:spChg>
-        <pc:spChg chg="del">
-          <ac:chgData name="#CUI SHUAIWEN#" userId="35a196ea-bcb8-475e-86cf-0b9eaca8a48f" providerId="ADAL" clId="{4D8D382B-DDFF-455F-B5ED-E854E938891F}" dt="2026-01-11T12:08:59.435" v="1390" actId="478"/>
-          <ac:spMkLst>
-            <pc:docMk/>
-            <pc:sldMk cId="1603133614" sldId="264"/>
-            <ac:spMk id="39" creationId="{C821A86D-F383-8A15-BB6C-8886642DD501}"/>
-          </ac:spMkLst>
-        </pc:spChg>
-        <pc:spChg chg="del">
-          <ac:chgData name="#CUI SHUAIWEN#" userId="35a196ea-bcb8-475e-86cf-0b9eaca8a48f" providerId="ADAL" clId="{4D8D382B-DDFF-455F-B5ED-E854E938891F}" dt="2026-01-11T12:08:59.435" v="1390" actId="478"/>
-          <ac:spMkLst>
-            <pc:docMk/>
-            <pc:sldMk cId="1603133614" sldId="264"/>
-            <ac:spMk id="41" creationId="{7CF5574A-6FAB-6DE0-D212-2450E554C38E}"/>
-          </ac:spMkLst>
-        </pc:spChg>
-        <pc:spChg chg="del">
-          <ac:chgData name="#CUI SHUAIWEN#" userId="35a196ea-bcb8-475e-86cf-0b9eaca8a48f" providerId="ADAL" clId="{4D8D382B-DDFF-455F-B5ED-E854E938891F}" dt="2026-01-11T12:08:59.435" v="1390" actId="478"/>
-          <ac:spMkLst>
-            <pc:docMk/>
-            <pc:sldMk cId="1603133614" sldId="264"/>
-            <ac:spMk id="45" creationId="{30B426DC-3D7E-C882-589C-A12860DF253F}"/>
-          </ac:spMkLst>
-        </pc:spChg>
-        <pc:spChg chg="del">
-          <ac:chgData name="#CUI SHUAIWEN#" userId="35a196ea-bcb8-475e-86cf-0b9eaca8a48f" providerId="ADAL" clId="{4D8D382B-DDFF-455F-B5ED-E854E938891F}" dt="2026-01-11T12:08:59.435" v="1390" actId="478"/>
-          <ac:spMkLst>
-            <pc:docMk/>
-            <pc:sldMk cId="1603133614" sldId="264"/>
-            <ac:spMk id="48" creationId="{B23BDD27-3BDA-52C3-421F-61636C81B551}"/>
-          </ac:spMkLst>
-        </pc:spChg>
-      </pc:sldChg>
-      <pc:sldChg chg="addSp delSp modSp add mod">
-        <pc:chgData name="#CUI SHUAIWEN#" userId="35a196ea-bcb8-475e-86cf-0b9eaca8a48f" providerId="ADAL" clId="{4D8D382B-DDFF-455F-B5ED-E854E938891F}" dt="2026-01-11T12:38:22.174" v="1800" actId="20577"/>
-        <pc:sldMkLst>
-          <pc:docMk/>
-          <pc:sldMk cId="804498606" sldId="265"/>
-        </pc:sldMkLst>
-        <pc:spChg chg="mod">
-          <ac:chgData name="#CUI SHUAIWEN#" userId="35a196ea-bcb8-475e-86cf-0b9eaca8a48f" providerId="ADAL" clId="{4D8D382B-DDFF-455F-B5ED-E854E938891F}" dt="2026-01-11T12:21:39.110" v="1646" actId="6549"/>
-          <ac:spMkLst>
-            <pc:docMk/>
-            <pc:sldMk cId="804498606" sldId="265"/>
-            <ac:spMk id="2" creationId="{257294C3-E8C8-DA1E-7FFB-D31A133B621C}"/>
-          </ac:spMkLst>
-        </pc:spChg>
-        <pc:spChg chg="del">
-          <ac:chgData name="#CUI SHUAIWEN#" userId="35a196ea-bcb8-475e-86cf-0b9eaca8a48f" providerId="ADAL" clId="{4D8D382B-DDFF-455F-B5ED-E854E938891F}" dt="2026-01-11T12:21:27.027" v="1621" actId="478"/>
-          <ac:spMkLst>
-            <pc:docMk/>
-            <pc:sldMk cId="804498606" sldId="265"/>
-            <ac:spMk id="3" creationId="{5FA44A6B-46C2-337C-94ED-43044D66DA89}"/>
-          </ac:spMkLst>
-        </pc:spChg>
-        <pc:spChg chg="add mod">
-          <ac:chgData name="#CUI SHUAIWEN#" userId="35a196ea-bcb8-475e-86cf-0b9eaca8a48f" providerId="ADAL" clId="{4D8D382B-DDFF-455F-B5ED-E854E938891F}" dt="2026-01-11T12:26:36.879" v="1729" actId="1076"/>
-          <ac:spMkLst>
-            <pc:docMk/>
-            <pc:sldMk cId="804498606" sldId="265"/>
-            <ac:spMk id="4" creationId="{423A032F-9729-9C5C-9664-27AF56C6D6A8}"/>
-          </ac:spMkLst>
-        </pc:spChg>
-        <pc:spChg chg="del">
-          <ac:chgData name="#CUI SHUAIWEN#" userId="35a196ea-bcb8-475e-86cf-0b9eaca8a48f" providerId="ADAL" clId="{4D8D382B-DDFF-455F-B5ED-E854E938891F}" dt="2026-01-11T12:21:25.658" v="1620" actId="478"/>
-          <ac:spMkLst>
-            <pc:docMk/>
-            <pc:sldMk cId="804498606" sldId="265"/>
-            <ac:spMk id="5" creationId="{460A20EA-A9F7-20C9-8148-AFA16857C77D}"/>
-          </ac:spMkLst>
-        </pc:spChg>
-        <pc:spChg chg="del">
-          <ac:chgData name="#CUI SHUAIWEN#" userId="35a196ea-bcb8-475e-86cf-0b9eaca8a48f" providerId="ADAL" clId="{4D8D382B-DDFF-455F-B5ED-E854E938891F}" dt="2026-01-11T12:21:24.915" v="1619" actId="478"/>
-          <ac:spMkLst>
-            <pc:docMk/>
-            <pc:sldMk cId="804498606" sldId="265"/>
-            <ac:spMk id="6" creationId="{5275AEB8-8F53-A94E-78E4-7E591021271D}"/>
-          </ac:spMkLst>
-        </pc:spChg>
-        <pc:spChg chg="add mod">
-          <ac:chgData name="#CUI SHUAIWEN#" userId="35a196ea-bcb8-475e-86cf-0b9eaca8a48f" providerId="ADAL" clId="{4D8D382B-DDFF-455F-B5ED-E854E938891F}" dt="2026-01-11T12:29:43.865" v="1749" actId="1076"/>
-          <ac:spMkLst>
-            <pc:docMk/>
-            <pc:sldMk cId="804498606" sldId="265"/>
-            <ac:spMk id="7" creationId="{415DC5F0-6A1F-CB63-CD21-8C09435DDEC7}"/>
-          </ac:spMkLst>
-        </pc:spChg>
-        <pc:spChg chg="add del mod">
-          <ac:chgData name="#CUI SHUAIWEN#" userId="35a196ea-bcb8-475e-86cf-0b9eaca8a48f" providerId="ADAL" clId="{4D8D382B-DDFF-455F-B5ED-E854E938891F}" dt="2026-01-11T12:26:54.741" v="1739"/>
-          <ac:spMkLst>
-            <pc:docMk/>
-            <pc:sldMk cId="804498606" sldId="265"/>
-            <ac:spMk id="8" creationId="{F9396DC9-199F-9943-3D45-C25196F213BC}"/>
-          </ac:spMkLst>
-        </pc:spChg>
-        <pc:spChg chg="add mod">
-          <ac:chgData name="#CUI SHUAIWEN#" userId="35a196ea-bcb8-475e-86cf-0b9eaca8a48f" providerId="ADAL" clId="{4D8D382B-DDFF-455F-B5ED-E854E938891F}" dt="2026-01-11T12:38:22.174" v="1800" actId="20577"/>
-          <ac:spMkLst>
-            <pc:docMk/>
-            <pc:sldMk cId="804498606" sldId="265"/>
-            <ac:spMk id="9" creationId="{54C6DE7A-95ED-90BD-BF68-BB1D14C33089}"/>
-          </ac:spMkLst>
-        </pc:spChg>
-        <pc:spChg chg="add mod">
-          <ac:chgData name="#CUI SHUAIWEN#" userId="35a196ea-bcb8-475e-86cf-0b9eaca8a48f" providerId="ADAL" clId="{4D8D382B-DDFF-455F-B5ED-E854E938891F}" dt="2026-01-11T12:30:40.648" v="1757" actId="1076"/>
-          <ac:spMkLst>
-            <pc:docMk/>
-            <pc:sldMk cId="804498606" sldId="265"/>
-            <ac:spMk id="10" creationId="{775954C7-6766-0D72-F413-5FE5E1BB8212}"/>
-          </ac:spMkLst>
-        </pc:spChg>
-        <pc:spChg chg="del">
-          <ac:chgData name="#CUI SHUAIWEN#" userId="35a196ea-bcb8-475e-86cf-0b9eaca8a48f" providerId="ADAL" clId="{4D8D382B-DDFF-455F-B5ED-E854E938891F}" dt="2026-01-11T12:21:23.973" v="1618" actId="478"/>
-          <ac:spMkLst>
-            <pc:docMk/>
-            <pc:sldMk cId="804498606" sldId="265"/>
-            <ac:spMk id="11" creationId="{68262F10-B4DF-C1BB-3F2D-8269D9165B33}"/>
-          </ac:spMkLst>
-        </pc:spChg>
-        <pc:spChg chg="del">
-          <ac:chgData name="#CUI SHUAIWEN#" userId="35a196ea-bcb8-475e-86cf-0b9eaca8a48f" providerId="ADAL" clId="{4D8D382B-DDFF-455F-B5ED-E854E938891F}" dt="2026-01-11T12:21:42.578" v="1647" actId="478"/>
-          <ac:spMkLst>
-            <pc:docMk/>
-            <pc:sldMk cId="804498606" sldId="265"/>
-            <ac:spMk id="13" creationId="{F00948CD-EBD9-8574-BED7-015F09A7E981}"/>
-          </ac:spMkLst>
-        </pc:spChg>
-        <pc:spChg chg="del mod">
-          <ac:chgData name="#CUI SHUAIWEN#" userId="35a196ea-bcb8-475e-86cf-0b9eaca8a48f" providerId="ADAL" clId="{4D8D382B-DDFF-455F-B5ED-E854E938891F}" dt="2026-01-11T12:27:04.318" v="1740" actId="478"/>
-          <ac:spMkLst>
-            <pc:docMk/>
-            <pc:sldMk cId="804498606" sldId="265"/>
-            <ac:spMk id="19" creationId="{99FBE048-2D38-6E1D-AAEB-138C786AB348}"/>
-          </ac:spMkLst>
-        </pc:spChg>
-      </pc:sldChg>
-      <pc:sldChg chg="del">
-        <pc:chgData name="#CUI SHUAIWEN#" userId="35a196ea-bcb8-475e-86cf-0b9eaca8a48f" providerId="ADAL" clId="{4D8D382B-DDFF-455F-B5ED-E854E938891F}" dt="2026-01-11T10:39:54.093" v="354" actId="47"/>
-        <pc:sldMkLst>
-          <pc:docMk/>
-          <pc:sldMk cId="3492187387" sldId="265"/>
-        </pc:sldMkLst>
-      </pc:sldChg>
-      <pc:sldChg chg="del">
-        <pc:chgData name="#CUI SHUAIWEN#" userId="35a196ea-bcb8-475e-86cf-0b9eaca8a48f" providerId="ADAL" clId="{4D8D382B-DDFF-455F-B5ED-E854E938891F}" dt="2026-01-11T10:39:35.869" v="308" actId="47"/>
-        <pc:sldMkLst>
-          <pc:docMk/>
-          <pc:sldMk cId="741047462" sldId="266"/>
-        </pc:sldMkLst>
-      </pc:sldChg>
-      <pc:sldChg chg="addSp delSp modSp add del mod">
-        <pc:chgData name="#CUI SHUAIWEN#" userId="35a196ea-bcb8-475e-86cf-0b9eaca8a48f" providerId="ADAL" clId="{4D8D382B-DDFF-455F-B5ED-E854E938891F}" dt="2026-01-11T12:52:53.366" v="2666" actId="47"/>
-        <pc:sldMkLst>
-          <pc:docMk/>
-          <pc:sldMk cId="3819052070" sldId="266"/>
-        </pc:sldMkLst>
-        <pc:spChg chg="del">
-          <ac:chgData name="#CUI SHUAIWEN#" userId="35a196ea-bcb8-475e-86cf-0b9eaca8a48f" providerId="ADAL" clId="{4D8D382B-DDFF-455F-B5ED-E854E938891F}" dt="2026-01-11T12:38:44.755" v="1802" actId="478"/>
-          <ac:spMkLst>
-            <pc:docMk/>
-            <pc:sldMk cId="3819052070" sldId="266"/>
-            <ac:spMk id="2" creationId="{1F9E69B4-EC94-4CC3-9D11-9C9373CA957C}"/>
-          </ac:spMkLst>
-        </pc:spChg>
-        <pc:spChg chg="add del mod">
-          <ac:chgData name="#CUI SHUAIWEN#" userId="35a196ea-bcb8-475e-86cf-0b9eaca8a48f" providerId="ADAL" clId="{4D8D382B-DDFF-455F-B5ED-E854E938891F}" dt="2026-01-11T12:49:43.356" v="2533" actId="478"/>
-          <ac:spMkLst>
-            <pc:docMk/>
-            <pc:sldMk cId="3819052070" sldId="266"/>
-            <ac:spMk id="3" creationId="{9271030A-20FB-C210-3326-40014E8B6F2E}"/>
-          </ac:spMkLst>
-        </pc:spChg>
-        <pc:spChg chg="del">
-          <ac:chgData name="#CUI SHUAIWEN#" userId="35a196ea-bcb8-475e-86cf-0b9eaca8a48f" providerId="ADAL" clId="{4D8D382B-DDFF-455F-B5ED-E854E938891F}" dt="2026-01-11T12:43:46.244" v="2126" actId="478"/>
-          <ac:spMkLst>
-            <pc:docMk/>
-            <pc:sldMk cId="3819052070" sldId="266"/>
-            <ac:spMk id="4" creationId="{53E5BE80-68DD-5E6F-885C-79BE4BC02BC9}"/>
-          </ac:spMkLst>
-        </pc:spChg>
-        <pc:spChg chg="add del mod">
-          <ac:chgData name="#CUI SHUAIWEN#" userId="35a196ea-bcb8-475e-86cf-0b9eaca8a48f" providerId="ADAL" clId="{4D8D382B-DDFF-455F-B5ED-E854E938891F}" dt="2026-01-11T12:52:02.276" v="2649" actId="478"/>
-          <ac:spMkLst>
-            <pc:docMk/>
-            <pc:sldMk cId="3819052070" sldId="266"/>
-            <ac:spMk id="5" creationId="{E2A5DD33-DF65-D5DE-CF1A-D01A5E31C911}"/>
-          </ac:spMkLst>
-        </pc:spChg>
-        <pc:spChg chg="del">
-          <ac:chgData name="#CUI SHUAIWEN#" userId="35a196ea-bcb8-475e-86cf-0b9eaca8a48f" providerId="ADAL" clId="{4D8D382B-DDFF-455F-B5ED-E854E938891F}" dt="2026-01-11T12:43:46.244" v="2126" actId="478"/>
-          <ac:spMkLst>
-            <pc:docMk/>
-            <pc:sldMk cId="3819052070" sldId="266"/>
-            <ac:spMk id="7" creationId="{C40C78A9-5D6C-796F-DF59-29D161AACAB0}"/>
-          </ac:spMkLst>
-        </pc:spChg>
-        <pc:spChg chg="del">
-          <ac:chgData name="#CUI SHUAIWEN#" userId="35a196ea-bcb8-475e-86cf-0b9eaca8a48f" providerId="ADAL" clId="{4D8D382B-DDFF-455F-B5ED-E854E938891F}" dt="2026-01-11T12:43:46.244" v="2126" actId="478"/>
-          <ac:spMkLst>
-            <pc:docMk/>
-            <pc:sldMk cId="3819052070" sldId="266"/>
-            <ac:spMk id="9" creationId="{204D3C72-F09F-7CB9-8126-B9060B345A31}"/>
-          </ac:spMkLst>
-        </pc:spChg>
-        <pc:spChg chg="del">
-          <ac:chgData name="#CUI SHUAIWEN#" userId="35a196ea-bcb8-475e-86cf-0b9eaca8a48f" providerId="ADAL" clId="{4D8D382B-DDFF-455F-B5ED-E854E938891F}" dt="2026-01-11T12:43:46.244" v="2126" actId="478"/>
-          <ac:spMkLst>
-            <pc:docMk/>
-            <pc:sldMk cId="3819052070" sldId="266"/>
-            <ac:spMk id="10" creationId="{A336BF49-E7B6-B192-E8CF-39A16F6945F9}"/>
-          </ac:spMkLst>
-        </pc:spChg>
-      </pc:sldChg>
-      <pc:sldChg chg="delSp modSp add mod">
-        <pc:chgData name="#CUI SHUAIWEN#" userId="35a196ea-bcb8-475e-86cf-0b9eaca8a48f" providerId="ADAL" clId="{4D8D382B-DDFF-455F-B5ED-E854E938891F}" dt="2026-01-11T12:57:33.453" v="2874" actId="1076"/>
-        <pc:sldMkLst>
-          <pc:docMk/>
-          <pc:sldMk cId="1483530237" sldId="267"/>
-        </pc:sldMkLst>
-        <pc:spChg chg="mod">
-          <ac:chgData name="#CUI SHUAIWEN#" userId="35a196ea-bcb8-475e-86cf-0b9eaca8a48f" providerId="ADAL" clId="{4D8D382B-DDFF-455F-B5ED-E854E938891F}" dt="2026-01-11T12:39:27.982" v="1809" actId="20577"/>
-          <ac:spMkLst>
-            <pc:docMk/>
-            <pc:sldMk cId="1483530237" sldId="267"/>
-            <ac:spMk id="2" creationId="{C0D6BAA4-A993-EC4A-5510-883C8B6D107A}"/>
-          </ac:spMkLst>
-        </pc:spChg>
-        <pc:spChg chg="mod">
-          <ac:chgData name="#CUI SHUAIWEN#" userId="35a196ea-bcb8-475e-86cf-0b9eaca8a48f" providerId="ADAL" clId="{4D8D382B-DDFF-455F-B5ED-E854E938891F}" dt="2026-01-11T12:57:33.453" v="2874" actId="1076"/>
-          <ac:spMkLst>
-            <pc:docMk/>
-            <pc:sldMk cId="1483530237" sldId="267"/>
-            <ac:spMk id="4" creationId="{BE98F456-9886-C70E-F954-95B8BBB137DA}"/>
-          </ac:spMkLst>
-        </pc:spChg>
-        <pc:spChg chg="del">
-          <ac:chgData name="#CUI SHUAIWEN#" userId="35a196ea-bcb8-475e-86cf-0b9eaca8a48f" providerId="ADAL" clId="{4D8D382B-DDFF-455F-B5ED-E854E938891F}" dt="2026-01-11T12:39:58.627" v="1812" actId="478"/>
-          <ac:spMkLst>
-            <pc:docMk/>
-            <pc:sldMk cId="1483530237" sldId="267"/>
-            <ac:spMk id="7" creationId="{6D2C3332-7088-D2F7-4842-8976C8C2A0BA}"/>
-          </ac:spMkLst>
-        </pc:spChg>
-        <pc:spChg chg="del">
-          <ac:chgData name="#CUI SHUAIWEN#" userId="35a196ea-bcb8-475e-86cf-0b9eaca8a48f" providerId="ADAL" clId="{4D8D382B-DDFF-455F-B5ED-E854E938891F}" dt="2026-01-11T12:40:04.344" v="1813" actId="478"/>
-          <ac:spMkLst>
-            <pc:docMk/>
-            <pc:sldMk cId="1483530237" sldId="267"/>
-            <ac:spMk id="9" creationId="{B74498DF-1463-207C-A08B-CF826B0050FB}"/>
-          </ac:spMkLst>
-        </pc:spChg>
-        <pc:spChg chg="del">
-          <ac:chgData name="#CUI SHUAIWEN#" userId="35a196ea-bcb8-475e-86cf-0b9eaca8a48f" providerId="ADAL" clId="{4D8D382B-DDFF-455F-B5ED-E854E938891F}" dt="2026-01-11T12:39:57.122" v="1811" actId="478"/>
-          <ac:spMkLst>
-            <pc:docMk/>
-            <pc:sldMk cId="1483530237" sldId="267"/>
-            <ac:spMk id="10" creationId="{9F918324-B9FC-2656-D829-540E242F8978}"/>
-          </ac:spMkLst>
-        </pc:spChg>
-      </pc:sldChg>
-      <pc:sldChg chg="del">
-        <pc:chgData name="#CUI SHUAIWEN#" userId="35a196ea-bcb8-475e-86cf-0b9eaca8a48f" providerId="ADAL" clId="{4D8D382B-DDFF-455F-B5ED-E854E938891F}" dt="2026-01-11T10:39:35.901" v="309" actId="47"/>
-        <pc:sldMkLst>
-          <pc:docMk/>
-          <pc:sldMk cId="2663889688" sldId="267"/>
-        </pc:sldMkLst>
-      </pc:sldChg>
-      <pc:sldChg chg="addSp delSp modSp new mod">
-        <pc:chgData name="#CUI SHUAIWEN#" userId="35a196ea-bcb8-475e-86cf-0b9eaca8a48f" providerId="ADAL" clId="{4D8D382B-DDFF-455F-B5ED-E854E938891F}" dt="2026-01-11T13:04:23.256" v="3004" actId="20577"/>
-        <pc:sldMkLst>
-          <pc:docMk/>
-          <pc:sldMk cId="1443235456" sldId="268"/>
-        </pc:sldMkLst>
-        <pc:spChg chg="del">
-          <ac:chgData name="#CUI SHUAIWEN#" userId="35a196ea-bcb8-475e-86cf-0b9eaca8a48f" providerId="ADAL" clId="{4D8D382B-DDFF-455F-B5ED-E854E938891F}" dt="2026-01-11T12:43:53.379" v="2127" actId="478"/>
-          <ac:spMkLst>
-            <pc:docMk/>
-            <pc:sldMk cId="1443235456" sldId="268"/>
-            <ac:spMk id="2" creationId="{F9FDFF5E-E9D6-2A46-5334-EC590DA80866}"/>
-          </ac:spMkLst>
-        </pc:spChg>
-        <pc:spChg chg="del">
-          <ac:chgData name="#CUI SHUAIWEN#" userId="35a196ea-bcb8-475e-86cf-0b9eaca8a48f" providerId="ADAL" clId="{4D8D382B-DDFF-455F-B5ED-E854E938891F}" dt="2026-01-11T12:43:53.379" v="2127" actId="478"/>
-          <ac:spMkLst>
-            <pc:docMk/>
-            <pc:sldMk cId="1443235456" sldId="268"/>
-            <ac:spMk id="3" creationId="{C91BE4F7-C505-A0BF-5F39-E9B2C413C02E}"/>
-          </ac:spMkLst>
-        </pc:spChg>
-        <pc:spChg chg="add mod">
-          <ac:chgData name="#CUI SHUAIWEN#" userId="35a196ea-bcb8-475e-86cf-0b9eaca8a48f" providerId="ADAL" clId="{4D8D382B-DDFF-455F-B5ED-E854E938891F}" dt="2026-01-11T13:02:14.459" v="2971" actId="1076"/>
-          <ac:spMkLst>
-            <pc:docMk/>
-            <pc:sldMk cId="1443235456" sldId="268"/>
-            <ac:spMk id="4" creationId="{ED64E8B1-94F8-70CF-D7E3-4E26EF9E519C}"/>
-          </ac:spMkLst>
-        </pc:spChg>
-        <pc:spChg chg="add mod">
-          <ac:chgData name="#CUI SHUAIWEN#" userId="35a196ea-bcb8-475e-86cf-0b9eaca8a48f" providerId="ADAL" clId="{4D8D382B-DDFF-455F-B5ED-E854E938891F}" dt="2026-01-11T13:04:23.256" v="3004" actId="20577"/>
-          <ac:spMkLst>
-            <pc:docMk/>
-            <pc:sldMk cId="1443235456" sldId="268"/>
-            <ac:spMk id="5" creationId="{F68ED2E1-E530-EBB8-CDA8-CDB621AAC57F}"/>
-          </ac:spMkLst>
-        </pc:spChg>
-      </pc:sldChg>
-      <pc:sldChg chg="del">
-        <pc:chgData name="#CUI SHUAIWEN#" userId="35a196ea-bcb8-475e-86cf-0b9eaca8a48f" providerId="ADAL" clId="{4D8D382B-DDFF-455F-B5ED-E854E938891F}" dt="2026-01-11T10:39:35.935" v="310" actId="47"/>
-        <pc:sldMkLst>
-          <pc:docMk/>
-          <pc:sldMk cId="1444261047" sldId="268"/>
-        </pc:sldMkLst>
-      </pc:sldChg>
-      <pc:sldChg chg="addSp delSp modSp add mod">
-        <pc:chgData name="#CUI SHUAIWEN#" userId="35a196ea-bcb8-475e-86cf-0b9eaca8a48f" providerId="ADAL" clId="{4D8D382B-DDFF-455F-B5ED-E854E938891F}" dt="2026-01-11T13:16:07.335" v="3099" actId="14100"/>
+      <pc:sldChg chg="addSp delSp modSp mod">
+        <pc:chgData name="#JIANG SHUO#" userId="fb4bb6a7-b10d-4e4a-bf68-a269bc875e77" providerId="ADAL" clId="{FCFA541B-5210-44D5-866D-E58C6E9566A6}" dt="2026-08-17T05:02:10.857" v="137" actId="14100"/>
         <pc:sldMkLst>
           <pc:docMk/>
           <pc:sldMk cId="987049720" sldId="269"/>
         </pc:sldMkLst>
-        <pc:spChg chg="add mod">
-          <ac:chgData name="#CUI SHUAIWEN#" userId="35a196ea-bcb8-475e-86cf-0b9eaca8a48f" providerId="ADAL" clId="{4D8D382B-DDFF-455F-B5ED-E854E938891F}" dt="2026-01-11T13:05:18.850" v="3047" actId="20577"/>
-          <ac:spMkLst>
-            <pc:docMk/>
-            <pc:sldMk cId="987049720" sldId="269"/>
-            <ac:spMk id="2" creationId="{0F7CF7B7-7CE4-AE82-E71E-3279B130976D}"/>
-          </ac:spMkLst>
-        </pc:spChg>
-        <pc:spChg chg="del">
-          <ac:chgData name="#CUI SHUAIWEN#" userId="35a196ea-bcb8-475e-86cf-0b9eaca8a48f" providerId="ADAL" clId="{4D8D382B-DDFF-455F-B5ED-E854E938891F}" dt="2026-01-11T13:04:59.235" v="3007" actId="478"/>
-          <ac:spMkLst>
-            <pc:docMk/>
-            <pc:sldMk cId="987049720" sldId="269"/>
-            <ac:spMk id="4" creationId="{A7312DF1-DB15-76D1-E76F-54C6DFDACBB5}"/>
-          </ac:spMkLst>
-        </pc:spChg>
-        <pc:spChg chg="add">
-          <ac:chgData name="#CUI SHUAIWEN#" userId="35a196ea-bcb8-475e-86cf-0b9eaca8a48f" providerId="ADAL" clId="{4D8D382B-DDFF-455F-B5ED-E854E938891F}" dt="2026-01-11T13:12:10.197" v="3053"/>
-          <ac:spMkLst>
-            <pc:docMk/>
-            <pc:sldMk cId="987049720" sldId="269"/>
-            <ac:spMk id="5" creationId="{83B68BC0-F7EB-03A5-85DC-D6ABE5CB43E2}"/>
-          </ac:spMkLst>
-        </pc:spChg>
-        <pc:spChg chg="add del mod">
-          <ac:chgData name="#CUI SHUAIWEN#" userId="35a196ea-bcb8-475e-86cf-0b9eaca8a48f" providerId="ADAL" clId="{4D8D382B-DDFF-455F-B5ED-E854E938891F}" dt="2026-01-11T13:12:57.399" v="3057" actId="478"/>
-          <ac:spMkLst>
-            <pc:docMk/>
-            <pc:sldMk cId="987049720" sldId="269"/>
-            <ac:spMk id="6" creationId="{5CF911B8-2DCE-3CA5-1098-0172A0E91D33}"/>
-          </ac:spMkLst>
-        </pc:spChg>
-        <pc:spChg chg="add">
-          <ac:chgData name="#CUI SHUAIWEN#" userId="35a196ea-bcb8-475e-86cf-0b9eaca8a48f" providerId="ADAL" clId="{4D8D382B-DDFF-455F-B5ED-E854E938891F}" dt="2026-01-11T13:12:22.961" v="3055"/>
-          <ac:spMkLst>
-            <pc:docMk/>
-            <pc:sldMk cId="987049720" sldId="269"/>
-            <ac:spMk id="7" creationId="{7AE19AFE-941A-3446-B466-69778A2E62E7}"/>
-          </ac:spMkLst>
-        </pc:spChg>
-        <pc:spChg chg="add mod">
-          <ac:chgData name="#CUI SHUAIWEN#" userId="35a196ea-bcb8-475e-86cf-0b9eaca8a48f" providerId="ADAL" clId="{4D8D382B-DDFF-455F-B5ED-E854E938891F}" dt="2026-01-11T13:15:52.744" v="3093" actId="1582"/>
+        <pc:spChg chg="mod">
+          <ac:chgData name="#JIANG SHUO#" userId="fb4bb6a7-b10d-4e4a-bf68-a269bc875e77" providerId="ADAL" clId="{FCFA541B-5210-44D5-866D-E58C6E9566A6}" dt="2026-08-17T05:00:56.510" v="119" actId="14100"/>
           <ac:spMkLst>
             <pc:docMk/>
             <pc:sldMk cId="987049720" sldId="269"/>
             <ac:spMk id="16" creationId="{7E0F29FD-C5C8-23F9-EA3F-D17CCFB0B60B}"/>
           </ac:spMkLst>
         </pc:spChg>
-        <pc:spChg chg="add mod">
-          <ac:chgData name="#CUI SHUAIWEN#" userId="35a196ea-bcb8-475e-86cf-0b9eaca8a48f" providerId="ADAL" clId="{4D8D382B-DDFF-455F-B5ED-E854E938891F}" dt="2026-01-11T13:15:48.635" v="3092" actId="1582"/>
+        <pc:spChg chg="mod">
+          <ac:chgData name="#JIANG SHUO#" userId="fb4bb6a7-b10d-4e4a-bf68-a269bc875e77" providerId="ADAL" clId="{FCFA541B-5210-44D5-866D-E58C6E9566A6}" dt="2026-08-17T05:02:07.587" v="136" actId="1076"/>
           <ac:spMkLst>
             <pc:docMk/>
             <pc:sldMk cId="987049720" sldId="269"/>
@@ -1399,483 +308,77 @@
           </ac:spMkLst>
         </pc:spChg>
         <pc:picChg chg="add mod">
-          <ac:chgData name="#CUI SHUAIWEN#" userId="35a196ea-bcb8-475e-86cf-0b9eaca8a48f" providerId="ADAL" clId="{4D8D382B-DDFF-455F-B5ED-E854E938891F}" dt="2026-01-11T13:14:29.279" v="3064" actId="1076"/>
+          <ac:chgData name="#JIANG SHUO#" userId="fb4bb6a7-b10d-4e4a-bf68-a269bc875e77" providerId="ADAL" clId="{FCFA541B-5210-44D5-866D-E58C6E9566A6}" dt="2026-08-17T04:57:01.332" v="105" actId="1076"/>
+          <ac:picMkLst>
+            <pc:docMk/>
+            <pc:sldMk cId="987049720" sldId="269"/>
+            <ac:picMk id="3" creationId="{FB950885-3997-1140-D6CE-2D36C1F00832}"/>
+          </ac:picMkLst>
+        </pc:picChg>
+        <pc:picChg chg="del">
+          <ac:chgData name="#JIANG SHUO#" userId="fb4bb6a7-b10d-4e4a-bf68-a269bc875e77" providerId="ADAL" clId="{FCFA541B-5210-44D5-866D-E58C6E9566A6}" dt="2026-08-17T04:56:48.700" v="100" actId="478"/>
           <ac:picMkLst>
             <pc:docMk/>
             <pc:sldMk cId="987049720" sldId="269"/>
             <ac:picMk id="4" creationId="{D8A208E8-88EE-0401-B957-FAFE5152721F}"/>
           </ac:picMkLst>
         </pc:picChg>
-        <pc:picChg chg="del">
-          <ac:chgData name="#CUI SHUAIWEN#" userId="35a196ea-bcb8-475e-86cf-0b9eaca8a48f" providerId="ADAL" clId="{4D8D382B-DDFF-455F-B5ED-E854E938891F}" dt="2026-01-11T13:04:56.018" v="3006" actId="478"/>
+        <pc:picChg chg="add mod ord modCrop">
+          <ac:chgData name="#JIANG SHUO#" userId="fb4bb6a7-b10d-4e4a-bf68-a269bc875e77" providerId="ADAL" clId="{FCFA541B-5210-44D5-866D-E58C6E9566A6}" dt="2026-08-17T05:00:48.984" v="115" actId="1076"/>
           <ac:picMkLst>
             <pc:docMk/>
             <pc:sldMk cId="987049720" sldId="269"/>
-            <ac:picMk id="7" creationId="{0AF7F578-F142-260E-C63B-F539629F806A}"/>
+            <ac:picMk id="6" creationId="{9BE9A133-4B19-3FFA-927C-8D5E691E1605}"/>
           </ac:picMkLst>
         </pc:picChg>
-        <pc:picChg chg="add mod">
-          <ac:chgData name="#CUI SHUAIWEN#" userId="35a196ea-bcb8-475e-86cf-0b9eaca8a48f" providerId="ADAL" clId="{4D8D382B-DDFF-455F-B5ED-E854E938891F}" dt="2026-01-11T13:14:55.548" v="3074" actId="1076"/>
+        <pc:picChg chg="add mod ord modCrop">
+          <ac:chgData name="#JIANG SHUO#" userId="fb4bb6a7-b10d-4e4a-bf68-a269bc875e77" providerId="ADAL" clId="{FCFA541B-5210-44D5-866D-E58C6E9566A6}" dt="2026-08-17T05:01:35.332" v="132" actId="1076"/>
+          <ac:picMkLst>
+            <pc:docMk/>
+            <pc:sldMk cId="987049720" sldId="269"/>
+            <ac:picMk id="8" creationId="{F878ED72-6AB0-C9FD-E8F2-DA516DC3B385}"/>
+          </ac:picMkLst>
+        </pc:picChg>
+        <pc:picChg chg="del">
+          <ac:chgData name="#JIANG SHUO#" userId="fb4bb6a7-b10d-4e4a-bf68-a269bc875e77" providerId="ADAL" clId="{FCFA541B-5210-44D5-866D-E58C6E9566A6}" dt="2026-08-17T05:00:33.305" v="110" actId="478"/>
           <ac:picMkLst>
             <pc:docMk/>
             <pc:sldMk cId="987049720" sldId="269"/>
             <ac:picMk id="9" creationId="{FAB10BA0-EBCE-1EED-CBA4-2E5185D4F429}"/>
           </ac:picMkLst>
         </pc:picChg>
-        <pc:picChg chg="add mod">
-          <ac:chgData name="#CUI SHUAIWEN#" userId="35a196ea-bcb8-475e-86cf-0b9eaca8a48f" providerId="ADAL" clId="{4D8D382B-DDFF-455F-B5ED-E854E938891F}" dt="2026-01-11T13:14:53.308" v="3073" actId="1076"/>
+        <pc:picChg chg="del">
+          <ac:chgData name="#JIANG SHUO#" userId="fb4bb6a7-b10d-4e4a-bf68-a269bc875e77" providerId="ADAL" clId="{FCFA541B-5210-44D5-866D-E58C6E9566A6}" dt="2026-08-17T05:01:00.961" v="121" actId="478"/>
           <ac:picMkLst>
             <pc:docMk/>
             <pc:sldMk cId="987049720" sldId="269"/>
             <ac:picMk id="11" creationId="{95E12AC2-DC1D-74EF-82B9-EB78F1266F7F}"/>
           </ac:picMkLst>
         </pc:picChg>
-        <pc:cxnChg chg="del">
-          <ac:chgData name="#CUI SHUAIWEN#" userId="35a196ea-bcb8-475e-86cf-0b9eaca8a48f" providerId="ADAL" clId="{4D8D382B-DDFF-455F-B5ED-E854E938891F}" dt="2026-01-11T13:04:56.018" v="3006" actId="478"/>
-          <ac:cxnSpMkLst>
-            <pc:docMk/>
-            <pc:sldMk cId="987049720" sldId="269"/>
-            <ac:cxnSpMk id="9" creationId="{96DFCD24-6BD9-F33B-6B12-2D15EAB9C3E1}"/>
-          </ac:cxnSpMkLst>
-        </pc:cxnChg>
-        <pc:cxnChg chg="del">
-          <ac:chgData name="#CUI SHUAIWEN#" userId="35a196ea-bcb8-475e-86cf-0b9eaca8a48f" providerId="ADAL" clId="{4D8D382B-DDFF-455F-B5ED-E854E938891F}" dt="2026-01-11T13:04:56.018" v="3006" actId="478"/>
-          <ac:cxnSpMkLst>
-            <pc:docMk/>
-            <pc:sldMk cId="987049720" sldId="269"/>
-            <ac:cxnSpMk id="10" creationId="{3D403449-2B0B-CDCC-753D-BAA84DAACD95}"/>
-          </ac:cxnSpMkLst>
-        </pc:cxnChg>
-        <pc:cxnChg chg="add mod">
-          <ac:chgData name="#CUI SHUAIWEN#" userId="35a196ea-bcb8-475e-86cf-0b9eaca8a48f" providerId="ADAL" clId="{4D8D382B-DDFF-455F-B5ED-E854E938891F}" dt="2026-01-11T13:15:08.478" v="3078" actId="14100"/>
+        <pc:cxnChg chg="mod ord">
+          <ac:chgData name="#JIANG SHUO#" userId="fb4bb6a7-b10d-4e4a-bf68-a269bc875e77" providerId="ADAL" clId="{FCFA541B-5210-44D5-866D-E58C6E9566A6}" dt="2026-08-17T05:00:58.446" v="120" actId="1076"/>
           <ac:cxnSpMkLst>
             <pc:docMk/>
             <pc:sldMk cId="987049720" sldId="269"/>
             <ac:cxnSpMk id="12" creationId="{3A1266E3-78EA-F711-3D66-742DA96A4E23}"/>
           </ac:cxnSpMkLst>
         </pc:cxnChg>
-        <pc:cxnChg chg="add mod">
-          <ac:chgData name="#CUI SHUAIWEN#" userId="35a196ea-bcb8-475e-86cf-0b9eaca8a48f" providerId="ADAL" clId="{4D8D382B-DDFF-455F-B5ED-E854E938891F}" dt="2026-01-11T13:15:58.714" v="3094" actId="14100"/>
+        <pc:cxnChg chg="del mod">
+          <ac:chgData name="#JIANG SHUO#" userId="fb4bb6a7-b10d-4e4a-bf68-a269bc875e77" providerId="ADAL" clId="{FCFA541B-5210-44D5-866D-E58C6E9566A6}" dt="2026-08-17T05:01:57.768" v="134" actId="478"/>
           <ac:cxnSpMkLst>
             <pc:docMk/>
             <pc:sldMk cId="987049720" sldId="269"/>
             <ac:cxnSpMk id="17" creationId="{6CD26AAB-4A93-9ECB-14BE-61E6F44E5164}"/>
           </ac:cxnSpMkLst>
         </pc:cxnChg>
-        <pc:cxnChg chg="add mod">
-          <ac:chgData name="#CUI SHUAIWEN#" userId="35a196ea-bcb8-475e-86cf-0b9eaca8a48f" providerId="ADAL" clId="{4D8D382B-DDFF-455F-B5ED-E854E938891F}" dt="2026-01-11T13:16:07.335" v="3099" actId="14100"/>
+        <pc:cxnChg chg="mod">
+          <ac:chgData name="#JIANG SHUO#" userId="fb4bb6a7-b10d-4e4a-bf68-a269bc875e77" providerId="ADAL" clId="{FCFA541B-5210-44D5-866D-E58C6E9566A6}" dt="2026-08-17T05:02:10.857" v="137" actId="14100"/>
           <ac:cxnSpMkLst>
             <pc:docMk/>
             <pc:sldMk cId="987049720" sldId="269"/>
             <ac:cxnSpMk id="21" creationId="{F3545CA8-659F-6416-28CF-C6D29B01723D}"/>
           </ac:cxnSpMkLst>
         </pc:cxnChg>
-      </pc:sldChg>
-      <pc:sldChg chg="del">
-        <pc:chgData name="#CUI SHUAIWEN#" userId="35a196ea-bcb8-475e-86cf-0b9eaca8a48f" providerId="ADAL" clId="{4D8D382B-DDFF-455F-B5ED-E854E938891F}" dt="2026-01-11T10:39:37.571" v="315" actId="47"/>
-        <pc:sldMkLst>
-          <pc:docMk/>
-          <pc:sldMk cId="3817903410" sldId="269"/>
-        </pc:sldMkLst>
-      </pc:sldChg>
-      <pc:sldChg chg="del">
-        <pc:chgData name="#CUI SHUAIWEN#" userId="35a196ea-bcb8-475e-86cf-0b9eaca8a48f" providerId="ADAL" clId="{4D8D382B-DDFF-455F-B5ED-E854E938891F}" dt="2026-01-11T10:39:33.532" v="295" actId="47"/>
-        <pc:sldMkLst>
-          <pc:docMk/>
-          <pc:sldMk cId="2307439785" sldId="270"/>
-        </pc:sldMkLst>
-      </pc:sldChg>
-      <pc:sldChg chg="del">
-        <pc:chgData name="#CUI SHUAIWEN#" userId="35a196ea-bcb8-475e-86cf-0b9eaca8a48f" providerId="ADAL" clId="{4D8D382B-DDFF-455F-B5ED-E854E938891F}" dt="2026-01-11T10:39:33.851" v="296" actId="47"/>
-        <pc:sldMkLst>
-          <pc:docMk/>
-          <pc:sldMk cId="4100255535" sldId="271"/>
-        </pc:sldMkLst>
-      </pc:sldChg>
-      <pc:sldChg chg="del">
-        <pc:chgData name="#CUI SHUAIWEN#" userId="35a196ea-bcb8-475e-86cf-0b9eaca8a48f" providerId="ADAL" clId="{4D8D382B-DDFF-455F-B5ED-E854E938891F}" dt="2026-01-11T10:39:34.054" v="297" actId="47"/>
-        <pc:sldMkLst>
-          <pc:docMk/>
-          <pc:sldMk cId="3247883481" sldId="272"/>
-        </pc:sldMkLst>
-      </pc:sldChg>
-      <pc:sldChg chg="del">
-        <pc:chgData name="#CUI SHUAIWEN#" userId="35a196ea-bcb8-475e-86cf-0b9eaca8a48f" providerId="ADAL" clId="{4D8D382B-DDFF-455F-B5ED-E854E938891F}" dt="2026-01-11T10:39:34.885" v="298" actId="47"/>
-        <pc:sldMkLst>
-          <pc:docMk/>
-          <pc:sldMk cId="2856787668" sldId="275"/>
-        </pc:sldMkLst>
-      </pc:sldChg>
-      <pc:sldChg chg="del">
-        <pc:chgData name="#CUI SHUAIWEN#" userId="35a196ea-bcb8-475e-86cf-0b9eaca8a48f" providerId="ADAL" clId="{4D8D382B-DDFF-455F-B5ED-E854E938891F}" dt="2026-01-11T10:39:35.622" v="300" actId="47"/>
-        <pc:sldMkLst>
-          <pc:docMk/>
-          <pc:sldMk cId="1401384901" sldId="276"/>
-        </pc:sldMkLst>
-      </pc:sldChg>
-      <pc:sldChg chg="del">
-        <pc:chgData name="#CUI SHUAIWEN#" userId="35a196ea-bcb8-475e-86cf-0b9eaca8a48f" providerId="ADAL" clId="{4D8D382B-DDFF-455F-B5ED-E854E938891F}" dt="2026-01-11T10:39:38.998" v="322" actId="47"/>
-        <pc:sldMkLst>
-          <pc:docMk/>
-          <pc:sldMk cId="3148859768" sldId="277"/>
-        </pc:sldMkLst>
-      </pc:sldChg>
-      <pc:sldChg chg="del">
-        <pc:chgData name="#CUI SHUAIWEN#" userId="35a196ea-bcb8-475e-86cf-0b9eaca8a48f" providerId="ADAL" clId="{4D8D382B-DDFF-455F-B5ED-E854E938891F}" dt="2026-01-11T10:39:39.601" v="326" actId="47"/>
-        <pc:sldMkLst>
-          <pc:docMk/>
-          <pc:sldMk cId="2732387768" sldId="278"/>
-        </pc:sldMkLst>
-      </pc:sldChg>
-      <pc:sldChg chg="del">
-        <pc:chgData name="#CUI SHUAIWEN#" userId="35a196ea-bcb8-475e-86cf-0b9eaca8a48f" providerId="ADAL" clId="{4D8D382B-DDFF-455F-B5ED-E854E938891F}" dt="2026-01-11T10:39:39.542" v="324" actId="47"/>
-        <pc:sldMkLst>
-          <pc:docMk/>
-          <pc:sldMk cId="940724167" sldId="279"/>
-        </pc:sldMkLst>
-      </pc:sldChg>
-      <pc:sldChg chg="del">
-        <pc:chgData name="#CUI SHUAIWEN#" userId="35a196ea-bcb8-475e-86cf-0b9eaca8a48f" providerId="ADAL" clId="{4D8D382B-DDFF-455F-B5ED-E854E938891F}" dt="2026-01-11T10:39:41.372" v="339" actId="47"/>
-        <pc:sldMkLst>
-          <pc:docMk/>
-          <pc:sldMk cId="1638102546" sldId="281"/>
-        </pc:sldMkLst>
-      </pc:sldChg>
-      <pc:sldChg chg="del">
-        <pc:chgData name="#CUI SHUAIWEN#" userId="35a196ea-bcb8-475e-86cf-0b9eaca8a48f" providerId="ADAL" clId="{4D8D382B-DDFF-455F-B5ED-E854E938891F}" dt="2026-01-11T10:39:35.110" v="299" actId="47"/>
-        <pc:sldMkLst>
-          <pc:docMk/>
-          <pc:sldMk cId="1606987900" sldId="282"/>
-        </pc:sldMkLst>
-      </pc:sldChg>
-      <pc:sldChg chg="del">
-        <pc:chgData name="#CUI SHUAIWEN#" userId="35a196ea-bcb8-475e-86cf-0b9eaca8a48f" providerId="ADAL" clId="{4D8D382B-DDFF-455F-B5ED-E854E938891F}" dt="2026-01-11T10:39:35.686" v="302" actId="47"/>
-        <pc:sldMkLst>
-          <pc:docMk/>
-          <pc:sldMk cId="4266317831" sldId="283"/>
-        </pc:sldMkLst>
-      </pc:sldChg>
-      <pc:sldChg chg="del">
-        <pc:chgData name="#CUI SHUAIWEN#" userId="35a196ea-bcb8-475e-86cf-0b9eaca8a48f" providerId="ADAL" clId="{4D8D382B-DDFF-455F-B5ED-E854E938891F}" dt="2026-01-11T10:39:35.717" v="303" actId="47"/>
-        <pc:sldMkLst>
-          <pc:docMk/>
-          <pc:sldMk cId="3400981342" sldId="284"/>
-        </pc:sldMkLst>
-      </pc:sldChg>
-      <pc:sldChg chg="del">
-        <pc:chgData name="#CUI SHUAIWEN#" userId="35a196ea-bcb8-475e-86cf-0b9eaca8a48f" providerId="ADAL" clId="{4D8D382B-DDFF-455F-B5ED-E854E938891F}" dt="2026-01-11T10:39:35.756" v="304" actId="47"/>
-        <pc:sldMkLst>
-          <pc:docMk/>
-          <pc:sldMk cId="1734273537" sldId="285"/>
-        </pc:sldMkLst>
-      </pc:sldChg>
-      <pc:sldChg chg="del">
-        <pc:chgData name="#CUI SHUAIWEN#" userId="35a196ea-bcb8-475e-86cf-0b9eaca8a48f" providerId="ADAL" clId="{4D8D382B-DDFF-455F-B5ED-E854E938891F}" dt="2026-01-11T10:39:35.788" v="305" actId="47"/>
-        <pc:sldMkLst>
-          <pc:docMk/>
-          <pc:sldMk cId="693852826" sldId="286"/>
-        </pc:sldMkLst>
-      </pc:sldChg>
-      <pc:sldChg chg="del">
-        <pc:chgData name="#CUI SHUAIWEN#" userId="35a196ea-bcb8-475e-86cf-0b9eaca8a48f" providerId="ADAL" clId="{4D8D382B-DDFF-455F-B5ED-E854E938891F}" dt="2026-01-11T10:39:35.654" v="301" actId="47"/>
-        <pc:sldMkLst>
-          <pc:docMk/>
-          <pc:sldMk cId="1021957308" sldId="287"/>
-        </pc:sldMkLst>
-      </pc:sldChg>
-      <pc:sldChg chg="del">
-        <pc:chgData name="#CUI SHUAIWEN#" userId="35a196ea-bcb8-475e-86cf-0b9eaca8a48f" providerId="ADAL" clId="{4D8D382B-DDFF-455F-B5ED-E854E938891F}" dt="2026-01-11T10:39:35.808" v="306" actId="47"/>
-        <pc:sldMkLst>
-          <pc:docMk/>
-          <pc:sldMk cId="645861750" sldId="288"/>
-        </pc:sldMkLst>
-      </pc:sldChg>
-      <pc:sldChg chg="del">
-        <pc:chgData name="#CUI SHUAIWEN#" userId="35a196ea-bcb8-475e-86cf-0b9eaca8a48f" providerId="ADAL" clId="{4D8D382B-DDFF-455F-B5ED-E854E938891F}" dt="2026-01-11T10:39:35.849" v="307" actId="47"/>
-        <pc:sldMkLst>
-          <pc:docMk/>
-          <pc:sldMk cId="3635646240" sldId="289"/>
-        </pc:sldMkLst>
-      </pc:sldChg>
-      <pc:sldChg chg="del">
-        <pc:chgData name="#CUI SHUAIWEN#" userId="35a196ea-bcb8-475e-86cf-0b9eaca8a48f" providerId="ADAL" clId="{4D8D382B-DDFF-455F-B5ED-E854E938891F}" dt="2026-01-11T10:39:37.602" v="316" actId="47"/>
-        <pc:sldMkLst>
-          <pc:docMk/>
-          <pc:sldMk cId="3679089101" sldId="290"/>
-        </pc:sldMkLst>
-      </pc:sldChg>
-      <pc:sldChg chg="del">
-        <pc:chgData name="#CUI SHUAIWEN#" userId="35a196ea-bcb8-475e-86cf-0b9eaca8a48f" providerId="ADAL" clId="{4D8D382B-DDFF-455F-B5ED-E854E938891F}" dt="2026-01-11T10:39:37.537" v="314" actId="47"/>
-        <pc:sldMkLst>
-          <pc:docMk/>
-          <pc:sldMk cId="2576713322" sldId="291"/>
-        </pc:sldMkLst>
-      </pc:sldChg>
-      <pc:sldChg chg="del">
-        <pc:chgData name="#CUI SHUAIWEN#" userId="35a196ea-bcb8-475e-86cf-0b9eaca8a48f" providerId="ADAL" clId="{4D8D382B-DDFF-455F-B5ED-E854E938891F}" dt="2026-01-11T10:39:37.663" v="318" actId="47"/>
-        <pc:sldMkLst>
-          <pc:docMk/>
-          <pc:sldMk cId="2283426111" sldId="292"/>
-        </pc:sldMkLst>
-      </pc:sldChg>
-      <pc:sldChg chg="del">
-        <pc:chgData name="#CUI SHUAIWEN#" userId="35a196ea-bcb8-475e-86cf-0b9eaca8a48f" providerId="ADAL" clId="{4D8D382B-DDFF-455F-B5ED-E854E938891F}" dt="2026-01-11T10:39:37.729" v="320" actId="47"/>
-        <pc:sldMkLst>
-          <pc:docMk/>
-          <pc:sldMk cId="243491516" sldId="293"/>
-        </pc:sldMkLst>
-      </pc:sldChg>
-      <pc:sldChg chg="del">
-        <pc:chgData name="#CUI SHUAIWEN#" userId="35a196ea-bcb8-475e-86cf-0b9eaca8a48f" providerId="ADAL" clId="{4D8D382B-DDFF-455F-B5ED-E854E938891F}" dt="2026-01-11T10:39:37.695" v="319" actId="47"/>
-        <pc:sldMkLst>
-          <pc:docMk/>
-          <pc:sldMk cId="980262105" sldId="294"/>
-        </pc:sldMkLst>
-      </pc:sldChg>
-      <pc:sldChg chg="del">
-        <pc:chgData name="#CUI SHUAIWEN#" userId="35a196ea-bcb8-475e-86cf-0b9eaca8a48f" providerId="ADAL" clId="{4D8D382B-DDFF-455F-B5ED-E854E938891F}" dt="2026-01-11T10:39:37.756" v="321" actId="47"/>
-        <pc:sldMkLst>
-          <pc:docMk/>
-          <pc:sldMk cId="582355745" sldId="295"/>
-        </pc:sldMkLst>
-      </pc:sldChg>
-      <pc:sldChg chg="del">
-        <pc:chgData name="#CUI SHUAIWEN#" userId="35a196ea-bcb8-475e-86cf-0b9eaca8a48f" providerId="ADAL" clId="{4D8D382B-DDFF-455F-B5ED-E854E938891F}" dt="2026-01-11T10:39:39.495" v="323" actId="47"/>
-        <pc:sldMkLst>
-          <pc:docMk/>
-          <pc:sldMk cId="1602438779" sldId="296"/>
-        </pc:sldMkLst>
-      </pc:sldChg>
-      <pc:sldChg chg="del">
-        <pc:chgData name="#CUI SHUAIWEN#" userId="35a196ea-bcb8-475e-86cf-0b9eaca8a48f" providerId="ADAL" clId="{4D8D382B-DDFF-455F-B5ED-E854E938891F}" dt="2026-01-11T10:39:39.635" v="327" actId="47"/>
-        <pc:sldMkLst>
-          <pc:docMk/>
-          <pc:sldMk cId="273653382" sldId="297"/>
-        </pc:sldMkLst>
-      </pc:sldChg>
-      <pc:sldChg chg="del">
-        <pc:chgData name="#CUI SHUAIWEN#" userId="35a196ea-bcb8-475e-86cf-0b9eaca8a48f" providerId="ADAL" clId="{4D8D382B-DDFF-455F-B5ED-E854E938891F}" dt="2026-01-11T10:39:39.662" v="328" actId="47"/>
-        <pc:sldMkLst>
-          <pc:docMk/>
-          <pc:sldMk cId="856398079" sldId="298"/>
-        </pc:sldMkLst>
-      </pc:sldChg>
-      <pc:sldChg chg="del">
-        <pc:chgData name="#CUI SHUAIWEN#" userId="35a196ea-bcb8-475e-86cf-0b9eaca8a48f" providerId="ADAL" clId="{4D8D382B-DDFF-455F-B5ED-E854E938891F}" dt="2026-01-11T10:39:39.571" v="325" actId="47"/>
-        <pc:sldMkLst>
-          <pc:docMk/>
-          <pc:sldMk cId="3704679447" sldId="299"/>
-        </pc:sldMkLst>
-      </pc:sldChg>
-      <pc:sldChg chg="del">
-        <pc:chgData name="#CUI SHUAIWEN#" userId="35a196ea-bcb8-475e-86cf-0b9eaca8a48f" providerId="ADAL" clId="{4D8D382B-DDFF-455F-B5ED-E854E938891F}" dt="2026-01-11T10:39:37.499" v="313" actId="47"/>
-        <pc:sldMkLst>
-          <pc:docMk/>
-          <pc:sldMk cId="3779232994" sldId="300"/>
-        </pc:sldMkLst>
-      </pc:sldChg>
-      <pc:sldChg chg="del">
-        <pc:chgData name="#CUI SHUAIWEN#" userId="35a196ea-bcb8-475e-86cf-0b9eaca8a48f" providerId="ADAL" clId="{4D8D382B-DDFF-455F-B5ED-E854E938891F}" dt="2026-01-11T10:39:35.957" v="311" actId="47"/>
-        <pc:sldMkLst>
-          <pc:docMk/>
-          <pc:sldMk cId="206254916" sldId="301"/>
-        </pc:sldMkLst>
-      </pc:sldChg>
-      <pc:sldChg chg="del">
-        <pc:chgData name="#CUI SHUAIWEN#" userId="35a196ea-bcb8-475e-86cf-0b9eaca8a48f" providerId="ADAL" clId="{4D8D382B-DDFF-455F-B5ED-E854E938891F}" dt="2026-01-11T10:39:36.993" v="312" actId="47"/>
-        <pc:sldMkLst>
-          <pc:docMk/>
-          <pc:sldMk cId="2977683853" sldId="302"/>
-        </pc:sldMkLst>
-      </pc:sldChg>
-      <pc:sldChg chg="del">
-        <pc:chgData name="#CUI SHUAIWEN#" userId="35a196ea-bcb8-475e-86cf-0b9eaca8a48f" providerId="ADAL" clId="{4D8D382B-DDFF-455F-B5ED-E854E938891F}" dt="2026-01-11T10:39:37.635" v="317" actId="47"/>
-        <pc:sldMkLst>
-          <pc:docMk/>
-          <pc:sldMk cId="3525409591" sldId="303"/>
-        </pc:sldMkLst>
-      </pc:sldChg>
-      <pc:sldChg chg="del">
-        <pc:chgData name="#CUI SHUAIWEN#" userId="35a196ea-bcb8-475e-86cf-0b9eaca8a48f" providerId="ADAL" clId="{4D8D382B-DDFF-455F-B5ED-E854E938891F}" dt="2026-01-11T10:39:39.690" v="329" actId="47"/>
-        <pc:sldMkLst>
-          <pc:docMk/>
-          <pc:sldMk cId="2224933946" sldId="304"/>
-        </pc:sldMkLst>
-      </pc:sldChg>
-      <pc:sldChg chg="del">
-        <pc:chgData name="#CUI SHUAIWEN#" userId="35a196ea-bcb8-475e-86cf-0b9eaca8a48f" providerId="ADAL" clId="{4D8D382B-DDFF-455F-B5ED-E854E938891F}" dt="2026-01-11T10:39:41.291" v="337" actId="47"/>
-        <pc:sldMkLst>
-          <pc:docMk/>
-          <pc:sldMk cId="368609131" sldId="305"/>
-        </pc:sldMkLst>
-      </pc:sldChg>
-      <pc:sldChg chg="del">
-        <pc:chgData name="#CUI SHUAIWEN#" userId="35a196ea-bcb8-475e-86cf-0b9eaca8a48f" providerId="ADAL" clId="{4D8D382B-DDFF-455F-B5ED-E854E938891F}" dt="2026-01-11T10:39:41.265" v="336" actId="47"/>
-        <pc:sldMkLst>
-          <pc:docMk/>
-          <pc:sldMk cId="2102464296" sldId="306"/>
-        </pc:sldMkLst>
-      </pc:sldChg>
-      <pc:sldChg chg="del">
-        <pc:chgData name="#CUI SHUAIWEN#" userId="35a196ea-bcb8-475e-86cf-0b9eaca8a48f" providerId="ADAL" clId="{4D8D382B-DDFF-455F-B5ED-E854E938891F}" dt="2026-01-11T10:39:41.204" v="335" actId="47"/>
-        <pc:sldMkLst>
-          <pc:docMk/>
-          <pc:sldMk cId="3511831332" sldId="307"/>
-        </pc:sldMkLst>
-      </pc:sldChg>
-      <pc:sldChg chg="del">
-        <pc:chgData name="#CUI SHUAIWEN#" userId="35a196ea-bcb8-475e-86cf-0b9eaca8a48f" providerId="ADAL" clId="{4D8D382B-DDFF-455F-B5ED-E854E938891F}" dt="2026-01-11T10:39:39.738" v="330" actId="47"/>
-        <pc:sldMkLst>
-          <pc:docMk/>
-          <pc:sldMk cId="308953199" sldId="308"/>
-        </pc:sldMkLst>
-      </pc:sldChg>
-      <pc:sldChg chg="del">
-        <pc:chgData name="#CUI SHUAIWEN#" userId="35a196ea-bcb8-475e-86cf-0b9eaca8a48f" providerId="ADAL" clId="{4D8D382B-DDFF-455F-B5ED-E854E938891F}" dt="2026-01-11T10:39:39.795" v="332" actId="47"/>
-        <pc:sldMkLst>
-          <pc:docMk/>
-          <pc:sldMk cId="1823350634" sldId="309"/>
-        </pc:sldMkLst>
-      </pc:sldChg>
-      <pc:sldChg chg="del">
-        <pc:chgData name="#CUI SHUAIWEN#" userId="35a196ea-bcb8-475e-86cf-0b9eaca8a48f" providerId="ADAL" clId="{4D8D382B-DDFF-455F-B5ED-E854E938891F}" dt="2026-01-11T10:39:41.172" v="334" actId="47"/>
-        <pc:sldMkLst>
-          <pc:docMk/>
-          <pc:sldMk cId="1422115227" sldId="310"/>
-        </pc:sldMkLst>
-      </pc:sldChg>
-      <pc:sldChg chg="del">
-        <pc:chgData name="#CUI SHUAIWEN#" userId="35a196ea-bcb8-475e-86cf-0b9eaca8a48f" providerId="ADAL" clId="{4D8D382B-DDFF-455F-B5ED-E854E938891F}" dt="2026-01-11T10:39:40.661" v="333" actId="47"/>
-        <pc:sldMkLst>
-          <pc:docMk/>
-          <pc:sldMk cId="1696387493" sldId="311"/>
-        </pc:sldMkLst>
-      </pc:sldChg>
-      <pc:sldChg chg="del">
-        <pc:chgData name="#CUI SHUAIWEN#" userId="35a196ea-bcb8-475e-86cf-0b9eaca8a48f" providerId="ADAL" clId="{4D8D382B-DDFF-455F-B5ED-E854E938891F}" dt="2026-01-11T10:39:41.347" v="338" actId="47"/>
-        <pc:sldMkLst>
-          <pc:docMk/>
-          <pc:sldMk cId="1959596423" sldId="312"/>
-        </pc:sldMkLst>
-      </pc:sldChg>
-      <pc:sldChg chg="del">
-        <pc:chgData name="#CUI SHUAIWEN#" userId="35a196ea-bcb8-475e-86cf-0b9eaca8a48f" providerId="ADAL" clId="{4D8D382B-DDFF-455F-B5ED-E854E938891F}" dt="2026-01-11T10:39:39.765" v="331" actId="47"/>
-        <pc:sldMkLst>
-          <pc:docMk/>
-          <pc:sldMk cId="3309710374" sldId="313"/>
-        </pc:sldMkLst>
-      </pc:sldChg>
-      <pc:sldChg chg="del">
-        <pc:chgData name="#CUI SHUAIWEN#" userId="35a196ea-bcb8-475e-86cf-0b9eaca8a48f" providerId="ADAL" clId="{4D8D382B-DDFF-455F-B5ED-E854E938891F}" dt="2026-01-11T10:39:41.403" v="340" actId="47"/>
-        <pc:sldMkLst>
-          <pc:docMk/>
-          <pc:sldMk cId="1599020557" sldId="314"/>
-        </pc:sldMkLst>
-      </pc:sldChg>
-      <pc:sldChg chg="del">
-        <pc:chgData name="#CUI SHUAIWEN#" userId="35a196ea-bcb8-475e-86cf-0b9eaca8a48f" providerId="ADAL" clId="{4D8D382B-DDFF-455F-B5ED-E854E938891F}" dt="2026-01-11T10:39:45.408" v="347" actId="47"/>
-        <pc:sldMkLst>
-          <pc:docMk/>
-          <pc:sldMk cId="3998120187" sldId="315"/>
-        </pc:sldMkLst>
-      </pc:sldChg>
-      <pc:sldChg chg="del">
-        <pc:chgData name="#CUI SHUAIWEN#" userId="35a196ea-bcb8-475e-86cf-0b9eaca8a48f" providerId="ADAL" clId="{4D8D382B-DDFF-455F-B5ED-E854E938891F}" dt="2026-01-11T10:39:41.433" v="341" actId="47"/>
-        <pc:sldMkLst>
-          <pc:docMk/>
-          <pc:sldMk cId="3004921698" sldId="316"/>
-        </pc:sldMkLst>
-      </pc:sldChg>
-      <pc:sldChg chg="del">
-        <pc:chgData name="#CUI SHUAIWEN#" userId="35a196ea-bcb8-475e-86cf-0b9eaca8a48f" providerId="ADAL" clId="{4D8D382B-DDFF-455F-B5ED-E854E938891F}" dt="2026-01-11T10:39:41.465" v="342" actId="47"/>
-        <pc:sldMkLst>
-          <pc:docMk/>
-          <pc:sldMk cId="684862405" sldId="317"/>
-        </pc:sldMkLst>
-      </pc:sldChg>
-      <pc:sldChg chg="del">
-        <pc:chgData name="#CUI SHUAIWEN#" userId="35a196ea-bcb8-475e-86cf-0b9eaca8a48f" providerId="ADAL" clId="{4D8D382B-DDFF-455F-B5ED-E854E938891F}" dt="2026-01-11T10:39:42.169" v="343" actId="47"/>
-        <pc:sldMkLst>
-          <pc:docMk/>
-          <pc:sldMk cId="1252025687" sldId="318"/>
-        </pc:sldMkLst>
-      </pc:sldChg>
-      <pc:sldChg chg="del">
-        <pc:chgData name="#CUI SHUAIWEN#" userId="35a196ea-bcb8-475e-86cf-0b9eaca8a48f" providerId="ADAL" clId="{4D8D382B-DDFF-455F-B5ED-E854E938891F}" dt="2026-01-11T10:39:42.687" v="344" actId="47"/>
-        <pc:sldMkLst>
-          <pc:docMk/>
-          <pc:sldMk cId="2401157614" sldId="319"/>
-        </pc:sldMkLst>
-      </pc:sldChg>
-      <pc:sldChg chg="del">
-        <pc:chgData name="#CUI SHUAIWEN#" userId="35a196ea-bcb8-475e-86cf-0b9eaca8a48f" providerId="ADAL" clId="{4D8D382B-DDFF-455F-B5ED-E854E938891F}" dt="2026-01-11T10:39:43.948" v="345" actId="47"/>
-        <pc:sldMkLst>
-          <pc:docMk/>
-          <pc:sldMk cId="2737140562" sldId="320"/>
-        </pc:sldMkLst>
-      </pc:sldChg>
-      <pc:sldChg chg="del">
-        <pc:chgData name="#CUI SHUAIWEN#" userId="35a196ea-bcb8-475e-86cf-0b9eaca8a48f" providerId="ADAL" clId="{4D8D382B-DDFF-455F-B5ED-E854E938891F}" dt="2026-01-11T10:39:45.140" v="346" actId="47"/>
-        <pc:sldMkLst>
-          <pc:docMk/>
-          <pc:sldMk cId="3180073989" sldId="321"/>
-        </pc:sldMkLst>
-      </pc:sldChg>
-      <pc:sldChg chg="del">
-        <pc:chgData name="#CUI SHUAIWEN#" userId="35a196ea-bcb8-475e-86cf-0b9eaca8a48f" providerId="ADAL" clId="{4D8D382B-DDFF-455F-B5ED-E854E938891F}" dt="2026-01-11T10:39:46.240" v="348" actId="47"/>
-        <pc:sldMkLst>
-          <pc:docMk/>
-          <pc:sldMk cId="1199951631" sldId="322"/>
-        </pc:sldMkLst>
-      </pc:sldChg>
-      <pc:sldChg chg="del">
-        <pc:chgData name="#CUI SHUAIWEN#" userId="35a196ea-bcb8-475e-86cf-0b9eaca8a48f" providerId="ADAL" clId="{4D8D382B-DDFF-455F-B5ED-E854E938891F}" dt="2026-01-11T10:39:49.687" v="350" actId="47"/>
-        <pc:sldMkLst>
-          <pc:docMk/>
-          <pc:sldMk cId="4183573685" sldId="323"/>
-        </pc:sldMkLst>
-      </pc:sldChg>
-      <pc:sldChg chg="del">
-        <pc:chgData name="#CUI SHUAIWEN#" userId="35a196ea-bcb8-475e-86cf-0b9eaca8a48f" providerId="ADAL" clId="{4D8D382B-DDFF-455F-B5ED-E854E938891F}" dt="2026-01-11T10:39:50.609" v="351" actId="47"/>
-        <pc:sldMkLst>
-          <pc:docMk/>
-          <pc:sldMk cId="3709926978" sldId="324"/>
-        </pc:sldMkLst>
-      </pc:sldChg>
-      <pc:sldChg chg="del">
-        <pc:chgData name="#CUI SHUAIWEN#" userId="35a196ea-bcb8-475e-86cf-0b9eaca8a48f" providerId="ADAL" clId="{4D8D382B-DDFF-455F-B5ED-E854E938891F}" dt="2026-01-11T10:39:52.747" v="352" actId="47"/>
-        <pc:sldMkLst>
-          <pc:docMk/>
-          <pc:sldMk cId="3088910532" sldId="325"/>
-        </pc:sldMkLst>
-      </pc:sldChg>
-      <pc:sldChg chg="del">
-        <pc:chgData name="#CUI SHUAIWEN#" userId="35a196ea-bcb8-475e-86cf-0b9eaca8a48f" providerId="ADAL" clId="{4D8D382B-DDFF-455F-B5ED-E854E938891F}" dt="2026-01-11T10:39:53.241" v="353" actId="47"/>
-        <pc:sldMkLst>
-          <pc:docMk/>
-          <pc:sldMk cId="2308674396" sldId="326"/>
-        </pc:sldMkLst>
-      </pc:sldChg>
-      <pc:sldChg chg="del">
-        <pc:chgData name="#CUI SHUAIWEN#" userId="35a196ea-bcb8-475e-86cf-0b9eaca8a48f" providerId="ADAL" clId="{4D8D382B-DDFF-455F-B5ED-E854E938891F}" dt="2026-01-11T10:39:55.713" v="355" actId="47"/>
-        <pc:sldMkLst>
-          <pc:docMk/>
-          <pc:sldMk cId="3053737023" sldId="327"/>
-        </pc:sldMkLst>
-      </pc:sldChg>
-      <pc:sldChg chg="del">
-        <pc:chgData name="#CUI SHUAIWEN#" userId="35a196ea-bcb8-475e-86cf-0b9eaca8a48f" providerId="ADAL" clId="{4D8D382B-DDFF-455F-B5ED-E854E938891F}" dt="2026-01-11T10:39:56.659" v="356" actId="47"/>
-        <pc:sldMkLst>
-          <pc:docMk/>
-          <pc:sldMk cId="756178142" sldId="328"/>
-        </pc:sldMkLst>
-      </pc:sldChg>
-      <pc:sldChg chg="del">
-        <pc:chgData name="#CUI SHUAIWEN#" userId="35a196ea-bcb8-475e-86cf-0b9eaca8a48f" providerId="ADAL" clId="{4D8D382B-DDFF-455F-B5ED-E854E938891F}" dt="2026-01-11T10:40:05.345" v="357" actId="47"/>
-        <pc:sldMkLst>
-          <pc:docMk/>
-          <pc:sldMk cId="1700336009" sldId="329"/>
-        </pc:sldMkLst>
       </pc:sldChg>
     </pc:docChg>
   </pc:docChgLst>
@@ -1968,7 +471,7 @@
               <a:rPr lang="en-US" smtClean="0">
                 <a:latin typeface="Arial"/>
               </a:rPr>
-              <a:t>1/11/2026</a:t>
+              <a:t>8/17/2026</a:t>
             </a:fld>
             <a:endParaRPr lang="en-US" dirty="0">
               <a:latin typeface="Arial"/>
@@ -2238,7 +741,7 @@
           <a:p>
             <a:fld id="{9F1CC899-6CEC-9548-B06D-7E1EB6F78CA3}" type="datetimeFigureOut">
               <a:rPr lang="en-US" smtClean="0"/>
-              <a:t>1/11/2026</a:t>
+              <a:t>8/17/2026</a:t>
             </a:fld>
             <a:endParaRPr lang="en-US"/>
           </a:p>
@@ -2406,7 +909,7 @@
           <a:p>
             <a:fld id="{9F1CC899-6CEC-9548-B06D-7E1EB6F78CA3}" type="datetimeFigureOut">
               <a:rPr lang="en-US" smtClean="0"/>
-              <a:t>1/11/2026</a:t>
+              <a:t>8/17/2026</a:t>
             </a:fld>
             <a:endParaRPr lang="en-US"/>
           </a:p>
@@ -2651,7 +1154,7 @@
           <a:p>
             <a:fld id="{9F1CC899-6CEC-9548-B06D-7E1EB6F78CA3}" type="datetimeFigureOut">
               <a:rPr lang="en-US" smtClean="0"/>
-              <a:t>1/11/2026</a:t>
+              <a:t>8/17/2026</a:t>
             </a:fld>
             <a:endParaRPr lang="en-US"/>
           </a:p>
@@ -2936,7 +1439,7 @@
           <a:p>
             <a:fld id="{9F1CC899-6CEC-9548-B06D-7E1EB6F78CA3}" type="datetimeFigureOut">
               <a:rPr lang="en-US" smtClean="0"/>
-              <a:t>1/11/2026</a:t>
+              <a:t>8/17/2026</a:t>
             </a:fld>
             <a:endParaRPr lang="en-US"/>
           </a:p>
@@ -3355,7 +1858,7 @@
           <a:p>
             <a:fld id="{9F1CC899-6CEC-9548-B06D-7E1EB6F78CA3}" type="datetimeFigureOut">
               <a:rPr lang="en-US" smtClean="0"/>
-              <a:t>1/11/2026</a:t>
+              <a:t>8/17/2026</a:t>
             </a:fld>
             <a:endParaRPr lang="en-US"/>
           </a:p>
@@ -3472,7 +1975,7 @@
           <a:p>
             <a:fld id="{9F1CC899-6CEC-9548-B06D-7E1EB6F78CA3}" type="datetimeFigureOut">
               <a:rPr lang="en-US" smtClean="0"/>
-              <a:t>1/11/2026</a:t>
+              <a:t>8/17/2026</a:t>
             </a:fld>
             <a:endParaRPr lang="en-US"/>
           </a:p>
@@ -3567,7 +2070,7 @@
           <a:p>
             <a:fld id="{9F1CC899-6CEC-9548-B06D-7E1EB6F78CA3}" type="datetimeFigureOut">
               <a:rPr lang="en-US" smtClean="0"/>
-              <a:t>1/11/2026</a:t>
+              <a:t>8/17/2026</a:t>
             </a:fld>
             <a:endParaRPr lang="en-US"/>
           </a:p>
@@ -3842,7 +2345,7 @@
           <a:p>
             <a:fld id="{9F1CC899-6CEC-9548-B06D-7E1EB6F78CA3}" type="datetimeFigureOut">
               <a:rPr lang="en-US" smtClean="0"/>
-              <a:t>1/11/2026</a:t>
+              <a:t>8/17/2026</a:t>
             </a:fld>
             <a:endParaRPr lang="en-US"/>
           </a:p>
@@ -4094,7 +2597,7 @@
           <a:p>
             <a:fld id="{9F1CC899-6CEC-9548-B06D-7E1EB6F78CA3}" type="datetimeFigureOut">
               <a:rPr lang="en-US" smtClean="0"/>
-              <a:t>1/11/2026</a:t>
+              <a:t>8/17/2026</a:t>
             </a:fld>
             <a:endParaRPr lang="en-US"/>
           </a:p>
@@ -4307,7 +2810,7 @@
             <a:fld id="{9F1CC899-6CEC-9548-B06D-7E1EB6F78CA3}" type="datetimeFigureOut">
               <a:rPr lang="en-US" smtClean="0"/>
               <a:pPr/>
-              <a:t>1/11/2026</a:t>
+              <a:t>8/17/2026</a:t>
             </a:fld>
             <a:endParaRPr lang="en-US" dirty="0"/>
           </a:p>
@@ -4789,404 +3292,6 @@
 </p:sld>
 </file>
 
-<file path=ppt/slides/slide10.xml><?xml version="1.0" encoding="utf-8"?>
-<p:sld xmlns:a="http://schemas.openxmlformats.org/drawingml/2006/main" xmlns:r="http://schemas.openxmlformats.org/officeDocument/2006/relationships" xmlns:p="http://schemas.openxmlformats.org/presentationml/2006/main">
-  <p:cSld>
-    <p:spTree>
-      <p:nvGrpSpPr>
-        <p:cNvPr id="1" name="">
-          <a:extLst>
-            <a:ext uri="{FF2B5EF4-FFF2-40B4-BE49-F238E27FC236}">
-              <a16:creationId xmlns:a16="http://schemas.microsoft.com/office/drawing/2014/main" id="{141066AF-A921-28C1-8AF9-8942C769A0D7}"/>
-            </a:ext>
-          </a:extLst>
-        </p:cNvPr>
-        <p:cNvGrpSpPr/>
-        <p:nvPr/>
-      </p:nvGrpSpPr>
-      <p:grpSpPr>
-        <a:xfrm>
-          <a:off x="0" y="0"/>
-          <a:ext cx="0" cy="0"/>
-          <a:chOff x="0" y="0"/>
-          <a:chExt cx="0" cy="0"/>
-        </a:xfrm>
-      </p:grpSpPr>
-      <p:sp>
-        <p:nvSpPr>
-          <p:cNvPr id="2" name="TextBox 1">
-            <a:extLst>
-              <a:ext uri="{FF2B5EF4-FFF2-40B4-BE49-F238E27FC236}">
-                <a16:creationId xmlns:a16="http://schemas.microsoft.com/office/drawing/2014/main" id="{0F7CF7B7-7CE4-AE82-E71E-3279B130976D}"/>
-              </a:ext>
-            </a:extLst>
-          </p:cNvPr>
-          <p:cNvSpPr txBox="1"/>
-          <p:nvPr/>
-        </p:nvSpPr>
-        <p:spPr>
-          <a:xfrm>
-            <a:off x="317634" y="168441"/>
-            <a:ext cx="5464980" cy="523220"/>
-          </a:xfrm>
-          <a:prstGeom prst="rect">
-            <a:avLst/>
-          </a:prstGeom>
-          <a:noFill/>
-        </p:spPr>
-        <p:txBody>
-          <a:bodyPr wrap="square" rtlCol="0">
-            <a:spAutoFit/>
-          </a:bodyPr>
-          <a:lstStyle/>
-          <a:p>
-            <a:r>
-              <a:rPr lang="en-US" sz="2800" b="1" dirty="0"/>
-              <a:t>Where to download </a:t>
-            </a:r>
-            <a:r>
-              <a:rPr lang="en-US" sz="2800" b="1"/>
-              <a:t>the slides?</a:t>
-            </a:r>
-            <a:endParaRPr lang="en-US" altLang="zh-CN" sz="2800" b="1" dirty="0"/>
-          </a:p>
-        </p:txBody>
-      </p:sp>
-      <p:pic>
-        <p:nvPicPr>
-          <p:cNvPr id="4" name="Picture 3" descr="A qr code with a dinosaur&#10;&#10;AI-generated content may be incorrect.">
-            <a:extLst>
-              <a:ext uri="{FF2B5EF4-FFF2-40B4-BE49-F238E27FC236}">
-                <a16:creationId xmlns:a16="http://schemas.microsoft.com/office/drawing/2014/main" id="{D8A208E8-88EE-0401-B957-FAFE5152721F}"/>
-              </a:ext>
-            </a:extLst>
-          </p:cNvPr>
-          <p:cNvPicPr>
-            <a:picLocks noChangeAspect="1"/>
-          </p:cNvPicPr>
-          <p:nvPr/>
-        </p:nvPicPr>
-        <p:blipFill>
-          <a:blip r:embed="rId2"/>
-          <a:stretch>
-            <a:fillRect/>
-          </a:stretch>
-        </p:blipFill>
-        <p:spPr>
-          <a:xfrm>
-            <a:off x="140481" y="867424"/>
-            <a:ext cx="3756490" cy="3756490"/>
-          </a:xfrm>
-          <a:prstGeom prst="rect">
-            <a:avLst/>
-          </a:prstGeom>
-        </p:spPr>
-      </p:pic>
-      <p:pic>
-        <p:nvPicPr>
-          <p:cNvPr id="9" name="Picture 8" descr="A screenshot of a computer&#10;&#10;AI-generated content may be incorrect.">
-            <a:extLst>
-              <a:ext uri="{FF2B5EF4-FFF2-40B4-BE49-F238E27FC236}">
-                <a16:creationId xmlns:a16="http://schemas.microsoft.com/office/drawing/2014/main" id="{FAB10BA0-EBCE-1EED-CBA4-2E5185D4F429}"/>
-              </a:ext>
-            </a:extLst>
-          </p:cNvPr>
-          <p:cNvPicPr>
-            <a:picLocks noChangeAspect="1"/>
-          </p:cNvPicPr>
-          <p:nvPr/>
-        </p:nvPicPr>
-        <p:blipFill>
-          <a:blip r:embed="rId3"/>
-          <a:stretch>
-            <a:fillRect/>
-          </a:stretch>
-        </p:blipFill>
-        <p:spPr>
-          <a:xfrm>
-            <a:off x="4358895" y="691661"/>
-            <a:ext cx="1889099" cy="4107144"/>
-          </a:xfrm>
-          <a:prstGeom prst="rect">
-            <a:avLst/>
-          </a:prstGeom>
-        </p:spPr>
-      </p:pic>
-      <p:pic>
-        <p:nvPicPr>
-          <p:cNvPr id="11" name="Picture 10" descr="A screenshot of a chat&#10;&#10;AI-generated content may be incorrect.">
-            <a:extLst>
-              <a:ext uri="{FF2B5EF4-FFF2-40B4-BE49-F238E27FC236}">
-                <a16:creationId xmlns:a16="http://schemas.microsoft.com/office/drawing/2014/main" id="{95E12AC2-DC1D-74EF-82B9-EB78F1266F7F}"/>
-              </a:ext>
-            </a:extLst>
-          </p:cNvPr>
-          <p:cNvPicPr>
-            <a:picLocks noChangeAspect="1"/>
-          </p:cNvPicPr>
-          <p:nvPr/>
-        </p:nvPicPr>
-        <p:blipFill>
-          <a:blip r:embed="rId4"/>
-          <a:stretch>
-            <a:fillRect/>
-          </a:stretch>
-        </p:blipFill>
-        <p:spPr>
-          <a:xfrm>
-            <a:off x="6826121" y="691661"/>
-            <a:ext cx="1889099" cy="4107144"/>
-          </a:xfrm>
-          <a:prstGeom prst="rect">
-            <a:avLst/>
-          </a:prstGeom>
-        </p:spPr>
-      </p:pic>
-      <p:cxnSp>
-        <p:nvCxnSpPr>
-          <p:cNvPr id="12" name="Straight Arrow Connector 11">
-            <a:extLst>
-              <a:ext uri="{FF2B5EF4-FFF2-40B4-BE49-F238E27FC236}">
-                <a16:creationId xmlns:a16="http://schemas.microsoft.com/office/drawing/2014/main" id="{3A1266E3-78EA-F711-3D66-742DA96A4E23}"/>
-              </a:ext>
-            </a:extLst>
-          </p:cNvPr>
-          <p:cNvCxnSpPr>
-            <a:cxnSpLocks/>
-          </p:cNvCxnSpPr>
-          <p:nvPr/>
-        </p:nvCxnSpPr>
-        <p:spPr>
-          <a:xfrm flipV="1">
-            <a:off x="3777286" y="1321332"/>
-            <a:ext cx="651091" cy="550555"/>
-          </a:xfrm>
-          <a:prstGeom prst="straightConnector1">
-            <a:avLst/>
-          </a:prstGeom>
-          <a:ln>
-            <a:solidFill>
-              <a:srgbClr val="FF0000"/>
-            </a:solidFill>
-            <a:tailEnd type="triangle"/>
-          </a:ln>
-        </p:spPr>
-        <p:style>
-          <a:lnRef idx="2">
-            <a:schemeClr val="accent1"/>
-          </a:lnRef>
-          <a:fillRef idx="0">
-            <a:schemeClr val="accent1"/>
-          </a:fillRef>
-          <a:effectRef idx="1">
-            <a:schemeClr val="accent1"/>
-          </a:effectRef>
-          <a:fontRef idx="minor">
-            <a:schemeClr val="tx1"/>
-          </a:fontRef>
-        </p:style>
-      </p:cxnSp>
-      <p:sp>
-        <p:nvSpPr>
-          <p:cNvPr id="16" name="Rectangle 15">
-            <a:extLst>
-              <a:ext uri="{FF2B5EF4-FFF2-40B4-BE49-F238E27FC236}">
-                <a16:creationId xmlns:a16="http://schemas.microsoft.com/office/drawing/2014/main" id="{7E0F29FD-C5C8-23F9-EA3F-D17CCFB0B60B}"/>
-              </a:ext>
-            </a:extLst>
-          </p:cNvPr>
-          <p:cNvSpPr/>
-          <p:nvPr/>
-        </p:nvSpPr>
-        <p:spPr>
-          <a:xfrm>
-            <a:off x="4428377" y="3044808"/>
-            <a:ext cx="1780926" cy="186710"/>
-          </a:xfrm>
-          <a:prstGeom prst="rect">
-            <a:avLst/>
-          </a:prstGeom>
-          <a:noFill/>
-          <a:ln w="28575">
-            <a:solidFill>
-              <a:srgbClr val="FF0000"/>
-            </a:solidFill>
-          </a:ln>
-        </p:spPr>
-        <p:style>
-          <a:lnRef idx="1">
-            <a:schemeClr val="accent1"/>
-          </a:lnRef>
-          <a:fillRef idx="3">
-            <a:schemeClr val="accent1"/>
-          </a:fillRef>
-          <a:effectRef idx="2">
-            <a:schemeClr val="accent1"/>
-          </a:effectRef>
-          <a:fontRef idx="minor">
-            <a:schemeClr val="lt1"/>
-          </a:fontRef>
-        </p:style>
-        <p:txBody>
-          <a:bodyPr rtlCol="0" anchor="ctr"/>
-          <a:lstStyle/>
-          <a:p>
-            <a:pPr algn="ctr"/>
-            <a:endParaRPr lang="en-US"/>
-          </a:p>
-        </p:txBody>
-      </p:sp>
-      <p:cxnSp>
-        <p:nvCxnSpPr>
-          <p:cNvPr id="17" name="Straight Arrow Connector 16">
-            <a:extLst>
-              <a:ext uri="{FF2B5EF4-FFF2-40B4-BE49-F238E27FC236}">
-                <a16:creationId xmlns:a16="http://schemas.microsoft.com/office/drawing/2014/main" id="{6CD26AAB-4A93-9ECB-14BE-61E6F44E5164}"/>
-              </a:ext>
-            </a:extLst>
-          </p:cNvPr>
-          <p:cNvCxnSpPr>
-            <a:cxnSpLocks/>
-          </p:cNvCxnSpPr>
-          <p:nvPr/>
-        </p:nvCxnSpPr>
-        <p:spPr>
-          <a:xfrm flipV="1">
-            <a:off x="6209303" y="2355418"/>
-            <a:ext cx="694178" cy="703058"/>
-          </a:xfrm>
-          <a:prstGeom prst="straightConnector1">
-            <a:avLst/>
-          </a:prstGeom>
-          <a:ln>
-            <a:solidFill>
-              <a:srgbClr val="FF0000"/>
-            </a:solidFill>
-            <a:tailEnd type="triangle"/>
-          </a:ln>
-        </p:spPr>
-        <p:style>
-          <a:lnRef idx="2">
-            <a:schemeClr val="accent1"/>
-          </a:lnRef>
-          <a:fillRef idx="0">
-            <a:schemeClr val="accent1"/>
-          </a:fillRef>
-          <a:effectRef idx="1">
-            <a:schemeClr val="accent1"/>
-          </a:effectRef>
-          <a:fontRef idx="minor">
-            <a:schemeClr val="tx1"/>
-          </a:fontRef>
-        </p:style>
-      </p:cxnSp>
-      <p:sp>
-        <p:nvSpPr>
-          <p:cNvPr id="19" name="Rectangle 18">
-            <a:extLst>
-              <a:ext uri="{FF2B5EF4-FFF2-40B4-BE49-F238E27FC236}">
-                <a16:creationId xmlns:a16="http://schemas.microsoft.com/office/drawing/2014/main" id="{9B088EBD-1777-E072-C48A-7B3EB1AD8169}"/>
-              </a:ext>
-            </a:extLst>
-          </p:cNvPr>
-          <p:cNvSpPr/>
-          <p:nvPr/>
-        </p:nvSpPr>
-        <p:spPr>
-          <a:xfrm>
-            <a:off x="7343925" y="3561053"/>
-            <a:ext cx="1259095" cy="186710"/>
-          </a:xfrm>
-          <a:prstGeom prst="rect">
-            <a:avLst/>
-          </a:prstGeom>
-          <a:noFill/>
-          <a:ln w="28575">
-            <a:solidFill>
-              <a:srgbClr val="FF0000"/>
-            </a:solidFill>
-          </a:ln>
-        </p:spPr>
-        <p:style>
-          <a:lnRef idx="1">
-            <a:schemeClr val="accent1"/>
-          </a:lnRef>
-          <a:fillRef idx="3">
-            <a:schemeClr val="accent1"/>
-          </a:fillRef>
-          <a:effectRef idx="2">
-            <a:schemeClr val="accent1"/>
-          </a:effectRef>
-          <a:fontRef idx="minor">
-            <a:schemeClr val="lt1"/>
-          </a:fontRef>
-        </p:style>
-        <p:txBody>
-          <a:bodyPr rtlCol="0" anchor="ctr"/>
-          <a:lstStyle/>
-          <a:p>
-            <a:pPr algn="ctr"/>
-            <a:endParaRPr lang="en-US"/>
-          </a:p>
-        </p:txBody>
-      </p:sp>
-      <p:cxnSp>
-        <p:nvCxnSpPr>
-          <p:cNvPr id="21" name="Straight Arrow Connector 20">
-            <a:extLst>
-              <a:ext uri="{FF2B5EF4-FFF2-40B4-BE49-F238E27FC236}">
-                <a16:creationId xmlns:a16="http://schemas.microsoft.com/office/drawing/2014/main" id="{F3545CA8-659F-6416-28CF-C6D29B01723D}"/>
-              </a:ext>
-            </a:extLst>
-          </p:cNvPr>
-          <p:cNvCxnSpPr>
-            <a:cxnSpLocks/>
-          </p:cNvCxnSpPr>
-          <p:nvPr/>
-        </p:nvCxnSpPr>
-        <p:spPr>
-          <a:xfrm flipH="1">
-            <a:off x="8557234" y="3138163"/>
-            <a:ext cx="315971" cy="425283"/>
-          </a:xfrm>
-          <a:prstGeom prst="straightConnector1">
-            <a:avLst/>
-          </a:prstGeom>
-          <a:ln>
-            <a:solidFill>
-              <a:srgbClr val="FF0000"/>
-            </a:solidFill>
-            <a:tailEnd type="triangle"/>
-          </a:ln>
-        </p:spPr>
-        <p:style>
-          <a:lnRef idx="2">
-            <a:schemeClr val="accent1"/>
-          </a:lnRef>
-          <a:fillRef idx="0">
-            <a:schemeClr val="accent1"/>
-          </a:fillRef>
-          <a:effectRef idx="1">
-            <a:schemeClr val="accent1"/>
-          </a:effectRef>
-          <a:fontRef idx="minor">
-            <a:schemeClr val="tx1"/>
-          </a:fontRef>
-        </p:style>
-      </p:cxnSp>
-    </p:spTree>
-    <p:extLst>
-      <p:ext uri="{BB962C8B-B14F-4D97-AF65-F5344CB8AC3E}">
-        <p14:creationId xmlns:p14="http://schemas.microsoft.com/office/powerpoint/2010/main" val="987049720"/>
-      </p:ext>
-    </p:extLst>
-  </p:cSld>
-  <p:clrMapOvr>
-    <a:masterClrMapping/>
-  </p:clrMapOvr>
-</p:sld>
-</file>
-
 <file path=ppt/slides/slide2.xml><?xml version="1.0" encoding="utf-8"?>
 <p:sld xmlns:a="http://schemas.openxmlformats.org/drawingml/2006/main" xmlns:r="http://schemas.openxmlformats.org/officeDocument/2006/relationships" xmlns:p="http://schemas.openxmlformats.org/presentationml/2006/main">
   <p:cSld>
@@ -5245,10 +3350,10 @@
       </p:sp>
       <p:pic>
         <p:nvPicPr>
-          <p:cNvPr id="7" name="Picture 6" descr="A person with short dark hair wearing a grey shirt&#10;&#10;AI-generated content may be incorrect.">
+          <p:cNvPr id="9" name="Picture 8" descr="A person with short black hair&#10;&#10;AI-generated content may be incorrect.">
             <a:extLst>
               <a:ext uri="{FF2B5EF4-FFF2-40B4-BE49-F238E27FC236}">
-                <a16:creationId xmlns:a16="http://schemas.microsoft.com/office/drawing/2014/main" id="{7588EF94-AAC5-1CFE-F20E-AA65A364182E}"/>
+                <a16:creationId xmlns:a16="http://schemas.microsoft.com/office/drawing/2014/main" id="{BE5B02EF-9788-D660-C106-A23309EE681D}"/>
               </a:ext>
             </a:extLst>
           </p:cNvPr>
@@ -5265,38 +3370,8 @@
         </p:blipFill>
         <p:spPr>
           <a:xfrm>
-            <a:off x="317634" y="1043743"/>
-            <a:ext cx="1118501" cy="1437273"/>
-          </a:xfrm>
-          <a:prstGeom prst="rect">
-            <a:avLst/>
-          </a:prstGeom>
-        </p:spPr>
-      </p:pic>
-      <p:pic>
-        <p:nvPicPr>
-          <p:cNvPr id="9" name="Picture 8" descr="A person with short black hair&#10;&#10;AI-generated content may be incorrect.">
-            <a:extLst>
-              <a:ext uri="{FF2B5EF4-FFF2-40B4-BE49-F238E27FC236}">
-                <a16:creationId xmlns:a16="http://schemas.microsoft.com/office/drawing/2014/main" id="{BE5B02EF-9788-D660-C106-A23309EE681D}"/>
-              </a:ext>
-            </a:extLst>
-          </p:cNvPr>
-          <p:cNvPicPr>
-            <a:picLocks noChangeAspect="1"/>
-          </p:cNvPicPr>
-          <p:nvPr/>
-        </p:nvPicPr>
-        <p:blipFill>
-          <a:blip r:embed="rId3"/>
-          <a:stretch>
-            <a:fillRect/>
-          </a:stretch>
-        </p:blipFill>
-        <p:spPr>
-          <a:xfrm>
-            <a:off x="317634" y="2927271"/>
-            <a:ext cx="1118501" cy="1491335"/>
+            <a:off x="398021" y="2361774"/>
+            <a:ext cx="875973" cy="1167964"/>
           </a:xfrm>
           <a:prstGeom prst="rect">
             <a:avLst/>
@@ -5318,27 +3393,334 @@
           <p:nvPr/>
         </p:nvPicPr>
         <p:blipFill>
-          <a:blip r:embed="rId4"/>
+          <a:blip r:embed="rId3"/>
           <a:stretch>
             <a:fillRect/>
           </a:stretch>
         </p:blipFill>
         <p:spPr>
           <a:xfrm>
-            <a:off x="4424301" y="1043742"/>
-            <a:ext cx="1118501" cy="1491334"/>
+            <a:off x="4572000" y="2361774"/>
+            <a:ext cx="874800" cy="1166400"/>
           </a:xfrm>
           <a:prstGeom prst="rect">
             <a:avLst/>
           </a:prstGeom>
         </p:spPr>
       </p:pic>
+      <p:sp>
+        <p:nvSpPr>
+          <p:cNvPr id="18" name="TextBox 17">
+            <a:extLst>
+              <a:ext uri="{FF2B5EF4-FFF2-40B4-BE49-F238E27FC236}">
+                <a16:creationId xmlns:a16="http://schemas.microsoft.com/office/drawing/2014/main" id="{C7807775-BBEA-96DA-8E01-8F110858BE17}"/>
+              </a:ext>
+            </a:extLst>
+          </p:cNvPr>
+          <p:cNvSpPr txBox="1"/>
+          <p:nvPr/>
+        </p:nvSpPr>
+        <p:spPr>
+          <a:xfrm>
+            <a:off x="5747190" y="2371892"/>
+            <a:ext cx="2874788" cy="1162113"/>
+          </a:xfrm>
+          <a:prstGeom prst="rect">
+            <a:avLst/>
+          </a:prstGeom>
+          <a:noFill/>
+        </p:spPr>
+        <p:txBody>
+          <a:bodyPr wrap="square" rtlCol="0">
+            <a:spAutoFit/>
+          </a:bodyPr>
+          <a:lstStyle/>
+          <a:p>
+            <a:pPr>
+              <a:lnSpc>
+                <a:spcPct val="150000"/>
+              </a:lnSpc>
+            </a:pPr>
+            <a:r>
+              <a:rPr lang="en-US" altLang="zh-CN" sz="1600" b="1" dirty="0">
+                <a:solidFill>
+                  <a:srgbClr val="0070C0"/>
+                </a:solidFill>
+              </a:rPr>
+              <a:t>Instructor</a:t>
+            </a:r>
+          </a:p>
+          <a:p>
+            <a:pPr>
+              <a:lnSpc>
+                <a:spcPct val="150000"/>
+              </a:lnSpc>
+            </a:pPr>
+            <a:r>
+              <a:rPr lang="en-US" sz="1600" dirty="0"/>
+              <a:t>Ms. Yu Xiao</a:t>
+            </a:r>
+          </a:p>
+          <a:p>
+            <a:pPr>
+              <a:lnSpc>
+                <a:spcPct val="150000"/>
+              </a:lnSpc>
+            </a:pPr>
+            <a:r>
+              <a:rPr lang="en-US" sz="1600" dirty="0"/>
+              <a:t>EMAIL: xiao004@e.ntu.edu.sg</a:t>
+            </a:r>
+          </a:p>
+        </p:txBody>
+      </p:sp>
+      <p:sp>
+        <p:nvSpPr>
+          <p:cNvPr id="19" name="TextBox 18">
+            <a:extLst>
+              <a:ext uri="{FF2B5EF4-FFF2-40B4-BE49-F238E27FC236}">
+                <a16:creationId xmlns:a16="http://schemas.microsoft.com/office/drawing/2014/main" id="{2F38DBDD-51DC-C560-BA56-E9AB49D4899D}"/>
+              </a:ext>
+            </a:extLst>
+          </p:cNvPr>
+          <p:cNvSpPr txBox="1"/>
+          <p:nvPr/>
+        </p:nvSpPr>
+        <p:spPr>
+          <a:xfrm>
+            <a:off x="1330683" y="2347568"/>
+            <a:ext cx="2874788" cy="1162113"/>
+          </a:xfrm>
+          <a:prstGeom prst="rect">
+            <a:avLst/>
+          </a:prstGeom>
+          <a:noFill/>
+        </p:spPr>
+        <p:txBody>
+          <a:bodyPr wrap="square" rtlCol="0">
+            <a:spAutoFit/>
+          </a:bodyPr>
+          <a:lstStyle/>
+          <a:p>
+            <a:pPr>
+              <a:lnSpc>
+                <a:spcPct val="150000"/>
+              </a:lnSpc>
+            </a:pPr>
+            <a:r>
+              <a:rPr lang="en-US" altLang="zh-CN" sz="1600" b="1" dirty="0">
+                <a:solidFill>
+                  <a:srgbClr val="0070C0"/>
+                </a:solidFill>
+              </a:rPr>
+              <a:t>Instructor</a:t>
+            </a:r>
+          </a:p>
+          <a:p>
+            <a:pPr>
+              <a:lnSpc>
+                <a:spcPct val="150000"/>
+              </a:lnSpc>
+            </a:pPr>
+            <a:r>
+              <a:rPr lang="en-US" sz="1600" dirty="0"/>
+              <a:t>Mr. Jiang Shuo</a:t>
+            </a:r>
+          </a:p>
+          <a:p>
+            <a:pPr>
+              <a:lnSpc>
+                <a:spcPct val="150000"/>
+              </a:lnSpc>
+            </a:pPr>
+            <a:r>
+              <a:rPr lang="en-US" sz="1600" dirty="0"/>
+              <a:t>EMAIL: jian0142@e.ntu.edu.sg</a:t>
+            </a:r>
+          </a:p>
+        </p:txBody>
+      </p:sp>
+      <p:sp>
+        <p:nvSpPr>
+          <p:cNvPr id="22" name="TextBox 21">
+            <a:extLst>
+              <a:ext uri="{FF2B5EF4-FFF2-40B4-BE49-F238E27FC236}">
+                <a16:creationId xmlns:a16="http://schemas.microsoft.com/office/drawing/2014/main" id="{46AAC1AF-CEC5-E792-6D5D-E29615A0067E}"/>
+              </a:ext>
+            </a:extLst>
+          </p:cNvPr>
+          <p:cNvSpPr txBox="1"/>
+          <p:nvPr/>
+        </p:nvSpPr>
+        <p:spPr>
+          <a:xfrm>
+            <a:off x="5850629" y="114593"/>
+            <a:ext cx="2874788" cy="506292"/>
+          </a:xfrm>
+          <a:prstGeom prst="rect">
+            <a:avLst/>
+          </a:prstGeom>
+          <a:noFill/>
+        </p:spPr>
+        <p:txBody>
+          <a:bodyPr wrap="square" rtlCol="0">
+            <a:spAutoFit/>
+          </a:bodyPr>
+          <a:lstStyle/>
+          <a:p>
+            <a:pPr>
+              <a:lnSpc>
+                <a:spcPct val="150000"/>
+              </a:lnSpc>
+            </a:pPr>
+            <a:r>
+              <a:rPr lang="en-US" altLang="zh-CN" sz="2000" b="1" dirty="0">
+                <a:solidFill>
+                  <a:srgbClr val="0070C0"/>
+                </a:solidFill>
+              </a:rPr>
+              <a:t>Feel Free to Reach Out!</a:t>
+            </a:r>
+            <a:endParaRPr lang="en-US" sz="2000" dirty="0"/>
+          </a:p>
+        </p:txBody>
+      </p:sp>
+      <p:grpSp>
+        <p:nvGrpSpPr>
+          <p:cNvPr id="5" name="组合 4">
+            <a:extLst>
+              <a:ext uri="{FF2B5EF4-FFF2-40B4-BE49-F238E27FC236}">
+                <a16:creationId xmlns:a16="http://schemas.microsoft.com/office/drawing/2014/main" id="{98185946-F4CA-1161-6199-376E74585ED4}"/>
+              </a:ext>
+            </a:extLst>
+          </p:cNvPr>
+          <p:cNvGrpSpPr/>
+          <p:nvPr/>
+        </p:nvGrpSpPr>
+        <p:grpSpPr>
+          <a:xfrm>
+            <a:off x="2310508" y="697423"/>
+            <a:ext cx="4522984" cy="1517453"/>
+            <a:chOff x="2155749" y="697423"/>
+            <a:chExt cx="4522984" cy="1517453"/>
+          </a:xfrm>
+        </p:grpSpPr>
+        <p:sp>
+          <p:nvSpPr>
+            <p:cNvPr id="15" name="TextBox 14">
+              <a:extLst>
+                <a:ext uri="{FF2B5EF4-FFF2-40B4-BE49-F238E27FC236}">
+                  <a16:creationId xmlns:a16="http://schemas.microsoft.com/office/drawing/2014/main" id="{2E0CF8B3-5715-D3C4-6F09-3CF5D99E57A7}"/>
+                </a:ext>
+              </a:extLst>
+            </p:cNvPr>
+            <p:cNvSpPr txBox="1"/>
+            <p:nvPr/>
+          </p:nvSpPr>
+          <p:spPr>
+            <a:xfrm>
+              <a:off x="3803945" y="835834"/>
+              <a:ext cx="2874788" cy="1162113"/>
+            </a:xfrm>
+            <a:prstGeom prst="rect">
+              <a:avLst/>
+            </a:prstGeom>
+            <a:noFill/>
+          </p:spPr>
+          <p:txBody>
+            <a:bodyPr wrap="square" rtlCol="0">
+              <a:spAutoFit/>
+            </a:bodyPr>
+            <a:lstStyle/>
+            <a:p>
+              <a:pPr>
+                <a:lnSpc>
+                  <a:spcPct val="150000"/>
+                </a:lnSpc>
+              </a:pPr>
+              <a:r>
+                <a:rPr lang="en-US" sz="1600" b="1" dirty="0">
+                  <a:solidFill>
+                    <a:srgbClr val="FF0000"/>
+                  </a:solidFill>
+                </a:rPr>
+                <a:t>C</a:t>
+              </a:r>
+              <a:r>
+                <a:rPr lang="en-US" altLang="zh-CN" sz="1600" b="1" dirty="0">
+                  <a:solidFill>
+                    <a:srgbClr val="FF0000"/>
+                  </a:solidFill>
+                </a:rPr>
+                <a:t>oordinator</a:t>
+              </a:r>
+            </a:p>
+            <a:p>
+              <a:pPr>
+                <a:lnSpc>
+                  <a:spcPct val="150000"/>
+                </a:lnSpc>
+              </a:pPr>
+              <a:r>
+                <a:rPr lang="en-US" sz="1600" dirty="0"/>
+                <a:t>A</a:t>
+              </a:r>
+              <a:r>
+                <a:rPr lang="en-US" altLang="zh-CN" sz="1600" dirty="0"/>
+                <a:t>sst. Prof. Kim Gun</a:t>
+              </a:r>
+              <a:endParaRPr lang="en-US" sz="1600" dirty="0"/>
+            </a:p>
+            <a:p>
+              <a:pPr>
+                <a:lnSpc>
+                  <a:spcPct val="150000"/>
+                </a:lnSpc>
+              </a:pPr>
+              <a:r>
+                <a:rPr lang="en-US" sz="1600" dirty="0"/>
+                <a:t>EMAIL: chao.shi@ntu.edu.sg</a:t>
+              </a:r>
+            </a:p>
+          </p:txBody>
+        </p:sp>
+        <p:pic>
+          <p:nvPicPr>
+            <p:cNvPr id="4" name="图片 3">
+              <a:extLst>
+                <a:ext uri="{FF2B5EF4-FFF2-40B4-BE49-F238E27FC236}">
+                  <a16:creationId xmlns:a16="http://schemas.microsoft.com/office/drawing/2014/main" id="{9D55B52C-05A0-D480-966E-2476D0722D4B}"/>
+                </a:ext>
+              </a:extLst>
+            </p:cNvPr>
+            <p:cNvPicPr>
+              <a:picLocks noChangeAspect="1"/>
+            </p:cNvPicPr>
+            <p:nvPr/>
+          </p:nvPicPr>
+          <p:blipFill>
+            <a:blip r:embed="rId4"/>
+            <a:stretch>
+              <a:fillRect/>
+            </a:stretch>
+          </p:blipFill>
+          <p:spPr>
+            <a:xfrm>
+              <a:off x="2155749" y="697423"/>
+              <a:ext cx="1572834" cy="1517453"/>
+            </a:xfrm>
+            <a:prstGeom prst="rect">
+              <a:avLst/>
+            </a:prstGeom>
+          </p:spPr>
+        </p:pic>
+      </p:grpSp>
       <p:pic>
         <p:nvPicPr>
-          <p:cNvPr id="13" name="Picture 12" descr="A person in a black shirt&#10;&#10;AI-generated content may be incorrect.">
+          <p:cNvPr id="8" name="图片 7">
             <a:extLst>
               <a:ext uri="{FF2B5EF4-FFF2-40B4-BE49-F238E27FC236}">
-                <a16:creationId xmlns:a16="http://schemas.microsoft.com/office/drawing/2014/main" id="{7705B83D-B00F-F4F4-5BB2-077EB0431EFE}"/>
+                <a16:creationId xmlns:a16="http://schemas.microsoft.com/office/drawing/2014/main" id="{26EA3340-894C-B485-408E-E225B1DD9006}"/>
               </a:ext>
             </a:extLst>
           </p:cNvPr>
@@ -5355,8 +3737,8 @@
         </p:blipFill>
         <p:spPr>
           <a:xfrm>
-            <a:off x="4424301" y="2927271"/>
-            <a:ext cx="1118502" cy="1491336"/>
+            <a:off x="399194" y="3661159"/>
+            <a:ext cx="874800" cy="1166400"/>
           </a:xfrm>
           <a:prstGeom prst="rect">
             <a:avLst/>
@@ -5365,10 +3747,10 @@
       </p:pic>
       <p:sp>
         <p:nvSpPr>
-          <p:cNvPr id="15" name="TextBox 14">
+          <p:cNvPr id="12" name="TextBox 18">
             <a:extLst>
               <a:ext uri="{FF2B5EF4-FFF2-40B4-BE49-F238E27FC236}">
-                <a16:creationId xmlns:a16="http://schemas.microsoft.com/office/drawing/2014/main" id="{2E0CF8B3-5715-D3C4-6F09-3CF5D99E57A7}"/>
+                <a16:creationId xmlns:a16="http://schemas.microsoft.com/office/drawing/2014/main" id="{511F76AD-029F-2C2A-0020-93480B20BDDD}"/>
               </a:ext>
             </a:extLst>
           </p:cNvPr>
@@ -5377,106 +3759,8 @@
         </p:nvSpPr>
         <p:spPr>
           <a:xfrm>
-            <a:off x="1492824" y="982061"/>
-            <a:ext cx="2874788" cy="1531445"/>
-          </a:xfrm>
-          <a:prstGeom prst="rect">
-            <a:avLst/>
-          </a:prstGeom>
-          <a:noFill/>
-        </p:spPr>
-        <p:txBody>
-          <a:bodyPr wrap="square" rtlCol="0">
-            <a:spAutoFit/>
-          </a:bodyPr>
-          <a:lstStyle/>
-          <a:p>
-            <a:pPr>
-              <a:lnSpc>
-                <a:spcPct val="150000"/>
-              </a:lnSpc>
-            </a:pPr>
-            <a:r>
-              <a:rPr lang="en-US" sz="1600" b="1" dirty="0">
-                <a:solidFill>
-                  <a:srgbClr val="FF0000"/>
-                </a:solidFill>
-              </a:rPr>
-              <a:t>C</a:t>
-            </a:r>
-            <a:r>
-              <a:rPr lang="en-US" altLang="zh-CN" sz="1600" b="1" dirty="0">
-                <a:solidFill>
-                  <a:srgbClr val="FF0000"/>
-                </a:solidFill>
-              </a:rPr>
-              <a:t>oordinator</a:t>
-            </a:r>
-          </a:p>
-          <a:p>
-            <a:pPr>
-              <a:lnSpc>
-                <a:spcPct val="150000"/>
-              </a:lnSpc>
-            </a:pPr>
-            <a:r>
-              <a:rPr lang="en-US" sz="1600" dirty="0"/>
-              <a:t>A</a:t>
-            </a:r>
-            <a:r>
-              <a:rPr lang="en-US" altLang="zh-CN" sz="1600" dirty="0"/>
-              <a:t>sst. Prof. </a:t>
-            </a:r>
-            <a:r>
-              <a:rPr lang="en-US" sz="1600" dirty="0"/>
-              <a:t>S</a:t>
-            </a:r>
-            <a:r>
-              <a:rPr lang="en-US" altLang="zh-CN" sz="1600" dirty="0"/>
-              <a:t>hi Chao</a:t>
-            </a:r>
-            <a:endParaRPr lang="en-US" sz="1600" dirty="0"/>
-          </a:p>
-          <a:p>
-            <a:pPr>
-              <a:lnSpc>
-                <a:spcPct val="150000"/>
-              </a:lnSpc>
-            </a:pPr>
-            <a:r>
-              <a:rPr lang="en-US" sz="1600" dirty="0"/>
-              <a:t>TEL: 67905289</a:t>
-            </a:r>
-          </a:p>
-          <a:p>
-            <a:pPr>
-              <a:lnSpc>
-                <a:spcPct val="150000"/>
-              </a:lnSpc>
-            </a:pPr>
-            <a:r>
-              <a:rPr lang="en-US" sz="1600" dirty="0"/>
-              <a:t>EMAIL: chao.shi@ntu.edu.sg</a:t>
-            </a:r>
-          </a:p>
-        </p:txBody>
-      </p:sp>
-      <p:sp>
-        <p:nvSpPr>
-          <p:cNvPr id="18" name="TextBox 17">
-            <a:extLst>
-              <a:ext uri="{FF2B5EF4-FFF2-40B4-BE49-F238E27FC236}">
-                <a16:creationId xmlns:a16="http://schemas.microsoft.com/office/drawing/2014/main" id="{C7807775-BBEA-96DA-8E01-8F110858BE17}"/>
-              </a:ext>
-            </a:extLst>
-          </p:cNvPr>
-          <p:cNvSpPr txBox="1"/>
-          <p:nvPr/>
-        </p:nvSpPr>
-        <p:spPr>
-          <a:xfrm>
-            <a:off x="5599491" y="1043743"/>
-            <a:ext cx="2874788" cy="1531445"/>
+            <a:off x="1330683" y="3642373"/>
+            <a:ext cx="2874788" cy="1162113"/>
           </a:xfrm>
           <a:prstGeom prst="rect">
             <a:avLst/>
@@ -5511,8 +3795,13 @@
             </a:pPr>
             <a:r>
               <a:rPr lang="en-US" sz="1600" dirty="0"/>
-              <a:t>Ms. Yu Xiao</a:t>
-            </a:r>
+              <a:t>Ms. Huang </a:t>
+            </a:r>
+            <a:r>
+              <a:rPr lang="en-US" sz="1600" dirty="0" err="1"/>
+              <a:t>Xinya</a:t>
+            </a:r>
+            <a:endParaRPr lang="en-US" sz="1600" dirty="0"/>
           </a:p>
           <a:p>
             <a:pPr>
@@ -5522,28 +3811,47 @@
             </a:pPr>
             <a:r>
               <a:rPr lang="en-US" sz="1600" dirty="0"/>
-              <a:t>TEL: 88635869</a:t>
-            </a:r>
-          </a:p>
-          <a:p>
-            <a:pPr>
-              <a:lnSpc>
-                <a:spcPct val="150000"/>
-              </a:lnSpc>
-            </a:pPr>
-            <a:r>
-              <a:rPr lang="en-US" sz="1600" dirty="0"/>
-              <a:t>EMAIL: xiao004@e.ntu.edu.sg</a:t>
-            </a:r>
-          </a:p>
-        </p:txBody>
-      </p:sp>
-      <p:sp>
-        <p:nvSpPr>
-          <p:cNvPr id="19" name="TextBox 18">
+              <a:t>EMAIL:  xinya002@e.ntu.edu.sg</a:t>
+            </a:r>
+          </a:p>
+        </p:txBody>
+      </p:sp>
+      <p:pic>
+        <p:nvPicPr>
+          <p:cNvPr id="16" name="图片 15">
             <a:extLst>
               <a:ext uri="{FF2B5EF4-FFF2-40B4-BE49-F238E27FC236}">
-                <a16:creationId xmlns:a16="http://schemas.microsoft.com/office/drawing/2014/main" id="{2F38DBDD-51DC-C560-BA56-E9AB49D4899D}"/>
+                <a16:creationId xmlns:a16="http://schemas.microsoft.com/office/drawing/2014/main" id="{8F7B0A0C-5E55-05AB-701B-A21FB4630B10}"/>
+              </a:ext>
+            </a:extLst>
+          </p:cNvPr>
+          <p:cNvPicPr>
+            <a:picLocks noChangeAspect="1"/>
+          </p:cNvPicPr>
+          <p:nvPr/>
+        </p:nvPicPr>
+        <p:blipFill>
+          <a:blip r:embed="rId6"/>
+          <a:stretch>
+            <a:fillRect/>
+          </a:stretch>
+        </p:blipFill>
+        <p:spPr>
+          <a:xfrm>
+            <a:off x="4572000" y="3638086"/>
+            <a:ext cx="874800" cy="1166400"/>
+          </a:xfrm>
+          <a:prstGeom prst="rect">
+            <a:avLst/>
+          </a:prstGeom>
+        </p:spPr>
+      </p:pic>
+      <p:sp>
+        <p:nvSpPr>
+          <p:cNvPr id="21" name="TextBox 18">
+            <a:extLst>
+              <a:ext uri="{FF2B5EF4-FFF2-40B4-BE49-F238E27FC236}">
+                <a16:creationId xmlns:a16="http://schemas.microsoft.com/office/drawing/2014/main" id="{BBF77F4A-2780-3482-C136-9C36362413E0}"/>
               </a:ext>
             </a:extLst>
           </p:cNvPr>
@@ -5552,8 +3860,8 @@
         </p:nvSpPr>
         <p:spPr>
           <a:xfrm>
-            <a:off x="1492824" y="2907215"/>
-            <a:ext cx="2874788" cy="1531445"/>
+            <a:off x="5747190" y="3642373"/>
+            <a:ext cx="3175746" cy="1162113"/>
           </a:xfrm>
           <a:prstGeom prst="rect">
             <a:avLst/>
@@ -5588,7 +3896,7 @@
             </a:pPr>
             <a:r>
               <a:rPr lang="en-US" sz="1600" dirty="0"/>
-              <a:t>Mr. Jiang Shuo</a:t>
+              <a:t>Mr. Zhang Bowen</a:t>
             </a:r>
           </a:p>
           <a:p>
@@ -5599,141 +3907,8 @@
             </a:pPr>
             <a:r>
               <a:rPr lang="en-US" sz="1600" dirty="0"/>
-              <a:t>TEL: 81733652</a:t>
-            </a:r>
-          </a:p>
-          <a:p>
-            <a:pPr>
-              <a:lnSpc>
-                <a:spcPct val="150000"/>
-              </a:lnSpc>
-            </a:pPr>
-            <a:r>
-              <a:rPr lang="en-US" sz="1600" dirty="0"/>
-              <a:t>EMAIL: jian0142@e.ntu.edu.sg</a:t>
-            </a:r>
-          </a:p>
-        </p:txBody>
-      </p:sp>
-      <p:sp>
-        <p:nvSpPr>
-          <p:cNvPr id="20" name="TextBox 19">
-            <a:extLst>
-              <a:ext uri="{FF2B5EF4-FFF2-40B4-BE49-F238E27FC236}">
-                <a16:creationId xmlns:a16="http://schemas.microsoft.com/office/drawing/2014/main" id="{8862D768-30AA-DF88-8BD4-06058748A30B}"/>
-              </a:ext>
-            </a:extLst>
-          </p:cNvPr>
-          <p:cNvSpPr txBox="1"/>
-          <p:nvPr/>
-        </p:nvSpPr>
-        <p:spPr>
-          <a:xfrm>
-            <a:off x="5542802" y="2907214"/>
-            <a:ext cx="3328147" cy="1531445"/>
-          </a:xfrm>
-          <a:prstGeom prst="rect">
-            <a:avLst/>
-          </a:prstGeom>
-          <a:noFill/>
-        </p:spPr>
-        <p:txBody>
-          <a:bodyPr wrap="square" rtlCol="0">
-            <a:spAutoFit/>
-          </a:bodyPr>
-          <a:lstStyle/>
-          <a:p>
-            <a:pPr>
-              <a:lnSpc>
-                <a:spcPct val="150000"/>
-              </a:lnSpc>
-            </a:pPr>
-            <a:r>
-              <a:rPr lang="en-US" altLang="zh-CN" sz="1600" b="1" dirty="0">
-                <a:solidFill>
-                  <a:srgbClr val="0070C0"/>
-                </a:solidFill>
-              </a:rPr>
-              <a:t>Instructor</a:t>
-            </a:r>
-          </a:p>
-          <a:p>
-            <a:pPr>
-              <a:lnSpc>
-                <a:spcPct val="150000"/>
-              </a:lnSpc>
-            </a:pPr>
-            <a:r>
-              <a:rPr lang="en-US" sz="1600" dirty="0"/>
-              <a:t>Mr. Cui Shuaiwen</a:t>
-            </a:r>
-          </a:p>
-          <a:p>
-            <a:pPr>
-              <a:lnSpc>
-                <a:spcPct val="150000"/>
-              </a:lnSpc>
-            </a:pPr>
-            <a:r>
-              <a:rPr lang="en-US" sz="1600" dirty="0"/>
-              <a:t>TEL: 83071903</a:t>
-            </a:r>
-          </a:p>
-          <a:p>
-            <a:pPr>
-              <a:lnSpc>
-                <a:spcPct val="150000"/>
-              </a:lnSpc>
-            </a:pPr>
-            <a:r>
-              <a:rPr lang="en-US" sz="1600" dirty="0"/>
-              <a:t>EMAIL: shuaiwen001@e.ntu.edu.sg</a:t>
-            </a:r>
-          </a:p>
-        </p:txBody>
-      </p:sp>
-      <p:sp>
-        <p:nvSpPr>
-          <p:cNvPr id="22" name="TextBox 21">
-            <a:extLst>
-              <a:ext uri="{FF2B5EF4-FFF2-40B4-BE49-F238E27FC236}">
-                <a16:creationId xmlns:a16="http://schemas.microsoft.com/office/drawing/2014/main" id="{46AAC1AF-CEC5-E792-6D5D-E29615A0067E}"/>
-              </a:ext>
-            </a:extLst>
-          </p:cNvPr>
-          <p:cNvSpPr txBox="1"/>
-          <p:nvPr/>
-        </p:nvSpPr>
-        <p:spPr>
-          <a:xfrm>
-            <a:off x="5850629" y="114593"/>
-            <a:ext cx="2874788" cy="506292"/>
-          </a:xfrm>
-          <a:prstGeom prst="rect">
-            <a:avLst/>
-          </a:prstGeom>
-          <a:noFill/>
-        </p:spPr>
-        <p:txBody>
-          <a:bodyPr wrap="square" rtlCol="0">
-            <a:spAutoFit/>
-          </a:bodyPr>
-          <a:lstStyle/>
-          <a:p>
-            <a:pPr>
-              <a:lnSpc>
-                <a:spcPct val="150000"/>
-              </a:lnSpc>
-            </a:pPr>
-            <a:r>
-              <a:rPr lang="en-US" altLang="zh-CN" sz="2000" b="1" dirty="0">
-                <a:solidFill>
-                  <a:srgbClr val="0070C0"/>
-                </a:solidFill>
-              </a:rPr>
-              <a:t>Feel Free to Reach Out!</a:t>
-            </a:r>
-            <a:endParaRPr lang="en-US" sz="2000" dirty="0"/>
+              <a:t>EMAIL: bowen011@e.ntu.edu.sg</a:t>
+            </a:r>
           </a:p>
         </p:txBody>
       </p:sp>
@@ -5751,274 +3926,6 @@
 </file>
 
 <file path=ppt/slides/slide3.xml><?xml version="1.0" encoding="utf-8"?>
-<p:sld xmlns:a="http://schemas.openxmlformats.org/drawingml/2006/main" xmlns:r="http://schemas.openxmlformats.org/officeDocument/2006/relationships" xmlns:p="http://schemas.openxmlformats.org/presentationml/2006/main">
-  <p:cSld>
-    <p:spTree>
-      <p:nvGrpSpPr>
-        <p:cNvPr id="1" name="">
-          <a:extLst>
-            <a:ext uri="{FF2B5EF4-FFF2-40B4-BE49-F238E27FC236}">
-              <a16:creationId xmlns:a16="http://schemas.microsoft.com/office/drawing/2014/main" id="{52C0ACFA-C2F7-FDF9-B241-5259D59779B2}"/>
-            </a:ext>
-          </a:extLst>
-        </p:cNvPr>
-        <p:cNvGrpSpPr/>
-        <p:nvPr/>
-      </p:nvGrpSpPr>
-      <p:grpSpPr>
-        <a:xfrm>
-          <a:off x="0" y="0"/>
-          <a:ext cx="0" cy="0"/>
-          <a:chOff x="0" y="0"/>
-          <a:chExt cx="0" cy="0"/>
-        </a:xfrm>
-      </p:grpSpPr>
-      <p:sp>
-        <p:nvSpPr>
-          <p:cNvPr id="2" name="TextBox 1">
-            <a:extLst>
-              <a:ext uri="{FF2B5EF4-FFF2-40B4-BE49-F238E27FC236}">
-                <a16:creationId xmlns:a16="http://schemas.microsoft.com/office/drawing/2014/main" id="{47841444-3201-F163-84DA-74C0ED4FC129}"/>
-              </a:ext>
-            </a:extLst>
-          </p:cNvPr>
-          <p:cNvSpPr txBox="1"/>
-          <p:nvPr/>
-        </p:nvSpPr>
-        <p:spPr>
-          <a:xfrm>
-            <a:off x="317634" y="168441"/>
-            <a:ext cx="8553315" cy="523220"/>
-          </a:xfrm>
-          <a:prstGeom prst="rect">
-            <a:avLst/>
-          </a:prstGeom>
-          <a:noFill/>
-        </p:spPr>
-        <p:txBody>
-          <a:bodyPr wrap="square" rtlCol="0">
-            <a:spAutoFit/>
-          </a:bodyPr>
-          <a:lstStyle/>
-          <a:p>
-            <a:r>
-              <a:rPr lang="en-US" sz="2800" b="1" dirty="0"/>
-              <a:t>Group Chats – S</a:t>
-            </a:r>
-            <a:r>
-              <a:rPr lang="en-US" altLang="zh-CN" sz="2800" b="1" dirty="0"/>
-              <a:t>can to Join WhatsApp Community</a:t>
-            </a:r>
-          </a:p>
-        </p:txBody>
-      </p:sp>
-      <p:pic>
-        <p:nvPicPr>
-          <p:cNvPr id="7" name="Picture 6" descr="A qr code with a dinosaur&#10;&#10;AI-generated content may be incorrect.">
-            <a:extLst>
-              <a:ext uri="{FF2B5EF4-FFF2-40B4-BE49-F238E27FC236}">
-                <a16:creationId xmlns:a16="http://schemas.microsoft.com/office/drawing/2014/main" id="{E8CE79E5-B531-BBFD-65B3-F788C5EA4B04}"/>
-              </a:ext>
-            </a:extLst>
-          </p:cNvPr>
-          <p:cNvPicPr>
-            <a:picLocks noChangeAspect="1"/>
-          </p:cNvPicPr>
-          <p:nvPr/>
-        </p:nvPicPr>
-        <p:blipFill>
-          <a:blip r:embed="rId2"/>
-          <a:stretch>
-            <a:fillRect/>
-          </a:stretch>
-        </p:blipFill>
-        <p:spPr>
-          <a:xfrm>
-            <a:off x="693695" y="708137"/>
-            <a:ext cx="3727226" cy="3727226"/>
-          </a:xfrm>
-          <a:prstGeom prst="rect">
-            <a:avLst/>
-          </a:prstGeom>
-        </p:spPr>
-      </p:pic>
-      <p:sp>
-        <p:nvSpPr>
-          <p:cNvPr id="9" name="TextBox 8">
-            <a:hlinkClick r:id="rId3"/>
-            <a:extLst>
-              <a:ext uri="{FF2B5EF4-FFF2-40B4-BE49-F238E27FC236}">
-                <a16:creationId xmlns:a16="http://schemas.microsoft.com/office/drawing/2014/main" id="{C6669A8D-1A32-4C19-F1F4-079B58156073}"/>
-              </a:ext>
-            </a:extLst>
-          </p:cNvPr>
-          <p:cNvSpPr txBox="1"/>
-          <p:nvPr/>
-        </p:nvSpPr>
-        <p:spPr>
-          <a:xfrm>
-            <a:off x="173864" y="4415390"/>
-            <a:ext cx="5621629" cy="369332"/>
-          </a:xfrm>
-          <a:prstGeom prst="rect">
-            <a:avLst/>
-          </a:prstGeom>
-          <a:noFill/>
-        </p:spPr>
-        <p:txBody>
-          <a:bodyPr wrap="square">
-            <a:spAutoFit/>
-          </a:bodyPr>
-          <a:lstStyle/>
-          <a:p>
-            <a:r>
-              <a:rPr lang="en-US" u="sng" dirty="0">
-                <a:solidFill>
-                  <a:srgbClr val="0070C0"/>
-                </a:solidFill>
-              </a:rPr>
-              <a:t>https://chat.whatsapp.com/KARMGvOYONM17iGIYtOdJn</a:t>
-            </a:r>
-          </a:p>
-        </p:txBody>
-      </p:sp>
-      <p:pic>
-        <p:nvPicPr>
-          <p:cNvPr id="11" name="Picture 10">
-            <a:extLst>
-              <a:ext uri="{FF2B5EF4-FFF2-40B4-BE49-F238E27FC236}">
-                <a16:creationId xmlns:a16="http://schemas.microsoft.com/office/drawing/2014/main" id="{25A2E567-16DC-2203-16FA-473341A6E54F}"/>
-              </a:ext>
-            </a:extLst>
-          </p:cNvPr>
-          <p:cNvPicPr>
-            <a:picLocks noChangeAspect="1"/>
-          </p:cNvPicPr>
-          <p:nvPr/>
-        </p:nvPicPr>
-        <p:blipFill>
-          <a:blip r:embed="rId4"/>
-          <a:stretch>
-            <a:fillRect/>
-          </a:stretch>
-        </p:blipFill>
-        <p:spPr>
-          <a:xfrm>
-            <a:off x="4819010" y="1471540"/>
-            <a:ext cx="4000706" cy="1968601"/>
-          </a:xfrm>
-          <a:prstGeom prst="rect">
-            <a:avLst/>
-          </a:prstGeom>
-        </p:spPr>
-      </p:pic>
-      <p:cxnSp>
-        <p:nvCxnSpPr>
-          <p:cNvPr id="13" name="Straight Arrow Connector 12">
-            <a:extLst>
-              <a:ext uri="{FF2B5EF4-FFF2-40B4-BE49-F238E27FC236}">
-                <a16:creationId xmlns:a16="http://schemas.microsoft.com/office/drawing/2014/main" id="{8D3B8195-0356-14D7-5C4F-683BD79AB4F5}"/>
-              </a:ext>
-            </a:extLst>
-          </p:cNvPr>
-          <p:cNvCxnSpPr>
-            <a:cxnSpLocks/>
-          </p:cNvCxnSpPr>
-          <p:nvPr/>
-        </p:nvCxnSpPr>
-        <p:spPr>
-          <a:xfrm flipH="1" flipV="1">
-            <a:off x="5615189" y="3322749"/>
-            <a:ext cx="309093" cy="476518"/>
-          </a:xfrm>
-          <a:prstGeom prst="straightConnector1">
-            <a:avLst/>
-          </a:prstGeom>
-          <a:ln>
-            <a:solidFill>
-              <a:srgbClr val="FF0000"/>
-            </a:solidFill>
-            <a:tailEnd type="triangle"/>
-          </a:ln>
-        </p:spPr>
-        <p:style>
-          <a:lnRef idx="2">
-            <a:schemeClr val="accent2"/>
-          </a:lnRef>
-          <a:fillRef idx="0">
-            <a:schemeClr val="accent2"/>
-          </a:fillRef>
-          <a:effectRef idx="1">
-            <a:schemeClr val="accent2"/>
-          </a:effectRef>
-          <a:fontRef idx="minor">
-            <a:schemeClr val="tx1"/>
-          </a:fontRef>
-        </p:style>
-      </p:cxnSp>
-      <p:sp>
-        <p:nvSpPr>
-          <p:cNvPr id="16" name="TextBox 15">
-            <a:extLst>
-              <a:ext uri="{FF2B5EF4-FFF2-40B4-BE49-F238E27FC236}">
-                <a16:creationId xmlns:a16="http://schemas.microsoft.com/office/drawing/2014/main" id="{CCDE2FC4-8964-8A3B-624B-B43DA6B621CC}"/>
-              </a:ext>
-            </a:extLst>
-          </p:cNvPr>
-          <p:cNvSpPr txBox="1"/>
-          <p:nvPr/>
-        </p:nvSpPr>
-        <p:spPr>
-          <a:xfrm>
-            <a:off x="5924282" y="3611207"/>
-            <a:ext cx="3155324" cy="589072"/>
-          </a:xfrm>
-          <a:prstGeom prst="rect">
-            <a:avLst/>
-          </a:prstGeom>
-          <a:noFill/>
-        </p:spPr>
-        <p:txBody>
-          <a:bodyPr wrap="square" rtlCol="0">
-            <a:spAutoFit/>
-          </a:bodyPr>
-          <a:lstStyle/>
-          <a:p>
-            <a:pPr>
-              <a:lnSpc>
-                <a:spcPct val="150000"/>
-              </a:lnSpc>
-            </a:pPr>
-            <a:r>
-              <a:rPr lang="en-US" altLang="zh-CN" sz="2400" b="1" dirty="0">
-                <a:solidFill>
-                  <a:srgbClr val="FF0000"/>
-                </a:solidFill>
-              </a:rPr>
-              <a:t>Join this for discussion.</a:t>
-            </a:r>
-            <a:endParaRPr lang="en-US" sz="2400" dirty="0">
-              <a:solidFill>
-                <a:srgbClr val="FF0000"/>
-              </a:solidFill>
-            </a:endParaRPr>
-          </a:p>
-        </p:txBody>
-      </p:sp>
-    </p:spTree>
-    <p:extLst>
-      <p:ext uri="{BB962C8B-B14F-4D97-AF65-F5344CB8AC3E}">
-        <p14:creationId xmlns:p14="http://schemas.microsoft.com/office/powerpoint/2010/main" val="2142808599"/>
-      </p:ext>
-    </p:extLst>
-  </p:cSld>
-  <p:clrMapOvr>
-    <a:masterClrMapping/>
-  </p:clrMapOvr>
-</p:sld>
-</file>
-
-<file path=ppt/slides/slide4.xml><?xml version="1.0" encoding="utf-8"?>
 <p:sld xmlns:a="http://schemas.openxmlformats.org/drawingml/2006/main" xmlns:r="http://schemas.openxmlformats.org/officeDocument/2006/relationships" xmlns:p="http://schemas.openxmlformats.org/presentationml/2006/main">
   <p:cSld>
     <p:spTree>
@@ -7576,7 +5483,7 @@
 </p:sld>
 </file>
 
-<file path=ppt/slides/slide5.xml><?xml version="1.0" encoding="utf-8"?>
+<file path=ppt/slides/slide4.xml><?xml version="1.0" encoding="utf-8"?>
 <p:sld xmlns:a="http://schemas.openxmlformats.org/drawingml/2006/main" xmlns:r="http://schemas.openxmlformats.org/officeDocument/2006/relationships" xmlns:p="http://schemas.openxmlformats.org/presentationml/2006/main">
   <p:cSld>
     <p:spTree>
@@ -7843,7 +5750,7 @@
 </p:sld>
 </file>
 
-<file path=ppt/slides/slide6.xml><?xml version="1.0" encoding="utf-8"?>
+<file path=ppt/slides/slide5.xml><?xml version="1.0" encoding="utf-8"?>
 <p:sld xmlns:a="http://schemas.openxmlformats.org/drawingml/2006/main" xmlns:r="http://schemas.openxmlformats.org/officeDocument/2006/relationships" xmlns:p="http://schemas.openxmlformats.org/presentationml/2006/main">
   <p:cSld>
     <p:spTree>
@@ -8179,7 +6086,7 @@
 </p:sld>
 </file>
 
-<file path=ppt/slides/slide7.xml><?xml version="1.0" encoding="utf-8"?>
+<file path=ppt/slides/slide6.xml><?xml version="1.0" encoding="utf-8"?>
 <p:sld xmlns:a="http://schemas.openxmlformats.org/drawingml/2006/main" xmlns:r="http://schemas.openxmlformats.org/officeDocument/2006/relationships" xmlns:p="http://schemas.openxmlformats.org/presentationml/2006/main">
   <p:cSld>
     <p:spTree>
@@ -8373,7 +6280,7 @@
 </p:sld>
 </file>
 
-<file path=ppt/slides/slide8.xml><?xml version="1.0" encoding="utf-8"?>
+<file path=ppt/slides/slide7.xml><?xml version="1.0" encoding="utf-8"?>
 <p:sld xmlns:a="http://schemas.openxmlformats.org/drawingml/2006/main" xmlns:r="http://schemas.openxmlformats.org/officeDocument/2006/relationships" xmlns:p="http://schemas.openxmlformats.org/presentationml/2006/main">
   <p:cSld>
     <p:spTree>
@@ -8702,7 +6609,7 @@
 </p:sld>
 </file>
 
-<file path=ppt/slides/slide9.xml><?xml version="1.0" encoding="utf-8"?>
+<file path=ppt/slides/slide8.xml><?xml version="1.0" encoding="utf-8"?>
 <p:sld xmlns:a="http://schemas.openxmlformats.org/drawingml/2006/main" xmlns:r="http://schemas.openxmlformats.org/officeDocument/2006/relationships" xmlns:p="http://schemas.openxmlformats.org/presentationml/2006/main">
   <p:cSld>
     <p:spTree>
@@ -8887,6 +6794,362 @@
     <p:extLst>
       <p:ext uri="{BB962C8B-B14F-4D97-AF65-F5344CB8AC3E}">
         <p14:creationId xmlns:p14="http://schemas.microsoft.com/office/powerpoint/2010/main" val="4292458085"/>
+      </p:ext>
+    </p:extLst>
+  </p:cSld>
+  <p:clrMapOvr>
+    <a:masterClrMapping/>
+  </p:clrMapOvr>
+</p:sld>
+</file>
+
+<file path=ppt/slides/slide9.xml><?xml version="1.0" encoding="utf-8"?>
+<p:sld xmlns:a="http://schemas.openxmlformats.org/drawingml/2006/main" xmlns:r="http://schemas.openxmlformats.org/officeDocument/2006/relationships" xmlns:p="http://schemas.openxmlformats.org/presentationml/2006/main">
+  <p:cSld>
+    <p:spTree>
+      <p:nvGrpSpPr>
+        <p:cNvPr id="1" name="">
+          <a:extLst>
+            <a:ext uri="{FF2B5EF4-FFF2-40B4-BE49-F238E27FC236}">
+              <a16:creationId xmlns:a16="http://schemas.microsoft.com/office/drawing/2014/main" id="{141066AF-A921-28C1-8AF9-8942C769A0D7}"/>
+            </a:ext>
+          </a:extLst>
+        </p:cNvPr>
+        <p:cNvGrpSpPr/>
+        <p:nvPr/>
+      </p:nvGrpSpPr>
+      <p:grpSpPr>
+        <a:xfrm>
+          <a:off x="0" y="0"/>
+          <a:ext cx="0" cy="0"/>
+          <a:chOff x="0" y="0"/>
+          <a:chExt cx="0" cy="0"/>
+        </a:xfrm>
+      </p:grpSpPr>
+      <p:pic>
+        <p:nvPicPr>
+          <p:cNvPr id="8" name="图片 7">
+            <a:extLst>
+              <a:ext uri="{FF2B5EF4-FFF2-40B4-BE49-F238E27FC236}">
+                <a16:creationId xmlns:a16="http://schemas.microsoft.com/office/drawing/2014/main" id="{F878ED72-6AB0-C9FD-E8F2-DA516DC3B385}"/>
+              </a:ext>
+            </a:extLst>
+          </p:cNvPr>
+          <p:cNvPicPr>
+            <a:picLocks noChangeAspect="1"/>
+          </p:cNvPicPr>
+          <p:nvPr/>
+        </p:nvPicPr>
+        <p:blipFill>
+          <a:blip r:embed="rId2"/>
+          <a:srcRect t="14457" b="26251"/>
+          <a:stretch>
+            <a:fillRect/>
+          </a:stretch>
+        </p:blipFill>
+        <p:spPr>
+          <a:xfrm>
+            <a:off x="6727790" y="810296"/>
+            <a:ext cx="2372530" cy="3049675"/>
+          </a:xfrm>
+          <a:prstGeom prst="rect">
+            <a:avLst/>
+          </a:prstGeom>
+        </p:spPr>
+      </p:pic>
+      <p:pic>
+        <p:nvPicPr>
+          <p:cNvPr id="6" name="图片 5">
+            <a:extLst>
+              <a:ext uri="{FF2B5EF4-FFF2-40B4-BE49-F238E27FC236}">
+                <a16:creationId xmlns:a16="http://schemas.microsoft.com/office/drawing/2014/main" id="{9BE9A133-4B19-3FFA-927C-8D5E691E1605}"/>
+              </a:ext>
+            </a:extLst>
+          </p:cNvPr>
+          <p:cNvPicPr>
+            <a:picLocks noChangeAspect="1"/>
+          </p:cNvPicPr>
+          <p:nvPr/>
+        </p:nvPicPr>
+        <p:blipFill>
+          <a:blip r:embed="rId3"/>
+          <a:srcRect t="14456" b="16777"/>
+          <a:stretch>
+            <a:fillRect/>
+          </a:stretch>
+        </p:blipFill>
+        <p:spPr>
+          <a:xfrm>
+            <a:off x="4194689" y="810296"/>
+            <a:ext cx="2372530" cy="3537020"/>
+          </a:xfrm>
+          <a:prstGeom prst="rect">
+            <a:avLst/>
+          </a:prstGeom>
+        </p:spPr>
+      </p:pic>
+      <p:sp>
+        <p:nvSpPr>
+          <p:cNvPr id="2" name="TextBox 1">
+            <a:extLst>
+              <a:ext uri="{FF2B5EF4-FFF2-40B4-BE49-F238E27FC236}">
+                <a16:creationId xmlns:a16="http://schemas.microsoft.com/office/drawing/2014/main" id="{0F7CF7B7-7CE4-AE82-E71E-3279B130976D}"/>
+              </a:ext>
+            </a:extLst>
+          </p:cNvPr>
+          <p:cNvSpPr txBox="1"/>
+          <p:nvPr/>
+        </p:nvSpPr>
+        <p:spPr>
+          <a:xfrm>
+            <a:off x="317634" y="168441"/>
+            <a:ext cx="5464980" cy="523220"/>
+          </a:xfrm>
+          <a:prstGeom prst="rect">
+            <a:avLst/>
+          </a:prstGeom>
+          <a:noFill/>
+        </p:spPr>
+        <p:txBody>
+          <a:bodyPr wrap="square" rtlCol="0">
+            <a:spAutoFit/>
+          </a:bodyPr>
+          <a:lstStyle/>
+          <a:p>
+            <a:r>
+              <a:rPr lang="en-US" sz="2800" b="1" dirty="0"/>
+              <a:t>Where to download </a:t>
+            </a:r>
+            <a:r>
+              <a:rPr lang="en-US" sz="2800" b="1"/>
+              <a:t>the slides?</a:t>
+            </a:r>
+            <a:endParaRPr lang="en-US" altLang="zh-CN" sz="2800" b="1" dirty="0"/>
+          </a:p>
+        </p:txBody>
+      </p:sp>
+      <p:sp>
+        <p:nvSpPr>
+          <p:cNvPr id="16" name="Rectangle 15">
+            <a:extLst>
+              <a:ext uri="{FF2B5EF4-FFF2-40B4-BE49-F238E27FC236}">
+                <a16:creationId xmlns:a16="http://schemas.microsoft.com/office/drawing/2014/main" id="{7E0F29FD-C5C8-23F9-EA3F-D17CCFB0B60B}"/>
+              </a:ext>
+            </a:extLst>
+          </p:cNvPr>
+          <p:cNvSpPr/>
+          <p:nvPr/>
+        </p:nvSpPr>
+        <p:spPr>
+          <a:xfrm>
+            <a:off x="4320790" y="2461846"/>
+            <a:ext cx="2130251" cy="276330"/>
+          </a:xfrm>
+          <a:prstGeom prst="rect">
+            <a:avLst/>
+          </a:prstGeom>
+          <a:noFill/>
+          <a:ln w="28575">
+            <a:solidFill>
+              <a:srgbClr val="FF0000"/>
+            </a:solidFill>
+          </a:ln>
+        </p:spPr>
+        <p:style>
+          <a:lnRef idx="1">
+            <a:schemeClr val="accent1"/>
+          </a:lnRef>
+          <a:fillRef idx="3">
+            <a:schemeClr val="accent1"/>
+          </a:fillRef>
+          <a:effectRef idx="2">
+            <a:schemeClr val="accent1"/>
+          </a:effectRef>
+          <a:fontRef idx="minor">
+            <a:schemeClr val="lt1"/>
+          </a:fontRef>
+        </p:style>
+        <p:txBody>
+          <a:bodyPr rtlCol="0" anchor="ctr"/>
+          <a:lstStyle/>
+          <a:p>
+            <a:pPr algn="ctr"/>
+            <a:endParaRPr lang="en-US"/>
+          </a:p>
+        </p:txBody>
+      </p:sp>
+      <p:sp>
+        <p:nvSpPr>
+          <p:cNvPr id="19" name="Rectangle 18">
+            <a:extLst>
+              <a:ext uri="{FF2B5EF4-FFF2-40B4-BE49-F238E27FC236}">
+                <a16:creationId xmlns:a16="http://schemas.microsoft.com/office/drawing/2014/main" id="{9B088EBD-1777-E072-C48A-7B3EB1AD8169}"/>
+              </a:ext>
+            </a:extLst>
+          </p:cNvPr>
+          <p:cNvSpPr/>
+          <p:nvPr/>
+        </p:nvSpPr>
+        <p:spPr>
+          <a:xfrm>
+            <a:off x="7584221" y="2008719"/>
+            <a:ext cx="1259095" cy="186710"/>
+          </a:xfrm>
+          <a:prstGeom prst="rect">
+            <a:avLst/>
+          </a:prstGeom>
+          <a:noFill/>
+          <a:ln w="28575">
+            <a:solidFill>
+              <a:srgbClr val="FF0000"/>
+            </a:solidFill>
+          </a:ln>
+        </p:spPr>
+        <p:style>
+          <a:lnRef idx="1">
+            <a:schemeClr val="accent1"/>
+          </a:lnRef>
+          <a:fillRef idx="3">
+            <a:schemeClr val="accent1"/>
+          </a:fillRef>
+          <a:effectRef idx="2">
+            <a:schemeClr val="accent1"/>
+          </a:effectRef>
+          <a:fontRef idx="minor">
+            <a:schemeClr val="lt1"/>
+          </a:fontRef>
+        </p:style>
+        <p:txBody>
+          <a:bodyPr rtlCol="0" anchor="ctr"/>
+          <a:lstStyle/>
+          <a:p>
+            <a:pPr algn="ctr"/>
+            <a:endParaRPr lang="en-US"/>
+          </a:p>
+        </p:txBody>
+      </p:sp>
+      <p:cxnSp>
+        <p:nvCxnSpPr>
+          <p:cNvPr id="21" name="Straight Arrow Connector 20">
+            <a:extLst>
+              <a:ext uri="{FF2B5EF4-FFF2-40B4-BE49-F238E27FC236}">
+                <a16:creationId xmlns:a16="http://schemas.microsoft.com/office/drawing/2014/main" id="{F3545CA8-659F-6416-28CF-C6D29B01723D}"/>
+              </a:ext>
+            </a:extLst>
+          </p:cNvPr>
+          <p:cNvCxnSpPr>
+            <a:cxnSpLocks/>
+          </p:cNvCxnSpPr>
+          <p:nvPr/>
+        </p:nvCxnSpPr>
+        <p:spPr>
+          <a:xfrm flipH="1">
+            <a:off x="8797530" y="1708220"/>
+            <a:ext cx="150527" cy="302892"/>
+          </a:xfrm>
+          <a:prstGeom prst="straightConnector1">
+            <a:avLst/>
+          </a:prstGeom>
+          <a:ln>
+            <a:solidFill>
+              <a:srgbClr val="FF0000"/>
+            </a:solidFill>
+            <a:tailEnd type="triangle"/>
+          </a:ln>
+        </p:spPr>
+        <p:style>
+          <a:lnRef idx="2">
+            <a:schemeClr val="accent1"/>
+          </a:lnRef>
+          <a:fillRef idx="0">
+            <a:schemeClr val="accent1"/>
+          </a:fillRef>
+          <a:effectRef idx="1">
+            <a:schemeClr val="accent1"/>
+          </a:effectRef>
+          <a:fontRef idx="minor">
+            <a:schemeClr val="tx1"/>
+          </a:fontRef>
+        </p:style>
+      </p:cxnSp>
+      <p:pic>
+        <p:nvPicPr>
+          <p:cNvPr id="3" name="图片 2" descr="QR Code Image">
+            <a:extLst>
+              <a:ext uri="{FF2B5EF4-FFF2-40B4-BE49-F238E27FC236}">
+                <a16:creationId xmlns:a16="http://schemas.microsoft.com/office/drawing/2014/main" id="{FB950885-3997-1140-D6CE-2D36C1F00832}"/>
+              </a:ext>
+            </a:extLst>
+          </p:cNvPr>
+          <p:cNvPicPr>
+            <a:picLocks noChangeAspect="1"/>
+          </p:cNvPicPr>
+          <p:nvPr/>
+        </p:nvPicPr>
+        <p:blipFill>
+          <a:blip r:embed="rId4"/>
+          <a:stretch>
+            <a:fillRect/>
+          </a:stretch>
+        </p:blipFill>
+        <p:spPr>
+          <a:xfrm>
+            <a:off x="0" y="810296"/>
+            <a:ext cx="3869873" cy="3869873"/>
+          </a:xfrm>
+          <a:prstGeom prst="rect">
+            <a:avLst/>
+          </a:prstGeom>
+        </p:spPr>
+      </p:pic>
+      <p:cxnSp>
+        <p:nvCxnSpPr>
+          <p:cNvPr id="12" name="Straight Arrow Connector 11">
+            <a:extLst>
+              <a:ext uri="{FF2B5EF4-FFF2-40B4-BE49-F238E27FC236}">
+                <a16:creationId xmlns:a16="http://schemas.microsoft.com/office/drawing/2014/main" id="{3A1266E3-78EA-F711-3D66-742DA96A4E23}"/>
+              </a:ext>
+            </a:extLst>
+          </p:cNvPr>
+          <p:cNvCxnSpPr>
+            <a:cxnSpLocks/>
+          </p:cNvCxnSpPr>
+          <p:nvPr/>
+        </p:nvCxnSpPr>
+        <p:spPr>
+          <a:xfrm flipV="1">
+            <a:off x="3781339" y="1085516"/>
+            <a:ext cx="651091" cy="550555"/>
+          </a:xfrm>
+          <a:prstGeom prst="straightConnector1">
+            <a:avLst/>
+          </a:prstGeom>
+          <a:ln>
+            <a:solidFill>
+              <a:srgbClr val="FF0000"/>
+            </a:solidFill>
+            <a:tailEnd type="triangle"/>
+          </a:ln>
+        </p:spPr>
+        <p:style>
+          <a:lnRef idx="2">
+            <a:schemeClr val="accent1"/>
+          </a:lnRef>
+          <a:fillRef idx="0">
+            <a:schemeClr val="accent1"/>
+          </a:fillRef>
+          <a:effectRef idx="1">
+            <a:schemeClr val="accent1"/>
+          </a:effectRef>
+          <a:fontRef idx="minor">
+            <a:schemeClr val="tx1"/>
+          </a:fontRef>
+        </p:style>
+      </p:cxnSp>
+    </p:spTree>
+    <p:extLst>
+      <p:ext uri="{BB962C8B-B14F-4D97-AF65-F5344CB8AC3E}">
+        <p14:creationId xmlns:p14="http://schemas.microsoft.com/office/powerpoint/2010/main" val="987049720"/>
       </p:ext>
     </p:extLst>
   </p:cSld>
@@ -9537,6 +7800,15 @@
 </file>
 
 <file path=customXml/item1.xml><?xml version="1.0" encoding="utf-8"?>
+<p:properties xmlns:p="http://schemas.microsoft.com/office/2006/metadata/properties" xmlns:xsi="http://www.w3.org/2001/XMLSchema-instance" xmlns:pc="http://schemas.microsoft.com/office/infopath/2007/PartnerControls">
+  <documentManagement>
+    <PublishingExpirationDate xmlns="http://schemas.microsoft.com/sharepoint/v3" xsi:nil="true"/>
+    <PublishingStartDate xmlns="http://schemas.microsoft.com/sharepoint/v3" xsi:nil="true"/>
+  </documentManagement>
+</p:properties>
+</file>
+
+<file path=customXml/item2.xml><?xml version="1.0" encoding="utf-8"?>
 <ct:contentTypeSchema xmlns:ct="http://schemas.microsoft.com/office/2006/metadata/contentType" xmlns:ma="http://schemas.microsoft.com/office/2006/metadata/properties/metaAttributes" ct:_="" ma:_="" ma:contentTypeName="Document" ma:contentTypeID="0x010100E28E816AC679FF4C86C22834E825BD05" ma:contentTypeVersion="1" ma:contentTypeDescription="Create a new document." ma:contentTypeScope="" ma:versionID="066e42d507d75a122d0db91dd470f30a">
   <xsd:schema xmlns:xsd="http://www.w3.org/2001/XMLSchema" xmlns:xs="http://www.w3.org/2001/XMLSchema" xmlns:p="http://schemas.microsoft.com/office/2006/metadata/properties" xmlns:ns1="http://schemas.microsoft.com/sharepoint/v3" targetNamespace="http://schemas.microsoft.com/office/2006/metadata/properties" ma:root="true" ma:fieldsID="48c5b5cd9b8d25ff6dd15848836f4270" ns1:_="">
     <xsd:import namespace="http://schemas.microsoft.com/sharepoint/v3"/>
@@ -9668,15 +7940,6 @@
 </ct:contentTypeSchema>
 </file>
 
-<file path=customXml/item2.xml><?xml version="1.0" encoding="utf-8"?>
-<p:properties xmlns:p="http://schemas.microsoft.com/office/2006/metadata/properties" xmlns:xsi="http://www.w3.org/2001/XMLSchema-instance" xmlns:pc="http://schemas.microsoft.com/office/infopath/2007/PartnerControls">
-  <documentManagement>
-    <PublishingExpirationDate xmlns="http://schemas.microsoft.com/sharepoint/v3" xsi:nil="true"/>
-    <PublishingStartDate xmlns="http://schemas.microsoft.com/sharepoint/v3" xsi:nil="true"/>
-  </documentManagement>
-</p:properties>
-</file>
-
 <file path=customXml/item3.xml><?xml version="1.0" encoding="utf-8"?>
 <?mso-contentType ?>
 <FormTemplates xmlns="http://schemas.microsoft.com/sharepoint/v3/contenttype/forms">
@@ -9687,6 +7950,16 @@
 </file>
 
 <file path=customXml/itemProps1.xml><?xml version="1.0" encoding="utf-8"?>
+<ds:datastoreItem xmlns:ds="http://schemas.openxmlformats.org/officeDocument/2006/customXml" ds:itemID="{264D3FE7-A0C8-4453-A806-BCAD6F53B901}">
+  <ds:schemaRefs>
+    <ds:schemaRef ds:uri="http://schemas.microsoft.com/office/2006/metadata/properties"/>
+    <ds:schemaRef ds:uri="http://schemas.microsoft.com/office/infopath/2007/PartnerControls"/>
+    <ds:schemaRef ds:uri="http://schemas.microsoft.com/sharepoint/v3"/>
+  </ds:schemaRefs>
+</ds:datastoreItem>
+</file>
+
+<file path=customXml/itemProps2.xml><?xml version="1.0" encoding="utf-8"?>
 <ds:datastoreItem xmlns:ds="http://schemas.openxmlformats.org/officeDocument/2006/customXml" ds:itemID="{AFA540F8-4ACB-4DC8-920F-A3CE5A42B988}">
   <ds:schemaRefs>
     <ds:schemaRef ds:uri="http://schemas.microsoft.com/office/2006/metadata/contentType"/>
@@ -9704,16 +7977,6 @@
 </ds:datastoreItem>
 </file>
 
-<file path=customXml/itemProps2.xml><?xml version="1.0" encoding="utf-8"?>
-<ds:datastoreItem xmlns:ds="http://schemas.openxmlformats.org/officeDocument/2006/customXml" ds:itemID="{264D3FE7-A0C8-4453-A806-BCAD6F53B901}">
-  <ds:schemaRefs>
-    <ds:schemaRef ds:uri="http://schemas.microsoft.com/office/2006/metadata/properties"/>
-    <ds:schemaRef ds:uri="http://schemas.microsoft.com/office/infopath/2007/PartnerControls"/>
-    <ds:schemaRef ds:uri="http://schemas.microsoft.com/sharepoint/v3"/>
-  </ds:schemaRefs>
-</ds:datastoreItem>
-</file>
-
 <file path=customXml/itemProps3.xml><?xml version="1.0" encoding="utf-8"?>
 <ds:datastoreItem xmlns:ds="http://schemas.openxmlformats.org/officeDocument/2006/customXml" ds:itemID="{6CCB8030-6F99-446F-BD3B-E5E3F435F1FD}">
   <ds:schemaRefs>
